--- a/ML/Chapter11_Training Deep Neural Networks.pptx
+++ b/ML/Chapter11_Training Deep Neural Networks.pptx
@@ -5,15 +5,23 @@
     <p:sldMasterId id="2147483660" r:id="rId1"/>
   </p:sldMasterIdLst>
   <p:notesMasterIdLst>
-    <p:notesMasterId r:id="rId5"/>
+    <p:notesMasterId r:id="rId13"/>
   </p:notesMasterIdLst>
   <p:handoutMasterIdLst>
-    <p:handoutMasterId r:id="rId6"/>
+    <p:handoutMasterId r:id="rId14"/>
   </p:handoutMasterIdLst>
   <p:sldIdLst>
     <p:sldId id="256" r:id="rId2"/>
     <p:sldId id="1143" r:id="rId3"/>
     <p:sldId id="1137" r:id="rId4"/>
+    <p:sldId id="1144" r:id="rId5"/>
+    <p:sldId id="1145" r:id="rId6"/>
+    <p:sldId id="1146" r:id="rId7"/>
+    <p:sldId id="1147" r:id="rId8"/>
+    <p:sldId id="1148" r:id="rId9"/>
+    <p:sldId id="1149" r:id="rId10"/>
+    <p:sldId id="1150" r:id="rId11"/>
+    <p:sldId id="1151" r:id="rId12"/>
   </p:sldIdLst>
   <p:sldSz cx="12192000" cy="6858000"/>
   <p:notesSz cx="6858000" cy="9144000"/>
@@ -124,6 +132,14 @@
           <p14:sldIdLst>
             <p14:sldId id="1143"/>
             <p14:sldId id="1137"/>
+            <p14:sldId id="1144"/>
+            <p14:sldId id="1145"/>
+            <p14:sldId id="1146"/>
+            <p14:sldId id="1147"/>
+            <p14:sldId id="1148"/>
+            <p14:sldId id="1149"/>
+            <p14:sldId id="1150"/>
+            <p14:sldId id="1151"/>
           </p14:sldIdLst>
         </p14:section>
         <p14:section name="자세한 정보" id="{2CC34DB2-6590-42C0-AD4B-A04C6060184E}">
@@ -3028,6 +3044,845 @@
 </p:sld>
 </file>
 
+<file path=ppt/slides/slide10.xml><?xml version="1.0" encoding="utf-8"?>
+<p:sld xmlns:a="http://schemas.openxmlformats.org/drawingml/2006/main" xmlns:r="http://schemas.openxmlformats.org/officeDocument/2006/relationships" xmlns:p="http://schemas.openxmlformats.org/presentationml/2006/main">
+  <p:cSld>
+    <p:spTree>
+      <p:nvGrpSpPr>
+        <p:cNvPr id="1" name="">
+          <a:extLst>
+            <a:ext uri="{FF2B5EF4-FFF2-40B4-BE49-F238E27FC236}">
+              <a16:creationId xmlns:a16="http://schemas.microsoft.com/office/drawing/2014/main" id="{040AACD1-133E-A8E0-DAC4-442DF729EA78}"/>
+            </a:ext>
+          </a:extLst>
+        </p:cNvPr>
+        <p:cNvGrpSpPr/>
+        <p:nvPr/>
+      </p:nvGrpSpPr>
+      <p:grpSpPr>
+        <a:xfrm>
+          <a:off x="0" y="0"/>
+          <a:ext cx="0" cy="0"/>
+          <a:chOff x="0" y="0"/>
+          <a:chExt cx="0" cy="0"/>
+        </a:xfrm>
+      </p:grpSpPr>
+      <p:sp>
+        <p:nvSpPr>
+          <p:cNvPr id="4" name="슬라이드 번호 개체 틀 3">
+            <a:extLst>
+              <a:ext uri="{FF2B5EF4-FFF2-40B4-BE49-F238E27FC236}">
+                <a16:creationId xmlns:a16="http://schemas.microsoft.com/office/drawing/2014/main" id="{C0FC03BD-4073-666F-1FD2-0EC9C7782351}"/>
+              </a:ext>
+            </a:extLst>
+          </p:cNvPr>
+          <p:cNvSpPr>
+            <a:spLocks noGrp="1"/>
+          </p:cNvSpPr>
+          <p:nvPr>
+            <p:ph type="sldNum" sz="quarter" idx="12"/>
+          </p:nvPr>
+        </p:nvSpPr>
+        <p:spPr>
+          <a:xfrm>
+            <a:off x="10514011" y="6036261"/>
+            <a:ext cx="753545" cy="365125"/>
+          </a:xfrm>
+        </p:spPr>
+        <p:txBody>
+          <a:bodyPr/>
+          <a:lstStyle/>
+          <a:p>
+            <a:fld id="{D57F1E4F-1CFF-5643-939E-217C01CDF565}" type="slidenum">
+              <a:rPr lang="en-US" smtClean="0"/>
+              <a:pPr/>
+              <a:t>10</a:t>
+            </a:fld>
+            <a:endParaRPr lang="en-US" dirty="0"/>
+          </a:p>
+        </p:txBody>
+      </p:sp>
+      <p:sp>
+        <p:nvSpPr>
+          <p:cNvPr id="3" name="제목 1">
+            <a:extLst>
+              <a:ext uri="{FF2B5EF4-FFF2-40B4-BE49-F238E27FC236}">
+                <a16:creationId xmlns:a16="http://schemas.microsoft.com/office/drawing/2014/main" id="{90E8A6FF-936D-03D8-F209-CB137EAF7E26}"/>
+              </a:ext>
+            </a:extLst>
+          </p:cNvPr>
+          <p:cNvSpPr txBox="1">
+            <a:spLocks/>
+          </p:cNvSpPr>
+          <p:nvPr/>
+        </p:nvSpPr>
+        <p:spPr>
+          <a:xfrm>
+            <a:off x="475645" y="481983"/>
+            <a:ext cx="10353762" cy="766439"/>
+          </a:xfrm>
+          <a:prstGeom prst="rect">
+            <a:avLst/>
+          </a:prstGeom>
+        </p:spPr>
+        <p:txBody>
+          <a:bodyPr vert="horz" lIns="91440" tIns="45720" rIns="91440" bIns="45720" rtlCol="0" anchor="ctr">
+            <a:normAutofit/>
+          </a:bodyPr>
+          <a:lstStyle>
+            <a:lvl1pPr algn="ctr" defTabSz="914400" rtl="0" eaLnBrk="1" latinLnBrk="1" hangingPunct="1">
+              <a:lnSpc>
+                <a:spcPct val="90000"/>
+              </a:lnSpc>
+              <a:spcBef>
+                <a:spcPct val="0"/>
+              </a:spcBef>
+              <a:buNone/>
+              <a:defRPr sz="3200" kern="1200" cap="all" baseline="0">
+                <a:solidFill>
+                  <a:schemeClr val="tx1"/>
+                </a:solidFill>
+                <a:effectLst/>
+                <a:latin typeface="Batang" panose="02030600000101010101" pitchFamily="18" charset="-127"/>
+                <a:ea typeface="Batang" panose="02030600000101010101" pitchFamily="18" charset="-127"/>
+                <a:cs typeface="+mj-cs"/>
+              </a:defRPr>
+            </a:lvl1pPr>
+          </a:lstStyle>
+          <a:p>
+            <a:pPr algn="l">
+              <a:lnSpc>
+                <a:spcPct val="150000"/>
+              </a:lnSpc>
+            </a:pPr>
+            <a:r>
+              <a:rPr lang="en-US" altLang="ko-KR" sz="2800" b="1" cap="none" dirty="0">
+                <a:latin typeface="D2Coding" panose="020B0609020101020101" pitchFamily="49" charset="-127"/>
+                <a:ea typeface="D2Coding" panose="020B0609020101020101" pitchFamily="49" charset="-127"/>
+              </a:rPr>
+              <a:t>Summary </a:t>
+            </a:r>
+          </a:p>
+        </p:txBody>
+      </p:sp>
+      <p:sp>
+        <p:nvSpPr>
+          <p:cNvPr id="9" name="AutoShape 3" descr="The impact of using the gradient clipping technique in the training stage.">
+            <a:extLst>
+              <a:ext uri="{FF2B5EF4-FFF2-40B4-BE49-F238E27FC236}">
+                <a16:creationId xmlns:a16="http://schemas.microsoft.com/office/drawing/2014/main" id="{0627B14D-DAB9-735D-C93D-210C0FC4B630}"/>
+              </a:ext>
+            </a:extLst>
+          </p:cNvPr>
+          <p:cNvSpPr>
+            <a:spLocks noChangeAspect="1" noChangeArrowheads="1"/>
+          </p:cNvSpPr>
+          <p:nvPr/>
+        </p:nvSpPr>
+        <p:spPr bwMode="auto">
+          <a:xfrm>
+            <a:off x="5943600" y="3276600"/>
+            <a:ext cx="304800" cy="304800"/>
+          </a:xfrm>
+          <a:prstGeom prst="rect">
+            <a:avLst/>
+          </a:prstGeom>
+          <a:noFill/>
+          <a:extLst>
+            <a:ext uri="{909E8E84-426E-40DD-AFC4-6F175D3DCCD1}">
+              <a14:hiddenFill xmlns:a14="http://schemas.microsoft.com/office/drawing/2010/main">
+                <a:solidFill>
+                  <a:srgbClr val="FFFFFF"/>
+                </a:solidFill>
+              </a14:hiddenFill>
+            </a:ext>
+          </a:extLst>
+        </p:spPr>
+        <p:txBody>
+          <a:bodyPr vert="horz" wrap="square" lIns="91440" tIns="45720" rIns="91440" bIns="45720" numCol="1" anchor="t" anchorCtr="0" compatLnSpc="1">
+            <a:prstTxWarp prst="textNoShape">
+              <a:avLst/>
+            </a:prstTxWarp>
+          </a:bodyPr>
+          <a:lstStyle/>
+          <a:p>
+            <a:endParaRPr lang="ko-KR" altLang="en-US"/>
+          </a:p>
+        </p:txBody>
+      </p:sp>
+      <p:sp>
+        <p:nvSpPr>
+          <p:cNvPr id="5" name="TextBox 4">
+            <a:extLst>
+              <a:ext uri="{FF2B5EF4-FFF2-40B4-BE49-F238E27FC236}">
+                <a16:creationId xmlns:a16="http://schemas.microsoft.com/office/drawing/2014/main" id="{A6DD40D1-E20F-03EC-C5C9-3F818DC810F8}"/>
+              </a:ext>
+            </a:extLst>
+          </p:cNvPr>
+          <p:cNvSpPr txBox="1"/>
+          <p:nvPr/>
+        </p:nvSpPr>
+        <p:spPr>
+          <a:xfrm>
+            <a:off x="602734" y="1712000"/>
+            <a:ext cx="11291331" cy="3970318"/>
+          </a:xfrm>
+          <a:prstGeom prst="rect">
+            <a:avLst/>
+          </a:prstGeom>
+          <a:noFill/>
+        </p:spPr>
+        <p:txBody>
+          <a:bodyPr wrap="square">
+            <a:spAutoFit/>
+          </a:bodyPr>
+          <a:lstStyle/>
+          <a:p>
+            <a:r>
+              <a:rPr lang="ko-KR" altLang="en-US" dirty="0">
+                <a:latin typeface="D2Coding" panose="020B0609020101020101" pitchFamily="49" charset="-127"/>
+                <a:ea typeface="D2Coding" panose="020B0609020101020101" pitchFamily="49" charset="-127"/>
+              </a:rPr>
+              <a:t>딥러닝 모델이 거대해질 때 발생하는 병목 현상을 해결</a:t>
+            </a:r>
+            <a:r>
+              <a:rPr lang="en-US" altLang="ko-KR" dirty="0">
+                <a:latin typeface="D2Coding" panose="020B0609020101020101" pitchFamily="49" charset="-127"/>
+                <a:ea typeface="D2Coding" panose="020B0609020101020101" pitchFamily="49" charset="-127"/>
+              </a:rPr>
+              <a:t> </a:t>
+            </a:r>
+            <a:r>
+              <a:rPr lang="ko-KR" altLang="en-US" dirty="0">
+                <a:latin typeface="D2Coding" panose="020B0609020101020101" pitchFamily="49" charset="-127"/>
+                <a:ea typeface="D2Coding" panose="020B0609020101020101" pitchFamily="49" charset="-127"/>
+              </a:rPr>
+              <a:t>방안</a:t>
+            </a:r>
+            <a:endParaRPr lang="en-US" altLang="ko-KR" dirty="0">
+              <a:latin typeface="D2Coding" panose="020B0609020101020101" pitchFamily="49" charset="-127"/>
+              <a:ea typeface="D2Coding" panose="020B0609020101020101" pitchFamily="49" charset="-127"/>
+            </a:endParaRPr>
+          </a:p>
+          <a:p>
+            <a:endParaRPr lang="en-US" altLang="ko-KR" dirty="0">
+              <a:latin typeface="D2Coding" panose="020B0609020101020101" pitchFamily="49" charset="-127"/>
+              <a:ea typeface="D2Coding" panose="020B0609020101020101" pitchFamily="49" charset="-127"/>
+            </a:endParaRPr>
+          </a:p>
+          <a:p>
+            <a:endParaRPr lang="en-US" altLang="ko-KR" dirty="0">
+              <a:latin typeface="D2Coding" panose="020B0609020101020101" pitchFamily="49" charset="-127"/>
+              <a:ea typeface="D2Coding" panose="020B0609020101020101" pitchFamily="49" charset="-127"/>
+            </a:endParaRPr>
+          </a:p>
+          <a:p>
+            <a:pPr marL="285750" indent="-285750">
+              <a:buFont typeface="Wingdings" panose="05000000000000000000" pitchFamily="2" charset="2"/>
+              <a:buChar char="v"/>
+            </a:pPr>
+            <a:r>
+              <a:rPr lang="ko-KR" altLang="en-US" dirty="0">
+                <a:latin typeface="D2Coding" panose="020B0609020101020101" pitchFamily="49" charset="-127"/>
+                <a:ea typeface="D2Coding" panose="020B0609020101020101" pitchFamily="49" charset="-127"/>
+              </a:rPr>
+              <a:t>가중치 초기화 </a:t>
+            </a:r>
+            <a:r>
+              <a:rPr lang="en-US" altLang="ko-KR" dirty="0">
+                <a:latin typeface="D2Coding" panose="020B0609020101020101" pitchFamily="49" charset="-127"/>
+                <a:ea typeface="D2Coding" panose="020B0609020101020101" pitchFamily="49" charset="-127"/>
+              </a:rPr>
+              <a:t>(</a:t>
+            </a:r>
+            <a:r>
+              <a:rPr lang="en-US" altLang="ko-KR" dirty="0" err="1">
+                <a:latin typeface="D2Coding" panose="020B0609020101020101" pitchFamily="49" charset="-127"/>
+                <a:ea typeface="D2Coding" panose="020B0609020101020101" pitchFamily="49" charset="-127"/>
+              </a:rPr>
+              <a:t>kernel_initializer</a:t>
+            </a:r>
+            <a:r>
+              <a:rPr lang="en-US" altLang="ko-KR" dirty="0">
+                <a:latin typeface="D2Coding" panose="020B0609020101020101" pitchFamily="49" charset="-127"/>
+                <a:ea typeface="D2Coding" panose="020B0609020101020101" pitchFamily="49" charset="-127"/>
+              </a:rPr>
+              <a:t>): </a:t>
+            </a:r>
+            <a:r>
+              <a:rPr lang="ko-KR" altLang="en-US" dirty="0">
+                <a:latin typeface="D2Coding" panose="020B0609020101020101" pitchFamily="49" charset="-127"/>
+                <a:ea typeface="D2Coding" panose="020B0609020101020101" pitchFamily="49" charset="-127"/>
+              </a:rPr>
+              <a:t>처음 출발할 때 가중치를 적절한 크기로 잡아서 신호가 소실되거나 폭발하는 것을 방지</a:t>
+            </a:r>
+            <a:endParaRPr lang="en-US" altLang="ko-KR" dirty="0">
+              <a:latin typeface="D2Coding" panose="020B0609020101020101" pitchFamily="49" charset="-127"/>
+              <a:ea typeface="D2Coding" panose="020B0609020101020101" pitchFamily="49" charset="-127"/>
+            </a:endParaRPr>
+          </a:p>
+          <a:p>
+            <a:pPr marL="285750" indent="-285750">
+              <a:buFont typeface="Wingdings" panose="05000000000000000000" pitchFamily="2" charset="2"/>
+              <a:buChar char="v"/>
+            </a:pPr>
+            <a:endParaRPr lang="en-US" altLang="ko-KR" dirty="0">
+              <a:latin typeface="D2Coding" panose="020B0609020101020101" pitchFamily="49" charset="-127"/>
+              <a:ea typeface="D2Coding" panose="020B0609020101020101" pitchFamily="49" charset="-127"/>
+            </a:endParaRPr>
+          </a:p>
+          <a:p>
+            <a:pPr marL="285750" indent="-285750">
+              <a:buFont typeface="Wingdings" panose="05000000000000000000" pitchFamily="2" charset="2"/>
+              <a:buChar char="v"/>
+            </a:pPr>
+            <a:r>
+              <a:rPr lang="ko-KR" altLang="en-US" dirty="0">
+                <a:latin typeface="D2Coding" panose="020B0609020101020101" pitchFamily="49" charset="-127"/>
+                <a:ea typeface="D2Coding" panose="020B0609020101020101" pitchFamily="49" charset="-127"/>
+              </a:rPr>
+              <a:t>활성화 함수 </a:t>
+            </a:r>
+            <a:r>
+              <a:rPr lang="en-US" altLang="ko-KR" dirty="0">
+                <a:latin typeface="D2Coding" panose="020B0609020101020101" pitchFamily="49" charset="-127"/>
+                <a:ea typeface="D2Coding" panose="020B0609020101020101" pitchFamily="49" charset="-127"/>
+              </a:rPr>
+              <a:t>(activation): </a:t>
+            </a:r>
+            <a:r>
+              <a:rPr lang="en-US" altLang="ko-KR" dirty="0" err="1">
+                <a:latin typeface="D2Coding" panose="020B0609020101020101" pitchFamily="49" charset="-127"/>
+                <a:ea typeface="D2Coding" panose="020B0609020101020101" pitchFamily="49" charset="-127"/>
+              </a:rPr>
+              <a:t>ReLU</a:t>
+            </a:r>
+            <a:r>
+              <a:rPr lang="en-US" altLang="ko-KR" dirty="0">
+                <a:latin typeface="D2Coding" panose="020B0609020101020101" pitchFamily="49" charset="-127"/>
+                <a:ea typeface="D2Coding" panose="020B0609020101020101" pitchFamily="49" charset="-127"/>
+              </a:rPr>
+              <a:t> </a:t>
+            </a:r>
+            <a:r>
+              <a:rPr lang="ko-KR" altLang="en-US" dirty="0">
+                <a:latin typeface="D2Coding" panose="020B0609020101020101" pitchFamily="49" charset="-127"/>
+                <a:ea typeface="D2Coding" panose="020B0609020101020101" pitchFamily="49" charset="-127"/>
+              </a:rPr>
+              <a:t>계열이나 </a:t>
+            </a:r>
+            <a:r>
+              <a:rPr lang="en-US" altLang="ko-KR" dirty="0">
+                <a:latin typeface="D2Coding" panose="020B0609020101020101" pitchFamily="49" charset="-127"/>
+                <a:ea typeface="D2Coding" panose="020B0609020101020101" pitchFamily="49" charset="-127"/>
+              </a:rPr>
+              <a:t>ELU</a:t>
+            </a:r>
+            <a:r>
+              <a:rPr lang="ko-KR" altLang="en-US" dirty="0">
+                <a:latin typeface="D2Coding" panose="020B0609020101020101" pitchFamily="49" charset="-127"/>
+                <a:ea typeface="D2Coding" panose="020B0609020101020101" pitchFamily="49" charset="-127"/>
+              </a:rPr>
+              <a:t>를 써서 뉴런이 중간에 죽어버리는 현상</a:t>
+            </a:r>
+            <a:r>
+              <a:rPr lang="en-US" altLang="ko-KR" dirty="0">
+                <a:latin typeface="D2Coding" panose="020B0609020101020101" pitchFamily="49" charset="-127"/>
+                <a:ea typeface="D2Coding" panose="020B0609020101020101" pitchFamily="49" charset="-127"/>
+              </a:rPr>
+              <a:t>(Dying </a:t>
+            </a:r>
+            <a:r>
+              <a:rPr lang="en-US" altLang="ko-KR" dirty="0" err="1">
+                <a:latin typeface="D2Coding" panose="020B0609020101020101" pitchFamily="49" charset="-127"/>
+                <a:ea typeface="D2Coding" panose="020B0609020101020101" pitchFamily="49" charset="-127"/>
+              </a:rPr>
+              <a:t>ReLU</a:t>
+            </a:r>
+            <a:r>
+              <a:rPr lang="en-US" altLang="ko-KR" dirty="0">
+                <a:latin typeface="D2Coding" panose="020B0609020101020101" pitchFamily="49" charset="-127"/>
+                <a:ea typeface="D2Coding" panose="020B0609020101020101" pitchFamily="49" charset="-127"/>
+              </a:rPr>
+              <a:t>)</a:t>
+            </a:r>
+            <a:r>
+              <a:rPr lang="ko-KR" altLang="en-US" dirty="0">
+                <a:latin typeface="D2Coding" panose="020B0609020101020101" pitchFamily="49" charset="-127"/>
+                <a:ea typeface="D2Coding" panose="020B0609020101020101" pitchFamily="49" charset="-127"/>
+              </a:rPr>
+              <a:t>을 차단</a:t>
+            </a:r>
+            <a:endParaRPr lang="en-US" altLang="ko-KR" dirty="0">
+              <a:latin typeface="D2Coding" panose="020B0609020101020101" pitchFamily="49" charset="-127"/>
+              <a:ea typeface="D2Coding" panose="020B0609020101020101" pitchFamily="49" charset="-127"/>
+            </a:endParaRPr>
+          </a:p>
+          <a:p>
+            <a:pPr marL="285750" indent="-285750">
+              <a:buFont typeface="Wingdings" panose="05000000000000000000" pitchFamily="2" charset="2"/>
+              <a:buChar char="v"/>
+            </a:pPr>
+            <a:endParaRPr lang="en-US" altLang="ko-KR" dirty="0">
+              <a:latin typeface="D2Coding" panose="020B0609020101020101" pitchFamily="49" charset="-127"/>
+              <a:ea typeface="D2Coding" panose="020B0609020101020101" pitchFamily="49" charset="-127"/>
+            </a:endParaRPr>
+          </a:p>
+          <a:p>
+            <a:pPr marL="285750" indent="-285750">
+              <a:buFont typeface="Wingdings" panose="05000000000000000000" pitchFamily="2" charset="2"/>
+              <a:buChar char="v"/>
+            </a:pPr>
+            <a:r>
+              <a:rPr lang="ko-KR" altLang="en-US" dirty="0">
+                <a:latin typeface="D2Coding" panose="020B0609020101020101" pitchFamily="49" charset="-127"/>
+                <a:ea typeface="D2Coding" panose="020B0609020101020101" pitchFamily="49" charset="-127"/>
+              </a:rPr>
+              <a:t>배치 정규화 </a:t>
+            </a:r>
+            <a:r>
+              <a:rPr lang="en-US" altLang="ko-KR" dirty="0">
+                <a:latin typeface="D2Coding" panose="020B0609020101020101" pitchFamily="49" charset="-127"/>
+                <a:ea typeface="D2Coding" panose="020B0609020101020101" pitchFamily="49" charset="-127"/>
+              </a:rPr>
+              <a:t>(</a:t>
+            </a:r>
+            <a:r>
+              <a:rPr lang="en-US" altLang="ko-KR" dirty="0" err="1">
+                <a:latin typeface="D2Coding" panose="020B0609020101020101" pitchFamily="49" charset="-127"/>
+                <a:ea typeface="D2Coding" panose="020B0609020101020101" pitchFamily="49" charset="-127"/>
+              </a:rPr>
+              <a:t>BatchNormalization</a:t>
+            </a:r>
+            <a:r>
+              <a:rPr lang="en-US" altLang="ko-KR" dirty="0">
+                <a:latin typeface="D2Coding" panose="020B0609020101020101" pitchFamily="49" charset="-127"/>
+                <a:ea typeface="D2Coding" panose="020B0609020101020101" pitchFamily="49" charset="-127"/>
+              </a:rPr>
+              <a:t>): </a:t>
+            </a:r>
+            <a:r>
+              <a:rPr lang="ko-KR" altLang="en-US" dirty="0">
+                <a:latin typeface="D2Coding" panose="020B0609020101020101" pitchFamily="49" charset="-127"/>
+                <a:ea typeface="D2Coding" panose="020B0609020101020101" pitchFamily="49" charset="-127"/>
+              </a:rPr>
+              <a:t>레이어 사이마다 데이터 세탁기</a:t>
+            </a:r>
+            <a:r>
+              <a:rPr lang="en-US" altLang="ko-KR" dirty="0">
+                <a:latin typeface="D2Coding" panose="020B0609020101020101" pitchFamily="49" charset="-127"/>
+                <a:ea typeface="D2Coding" panose="020B0609020101020101" pitchFamily="49" charset="-127"/>
+              </a:rPr>
+              <a:t>(</a:t>
+            </a:r>
+            <a:r>
+              <a:rPr lang="ko-KR" altLang="en-US" dirty="0">
+                <a:latin typeface="D2Coding" panose="020B0609020101020101" pitchFamily="49" charset="-127"/>
+                <a:ea typeface="D2Coding" panose="020B0609020101020101" pitchFamily="49" charset="-127"/>
+              </a:rPr>
+              <a:t>평균 </a:t>
+            </a:r>
+            <a:r>
+              <a:rPr lang="en-US" altLang="ko-KR" dirty="0">
+                <a:latin typeface="D2Coding" panose="020B0609020101020101" pitchFamily="49" charset="-127"/>
+                <a:ea typeface="D2Coding" panose="020B0609020101020101" pitchFamily="49" charset="-127"/>
+              </a:rPr>
+              <a:t>0, </a:t>
+            </a:r>
+            <a:r>
+              <a:rPr lang="ko-KR" altLang="en-US" dirty="0">
+                <a:latin typeface="D2Coding" panose="020B0609020101020101" pitchFamily="49" charset="-127"/>
+                <a:ea typeface="D2Coding" panose="020B0609020101020101" pitchFamily="49" charset="-127"/>
+              </a:rPr>
+              <a:t>분산 </a:t>
+            </a:r>
+            <a:r>
+              <a:rPr lang="en-US" altLang="ko-KR" dirty="0">
+                <a:latin typeface="D2Coding" panose="020B0609020101020101" pitchFamily="49" charset="-127"/>
+                <a:ea typeface="D2Coding" panose="020B0609020101020101" pitchFamily="49" charset="-127"/>
+              </a:rPr>
+              <a:t>1)</a:t>
+            </a:r>
+            <a:r>
+              <a:rPr lang="ko-KR" altLang="en-US" dirty="0">
+                <a:latin typeface="D2Coding" panose="020B0609020101020101" pitchFamily="49" charset="-127"/>
+                <a:ea typeface="D2Coding" panose="020B0609020101020101" pitchFamily="49" charset="-127"/>
+              </a:rPr>
+              <a:t>를 두어 </a:t>
+            </a:r>
+            <a:r>
+              <a:rPr lang="ko-KR" altLang="en-US" dirty="0" err="1">
+                <a:latin typeface="D2Coding" panose="020B0609020101020101" pitchFamily="49" charset="-127"/>
+                <a:ea typeface="D2Coding" panose="020B0609020101020101" pitchFamily="49" charset="-127"/>
+              </a:rPr>
+              <a:t>경사하강법이</a:t>
+            </a:r>
+            <a:r>
+              <a:rPr lang="ko-KR" altLang="en-US" dirty="0">
+                <a:latin typeface="D2Coding" panose="020B0609020101020101" pitchFamily="49" charset="-127"/>
+                <a:ea typeface="D2Coding" panose="020B0609020101020101" pitchFamily="49" charset="-127"/>
+              </a:rPr>
+              <a:t> 지그재그로 헤매지 않고 직진하게 </a:t>
+            </a:r>
+            <a:r>
+              <a:rPr lang="ko-KR" altLang="en-US" dirty="0" err="1">
+                <a:latin typeface="D2Coding" panose="020B0609020101020101" pitchFamily="49" charset="-127"/>
+                <a:ea typeface="D2Coding" panose="020B0609020101020101" pitchFamily="49" charset="-127"/>
+              </a:rPr>
+              <a:t>만듬</a:t>
+            </a:r>
+            <a:endParaRPr lang="en-US" altLang="ko-KR" dirty="0">
+              <a:latin typeface="D2Coding" panose="020B0609020101020101" pitchFamily="49" charset="-127"/>
+              <a:ea typeface="D2Coding" panose="020B0609020101020101" pitchFamily="49" charset="-127"/>
+            </a:endParaRPr>
+          </a:p>
+          <a:p>
+            <a:pPr marL="285750" indent="-285750">
+              <a:buFont typeface="Wingdings" panose="05000000000000000000" pitchFamily="2" charset="2"/>
+              <a:buChar char="v"/>
+            </a:pPr>
+            <a:endParaRPr lang="en-US" altLang="ko-KR" dirty="0">
+              <a:latin typeface="D2Coding" panose="020B0609020101020101" pitchFamily="49" charset="-127"/>
+              <a:ea typeface="D2Coding" panose="020B0609020101020101" pitchFamily="49" charset="-127"/>
+            </a:endParaRPr>
+          </a:p>
+          <a:p>
+            <a:pPr marL="285750" indent="-285750">
+              <a:buFont typeface="Wingdings" panose="05000000000000000000" pitchFamily="2" charset="2"/>
+              <a:buChar char="v"/>
+            </a:pPr>
+            <a:r>
+              <a:rPr lang="ko-KR" altLang="en-US" dirty="0">
+                <a:latin typeface="D2Coding" panose="020B0609020101020101" pitchFamily="49" charset="-127"/>
+                <a:ea typeface="D2Coding" panose="020B0609020101020101" pitchFamily="49" charset="-127"/>
+              </a:rPr>
+              <a:t>전이 학습 </a:t>
+            </a:r>
+            <a:r>
+              <a:rPr lang="en-US" altLang="ko-KR" dirty="0">
+                <a:latin typeface="D2Coding" panose="020B0609020101020101" pitchFamily="49" charset="-127"/>
+                <a:ea typeface="D2Coding" panose="020B0609020101020101" pitchFamily="49" charset="-127"/>
+              </a:rPr>
+              <a:t>(Transfer Learning): </a:t>
+            </a:r>
+            <a:r>
+              <a:rPr lang="ko-KR" altLang="en-US" dirty="0">
+                <a:latin typeface="D2Coding" panose="020B0609020101020101" pitchFamily="49" charset="-127"/>
+                <a:ea typeface="D2Coding" panose="020B0609020101020101" pitchFamily="49" charset="-127"/>
+              </a:rPr>
+              <a:t>맨땅에 헤딩하지 않고 천재 모델의 뇌</a:t>
+            </a:r>
+            <a:r>
+              <a:rPr lang="en-US" altLang="ko-KR" dirty="0">
+                <a:latin typeface="D2Coding" panose="020B0609020101020101" pitchFamily="49" charset="-127"/>
+                <a:ea typeface="D2Coding" panose="020B0609020101020101" pitchFamily="49" charset="-127"/>
+              </a:rPr>
+              <a:t>(</a:t>
+            </a:r>
+            <a:r>
+              <a:rPr lang="ko-KR" altLang="en-US" dirty="0">
+                <a:latin typeface="D2Coding" panose="020B0609020101020101" pitchFamily="49" charset="-127"/>
+                <a:ea typeface="D2Coding" panose="020B0609020101020101" pitchFamily="49" charset="-127"/>
+              </a:rPr>
+              <a:t>아래쪽 레이어</a:t>
+            </a:r>
+            <a:r>
+              <a:rPr lang="en-US" altLang="ko-KR" dirty="0">
+                <a:latin typeface="D2Coding" panose="020B0609020101020101" pitchFamily="49" charset="-127"/>
+                <a:ea typeface="D2Coding" panose="020B0609020101020101" pitchFamily="49" charset="-127"/>
+              </a:rPr>
+              <a:t>)</a:t>
+            </a:r>
+            <a:r>
+              <a:rPr lang="ko-KR" altLang="en-US" dirty="0">
+                <a:latin typeface="D2Coding" panose="020B0609020101020101" pitchFamily="49" charset="-127"/>
+                <a:ea typeface="D2Coding" panose="020B0609020101020101" pitchFamily="49" charset="-127"/>
+              </a:rPr>
+              <a:t>를 빌려와 속성 과외</a:t>
+            </a:r>
+            <a:r>
+              <a:rPr lang="en-US" altLang="ko-KR" dirty="0">
+                <a:latin typeface="D2Coding" panose="020B0609020101020101" pitchFamily="49" charset="-127"/>
+                <a:ea typeface="D2Coding" panose="020B0609020101020101" pitchFamily="49" charset="-127"/>
+              </a:rPr>
+              <a:t>(Fine-tuning)</a:t>
+            </a:r>
+            <a:r>
+              <a:rPr lang="ko-KR" altLang="en-US" dirty="0">
+                <a:latin typeface="D2Coding" panose="020B0609020101020101" pitchFamily="49" charset="-127"/>
+                <a:ea typeface="D2Coding" panose="020B0609020101020101" pitchFamily="49" charset="-127"/>
+              </a:rPr>
+              <a:t>를 시킴</a:t>
+            </a:r>
+            <a:endParaRPr lang="ko-KR" altLang="en-US" sz="1700" dirty="0">
+              <a:latin typeface="D2Coding" panose="020B0609020101020101" pitchFamily="49" charset="-127"/>
+              <a:ea typeface="D2Coding" panose="020B0609020101020101" pitchFamily="49" charset="-127"/>
+            </a:endParaRPr>
+          </a:p>
+        </p:txBody>
+      </p:sp>
+    </p:spTree>
+    <p:extLst>
+      <p:ext uri="{BB962C8B-B14F-4D97-AF65-F5344CB8AC3E}">
+        <p14:creationId xmlns:p14="http://schemas.microsoft.com/office/powerpoint/2010/main" val="3372254454"/>
+      </p:ext>
+    </p:extLst>
+  </p:cSld>
+  <p:clrMapOvr>
+    <a:masterClrMapping/>
+  </p:clrMapOvr>
+</p:sld>
+</file>
+
+<file path=ppt/slides/slide11.xml><?xml version="1.0" encoding="utf-8"?>
+<p:sld xmlns:a="http://schemas.openxmlformats.org/drawingml/2006/main" xmlns:r="http://schemas.openxmlformats.org/officeDocument/2006/relationships" xmlns:p="http://schemas.openxmlformats.org/presentationml/2006/main">
+  <p:cSld>
+    <p:spTree>
+      <p:nvGrpSpPr>
+        <p:cNvPr id="1" name="">
+          <a:extLst>
+            <a:ext uri="{FF2B5EF4-FFF2-40B4-BE49-F238E27FC236}">
+              <a16:creationId xmlns:a16="http://schemas.microsoft.com/office/drawing/2014/main" id="{F7D4C612-D94A-3537-635E-EE224D8F4C12}"/>
+            </a:ext>
+          </a:extLst>
+        </p:cNvPr>
+        <p:cNvGrpSpPr/>
+        <p:nvPr/>
+      </p:nvGrpSpPr>
+      <p:grpSpPr>
+        <a:xfrm>
+          <a:off x="0" y="0"/>
+          <a:ext cx="0" cy="0"/>
+          <a:chOff x="0" y="0"/>
+          <a:chExt cx="0" cy="0"/>
+        </a:xfrm>
+      </p:grpSpPr>
+      <p:sp>
+        <p:nvSpPr>
+          <p:cNvPr id="4" name="슬라이드 번호 개체 틀 3">
+            <a:extLst>
+              <a:ext uri="{FF2B5EF4-FFF2-40B4-BE49-F238E27FC236}">
+                <a16:creationId xmlns:a16="http://schemas.microsoft.com/office/drawing/2014/main" id="{D466AF1F-41D2-6AF4-DFD8-DE79D86F95E6}"/>
+              </a:ext>
+            </a:extLst>
+          </p:cNvPr>
+          <p:cNvSpPr>
+            <a:spLocks noGrp="1"/>
+          </p:cNvSpPr>
+          <p:nvPr>
+            <p:ph type="sldNum" sz="quarter" idx="12"/>
+          </p:nvPr>
+        </p:nvSpPr>
+        <p:spPr>
+          <a:xfrm>
+            <a:off x="10514011" y="6036261"/>
+            <a:ext cx="753545" cy="365125"/>
+          </a:xfrm>
+        </p:spPr>
+        <p:txBody>
+          <a:bodyPr/>
+          <a:lstStyle/>
+          <a:p>
+            <a:fld id="{D57F1E4F-1CFF-5643-939E-217C01CDF565}" type="slidenum">
+              <a:rPr lang="en-US" smtClean="0"/>
+              <a:pPr/>
+              <a:t>11</a:t>
+            </a:fld>
+            <a:endParaRPr lang="en-US" dirty="0"/>
+          </a:p>
+        </p:txBody>
+      </p:sp>
+      <p:sp>
+        <p:nvSpPr>
+          <p:cNvPr id="3" name="제목 1">
+            <a:extLst>
+              <a:ext uri="{FF2B5EF4-FFF2-40B4-BE49-F238E27FC236}">
+                <a16:creationId xmlns:a16="http://schemas.microsoft.com/office/drawing/2014/main" id="{F8B7EADE-95A5-435C-1CFC-E960540EFB7D}"/>
+              </a:ext>
+            </a:extLst>
+          </p:cNvPr>
+          <p:cNvSpPr txBox="1">
+            <a:spLocks/>
+          </p:cNvSpPr>
+          <p:nvPr/>
+        </p:nvSpPr>
+        <p:spPr>
+          <a:xfrm>
+            <a:off x="475645" y="481983"/>
+            <a:ext cx="10353762" cy="766439"/>
+          </a:xfrm>
+          <a:prstGeom prst="rect">
+            <a:avLst/>
+          </a:prstGeom>
+        </p:spPr>
+        <p:txBody>
+          <a:bodyPr vert="horz" lIns="91440" tIns="45720" rIns="91440" bIns="45720" rtlCol="0" anchor="ctr">
+            <a:normAutofit/>
+          </a:bodyPr>
+          <a:lstStyle>
+            <a:lvl1pPr algn="ctr" defTabSz="914400" rtl="0" eaLnBrk="1" latinLnBrk="1" hangingPunct="1">
+              <a:lnSpc>
+                <a:spcPct val="90000"/>
+              </a:lnSpc>
+              <a:spcBef>
+                <a:spcPct val="0"/>
+              </a:spcBef>
+              <a:buNone/>
+              <a:defRPr sz="3200" kern="1200" cap="all" baseline="0">
+                <a:solidFill>
+                  <a:schemeClr val="tx1"/>
+                </a:solidFill>
+                <a:effectLst/>
+                <a:latin typeface="Batang" panose="02030600000101010101" pitchFamily="18" charset="-127"/>
+                <a:ea typeface="Batang" panose="02030600000101010101" pitchFamily="18" charset="-127"/>
+                <a:cs typeface="+mj-cs"/>
+              </a:defRPr>
+            </a:lvl1pPr>
+          </a:lstStyle>
+          <a:p>
+            <a:pPr algn="l">
+              <a:lnSpc>
+                <a:spcPct val="150000"/>
+              </a:lnSpc>
+            </a:pPr>
+            <a:r>
+              <a:rPr lang="en-US" altLang="ko-KR" sz="2800" b="1" cap="none" dirty="0">
+                <a:latin typeface="D2Coding" panose="020B0609020101020101" pitchFamily="49" charset="-127"/>
+                <a:ea typeface="D2Coding" panose="020B0609020101020101" pitchFamily="49" charset="-127"/>
+              </a:rPr>
+              <a:t>Faster Optimizers </a:t>
+            </a:r>
+          </a:p>
+        </p:txBody>
+      </p:sp>
+      <p:sp>
+        <p:nvSpPr>
+          <p:cNvPr id="9" name="AutoShape 3" descr="The impact of using the gradient clipping technique in the training stage.">
+            <a:extLst>
+              <a:ext uri="{FF2B5EF4-FFF2-40B4-BE49-F238E27FC236}">
+                <a16:creationId xmlns:a16="http://schemas.microsoft.com/office/drawing/2014/main" id="{E558A998-54B1-8CBF-A397-0312FEC12DE4}"/>
+              </a:ext>
+            </a:extLst>
+          </p:cNvPr>
+          <p:cNvSpPr>
+            <a:spLocks noChangeAspect="1" noChangeArrowheads="1"/>
+          </p:cNvSpPr>
+          <p:nvPr/>
+        </p:nvSpPr>
+        <p:spPr bwMode="auto">
+          <a:xfrm>
+            <a:off x="5943600" y="3276600"/>
+            <a:ext cx="304800" cy="304800"/>
+          </a:xfrm>
+          <a:prstGeom prst="rect">
+            <a:avLst/>
+          </a:prstGeom>
+          <a:noFill/>
+          <a:extLst>
+            <a:ext uri="{909E8E84-426E-40DD-AFC4-6F175D3DCCD1}">
+              <a14:hiddenFill xmlns:a14="http://schemas.microsoft.com/office/drawing/2010/main">
+                <a:solidFill>
+                  <a:srgbClr val="FFFFFF"/>
+                </a:solidFill>
+              </a14:hiddenFill>
+            </a:ext>
+          </a:extLst>
+        </p:spPr>
+        <p:txBody>
+          <a:bodyPr vert="horz" wrap="square" lIns="91440" tIns="45720" rIns="91440" bIns="45720" numCol="1" anchor="t" anchorCtr="0" compatLnSpc="1">
+            <a:prstTxWarp prst="textNoShape">
+              <a:avLst/>
+            </a:prstTxWarp>
+          </a:bodyPr>
+          <a:lstStyle/>
+          <a:p>
+            <a:endParaRPr lang="ko-KR" altLang="en-US"/>
+          </a:p>
+        </p:txBody>
+      </p:sp>
+      <p:sp>
+        <p:nvSpPr>
+          <p:cNvPr id="5" name="TextBox 4">
+            <a:extLst>
+              <a:ext uri="{FF2B5EF4-FFF2-40B4-BE49-F238E27FC236}">
+                <a16:creationId xmlns:a16="http://schemas.microsoft.com/office/drawing/2014/main" id="{87299008-1F00-FEB3-8B4D-215989F92075}"/>
+              </a:ext>
+            </a:extLst>
+          </p:cNvPr>
+          <p:cNvSpPr txBox="1"/>
+          <p:nvPr/>
+        </p:nvSpPr>
+        <p:spPr>
+          <a:xfrm>
+            <a:off x="602734" y="1397040"/>
+            <a:ext cx="11291331" cy="369332"/>
+          </a:xfrm>
+          <a:prstGeom prst="rect">
+            <a:avLst/>
+          </a:prstGeom>
+          <a:noFill/>
+        </p:spPr>
+        <p:txBody>
+          <a:bodyPr wrap="square">
+            <a:spAutoFit/>
+          </a:bodyPr>
+          <a:lstStyle/>
+          <a:p>
+            <a:r>
+              <a:rPr lang="ko-KR" altLang="en-US" dirty="0">
+                <a:latin typeface="D2Coding" panose="020B0609020101020101" pitchFamily="49" charset="-127"/>
+                <a:ea typeface="D2Coding" panose="020B0609020101020101" pitchFamily="49" charset="-127"/>
+              </a:rPr>
+              <a:t>딥러닝 모델의 구조이외 </a:t>
+            </a:r>
+            <a:r>
+              <a:rPr lang="en-US" altLang="ko-KR" dirty="0">
+                <a:latin typeface="D2Coding" panose="020B0609020101020101" pitchFamily="49" charset="-127"/>
+                <a:ea typeface="D2Coding" panose="020B0609020101020101" pitchFamily="49" charset="-127"/>
+              </a:rPr>
+              <a:t>Vanila SGD </a:t>
+            </a:r>
+            <a:r>
+              <a:rPr lang="ko-KR" altLang="en-US" dirty="0">
+                <a:latin typeface="D2Coding" panose="020B0609020101020101" pitchFamily="49" charset="-127"/>
+                <a:ea typeface="D2Coding" panose="020B0609020101020101" pitchFamily="49" charset="-127"/>
+              </a:rPr>
+              <a:t>대신 </a:t>
+            </a:r>
+            <a:r>
+              <a:rPr lang="en-US" altLang="ko-KR" dirty="0">
+                <a:latin typeface="D2Coding" panose="020B0609020101020101" pitchFamily="49" charset="-127"/>
+                <a:ea typeface="D2Coding" panose="020B0609020101020101" pitchFamily="49" charset="-127"/>
+              </a:rPr>
+              <a:t>Faster Optimizer</a:t>
+            </a:r>
+            <a:r>
+              <a:rPr lang="ko-KR" altLang="en-US" dirty="0">
+                <a:latin typeface="D2Coding" panose="020B0609020101020101" pitchFamily="49" charset="-127"/>
+                <a:ea typeface="D2Coding" panose="020B0609020101020101" pitchFamily="49" charset="-127"/>
+              </a:rPr>
+              <a:t> </a:t>
+            </a:r>
+            <a:endParaRPr lang="en-US" altLang="ko-KR" dirty="0">
+              <a:latin typeface="D2Coding" panose="020B0609020101020101" pitchFamily="49" charset="-127"/>
+              <a:ea typeface="D2Coding" panose="020B0609020101020101" pitchFamily="49" charset="-127"/>
+            </a:endParaRPr>
+          </a:p>
+        </p:txBody>
+      </p:sp>
+    </p:spTree>
+    <p:extLst>
+      <p:ext uri="{BB962C8B-B14F-4D97-AF65-F5344CB8AC3E}">
+        <p14:creationId xmlns:p14="http://schemas.microsoft.com/office/powerpoint/2010/main" val="1102635644"/>
+      </p:ext>
+    </p:extLst>
+  </p:cSld>
+  <p:clrMapOvr>
+    <a:masterClrMapping/>
+  </p:clrMapOvr>
+</p:sld>
+</file>
+
 <file path=ppt/slides/slide2.xml><?xml version="1.0" encoding="utf-8"?>
 <p:sld xmlns:a="http://schemas.openxmlformats.org/drawingml/2006/main" xmlns:r="http://schemas.openxmlformats.org/officeDocument/2006/relationships" xmlns:p="http://schemas.openxmlformats.org/presentationml/2006/main">
   <p:cSld>
@@ -5546,8 +6401,8 @@
           </a:fontRef>
         </p:style>
       </p:cxnSp>
-      <mc:AlternateContent xmlns:mc="http://schemas.openxmlformats.org/markup-compatibility/2006">
-        <mc:Choice xmlns:a14="http://schemas.microsoft.com/office/drawing/2010/main" Requires="a14">
+      <mc:AlternateContent xmlns:mc="http://schemas.openxmlformats.org/markup-compatibility/2006" xmlns:a14="http://schemas.microsoft.com/office/drawing/2010/main">
+        <mc:Choice Requires="a14">
           <p:sp>
             <p:nvSpPr>
               <p:cNvPr id="85" name="TextBox 84">
@@ -5576,6 +6431,7 @@
               </a:bodyPr>
               <a:lstStyle/>
               <a:p>
+                <a:pPr/>
                 <a14:m>
                   <m:oMathPara xmlns:m="http://schemas.openxmlformats.org/officeDocument/2006/math">
                     <m:oMathParaPr>
@@ -5585,7 +6441,7 @@
                       <m:sSub>
                         <m:sSubPr>
                           <m:ctrlPr>
-                            <a:rPr lang="ko-KR" altLang="en-US" sz="2400" smtClean="0">
+                            <a:rPr lang="ko-KR" altLang="en-US" sz="2400" i="1" smtClean="0">
                               <a:latin typeface="Cambria Math" panose="02040503050406030204" pitchFamily="18" charset="0"/>
                             </a:rPr>
                           </m:ctrlPr>
@@ -5615,7 +6471,7 @@
             </p:txBody>
           </p:sp>
         </mc:Choice>
-        <mc:Fallback>
+        <mc:Fallback xmlns="">
           <p:sp>
             <p:nvSpPr>
               <p:cNvPr id="85" name="TextBox 84">
@@ -5660,8 +6516,8 @@
           </p:sp>
         </mc:Fallback>
       </mc:AlternateContent>
-      <mc:AlternateContent xmlns:mc="http://schemas.openxmlformats.org/markup-compatibility/2006">
-        <mc:Choice xmlns:a14="http://schemas.microsoft.com/office/drawing/2010/main" Requires="a14">
+      <mc:AlternateContent xmlns:mc="http://schemas.openxmlformats.org/markup-compatibility/2006" xmlns:a14="http://schemas.microsoft.com/office/drawing/2010/main">
+        <mc:Choice Requires="a14">
           <p:sp>
             <p:nvSpPr>
               <p:cNvPr id="87" name="TextBox 86">
@@ -5730,7 +6586,7 @@
             </p:txBody>
           </p:sp>
         </mc:Choice>
-        <mc:Fallback>
+        <mc:Fallback xmlns="">
           <p:sp>
             <p:nvSpPr>
               <p:cNvPr id="87" name="TextBox 86">
@@ -5775,8 +6631,8 @@
           </p:sp>
         </mc:Fallback>
       </mc:AlternateContent>
-      <mc:AlternateContent xmlns:mc="http://schemas.openxmlformats.org/markup-compatibility/2006">
-        <mc:Choice xmlns:a14="http://schemas.microsoft.com/office/drawing/2010/main" Requires="a14">
+      <mc:AlternateContent xmlns:mc="http://schemas.openxmlformats.org/markup-compatibility/2006" xmlns:a14="http://schemas.microsoft.com/office/drawing/2010/main">
+        <mc:Choice Requires="a14">
           <p:sp>
             <p:nvSpPr>
               <p:cNvPr id="88" name="TextBox 87">
@@ -5805,6 +6661,7 @@
               </a:bodyPr>
               <a:lstStyle/>
               <a:p>
+                <a:pPr/>
                 <a14:m>
                   <m:oMathPara xmlns:m="http://schemas.openxmlformats.org/officeDocument/2006/math">
                     <m:oMathParaPr>
@@ -5815,7 +6672,7 @@
                         <m:accPr>
                           <m:chr m:val="̂"/>
                           <m:ctrlPr>
-                            <a:rPr lang="ko-KR" altLang="en-US" sz="2400" smtClean="0">
+                            <a:rPr lang="ko-KR" altLang="en-US" sz="2400" i="1" smtClean="0">
                               <a:latin typeface="Cambria Math" panose="02040503050406030204" pitchFamily="18" charset="0"/>
                             </a:rPr>
                           </m:ctrlPr>
@@ -5837,7 +6694,7 @@
             </p:txBody>
           </p:sp>
         </mc:Choice>
-        <mc:Fallback>
+        <mc:Fallback xmlns="">
           <p:sp>
             <p:nvSpPr>
               <p:cNvPr id="88" name="TextBox 87">
@@ -5925,8 +6782,8 @@
           </a:fontRef>
         </p:style>
       </p:cxnSp>
-      <mc:AlternateContent xmlns:mc="http://schemas.openxmlformats.org/markup-compatibility/2006">
-        <mc:Choice xmlns:a14="http://schemas.microsoft.com/office/drawing/2010/main" Requires="a14">
+      <mc:AlternateContent xmlns:mc="http://schemas.openxmlformats.org/markup-compatibility/2006" xmlns:a14="http://schemas.microsoft.com/office/drawing/2010/main">
+        <mc:Choice Requires="a14">
           <p:sp>
             <p:nvSpPr>
               <p:cNvPr id="94" name="TextBox 93">
@@ -5955,6 +6812,7 @@
               </a:bodyPr>
               <a:lstStyle/>
               <a:p>
+                <a:pPr/>
                 <a14:m>
                   <m:oMathPara xmlns:m="http://schemas.openxmlformats.org/officeDocument/2006/math">
                     <m:oMathParaPr>
@@ -5966,7 +6824,7 @@
                           <m:begChr m:val="["/>
                           <m:endChr m:val="]"/>
                           <m:ctrlPr>
-                            <a:rPr lang="ko-KR" altLang="en-US" sz="2000" smtClean="0">
+                            <a:rPr lang="ko-KR" altLang="en-US" sz="2000" i="1" smtClean="0">
                               <a:solidFill>
                                 <a:schemeClr val="tx1"/>
                               </a:solidFill>
@@ -5987,7 +6845,7 @@
                                 </m:mc>
                               </m:mcs>
                               <m:ctrlPr>
-                                <a:rPr lang="ko-KR" altLang="en-US" sz="2000">
+                                <a:rPr lang="ko-KR" altLang="en-US" sz="2000" i="1">
                                   <a:solidFill>
                                     <a:schemeClr val="tx1"/>
                                   </a:solidFill>
@@ -6058,7 +6916,7 @@
             </p:txBody>
           </p:sp>
         </mc:Choice>
-        <mc:Fallback>
+        <mc:Fallback xmlns="">
           <p:sp>
             <p:nvSpPr>
               <p:cNvPr id="94" name="TextBox 93">
@@ -6103,8 +6961,8 @@
           </p:sp>
         </mc:Fallback>
       </mc:AlternateContent>
-      <mc:AlternateContent xmlns:mc="http://schemas.openxmlformats.org/markup-compatibility/2006">
-        <mc:Choice xmlns:a14="http://schemas.microsoft.com/office/drawing/2010/main" Requires="a14">
+      <mc:AlternateContent xmlns:mc="http://schemas.openxmlformats.org/markup-compatibility/2006" xmlns:a14="http://schemas.microsoft.com/office/drawing/2010/main">
+        <mc:Choice Requires="a14">
           <p:sp>
             <p:nvSpPr>
               <p:cNvPr id="96" name="TextBox 95">
@@ -6255,7 +7113,7 @@
             </p:txBody>
           </p:sp>
         </mc:Choice>
-        <mc:Fallback>
+        <mc:Fallback xmlns="">
           <p:sp>
             <p:nvSpPr>
               <p:cNvPr id="96" name="TextBox 95">
@@ -6300,8 +7158,8 @@
           </p:sp>
         </mc:Fallback>
       </mc:AlternateContent>
-      <mc:AlternateContent xmlns:mc="http://schemas.openxmlformats.org/markup-compatibility/2006">
-        <mc:Choice xmlns:a14="http://schemas.microsoft.com/office/drawing/2010/main" Requires="a14">
+      <mc:AlternateContent xmlns:mc="http://schemas.openxmlformats.org/markup-compatibility/2006" xmlns:a14="http://schemas.microsoft.com/office/drawing/2010/main">
+        <mc:Choice Requires="a14">
           <p:sp>
             <p:nvSpPr>
               <p:cNvPr id="97" name="TextBox 96">
@@ -6330,6 +7188,7 @@
               </a:bodyPr>
               <a:lstStyle/>
               <a:p>
+                <a:pPr/>
                 <a14:m>
                   <m:oMathPara xmlns:m="http://schemas.openxmlformats.org/officeDocument/2006/math">
                     <m:oMathParaPr>
@@ -6339,7 +7198,7 @@
                       <m:sSup>
                         <m:sSupPr>
                           <m:ctrlPr>
-                            <a:rPr lang="ko-KR" altLang="en-US" sz="2400" smtClean="0">
+                            <a:rPr lang="ko-KR" altLang="en-US" sz="2400" i="1" smtClean="0">
                               <a:latin typeface="Cambria Math" panose="02040503050406030204" pitchFamily="18" charset="0"/>
                             </a:rPr>
                           </m:ctrlPr>
@@ -6375,7 +7234,7 @@
             </p:txBody>
           </p:sp>
         </mc:Choice>
-        <mc:Fallback>
+        <mc:Fallback xmlns="">
           <p:sp>
             <p:nvSpPr>
               <p:cNvPr id="97" name="TextBox 96">
@@ -6420,8 +7279,8 @@
           </p:sp>
         </mc:Fallback>
       </mc:AlternateContent>
-      <mc:AlternateContent xmlns:mc="http://schemas.openxmlformats.org/markup-compatibility/2006">
-        <mc:Choice xmlns:a14="http://schemas.microsoft.com/office/drawing/2010/main" Requires="a14">
+      <mc:AlternateContent xmlns:mc="http://schemas.openxmlformats.org/markup-compatibility/2006" xmlns:a14="http://schemas.microsoft.com/office/drawing/2010/main">
+        <mc:Choice Requires="a14">
           <p:sp>
             <p:nvSpPr>
               <p:cNvPr id="99" name="TextBox 98">
@@ -6496,7 +7355,7 @@
             </p:txBody>
           </p:sp>
         </mc:Choice>
-        <mc:Fallback>
+        <mc:Fallback xmlns="">
           <p:sp>
             <p:nvSpPr>
               <p:cNvPr id="99" name="TextBox 98">
@@ -6667,6 +7526,5010 @@
     <p:extLst>
       <p:ext uri="{BB962C8B-B14F-4D97-AF65-F5344CB8AC3E}">
         <p14:creationId xmlns:p14="http://schemas.microsoft.com/office/powerpoint/2010/main" val="1850113557"/>
+      </p:ext>
+    </p:extLst>
+  </p:cSld>
+  <p:clrMapOvr>
+    <a:masterClrMapping/>
+  </p:clrMapOvr>
+</p:sld>
+</file>
+
+<file path=ppt/slides/slide4.xml><?xml version="1.0" encoding="utf-8"?>
+<p:sld xmlns:a="http://schemas.openxmlformats.org/drawingml/2006/main" xmlns:r="http://schemas.openxmlformats.org/officeDocument/2006/relationships" xmlns:p="http://schemas.openxmlformats.org/presentationml/2006/main">
+  <p:cSld>
+    <p:spTree>
+      <p:nvGrpSpPr>
+        <p:cNvPr id="1" name="">
+          <a:extLst>
+            <a:ext uri="{FF2B5EF4-FFF2-40B4-BE49-F238E27FC236}">
+              <a16:creationId xmlns:a16="http://schemas.microsoft.com/office/drawing/2014/main" id="{BF56B395-0D3F-5334-B2B7-B3707E7F2B23}"/>
+            </a:ext>
+          </a:extLst>
+        </p:cNvPr>
+        <p:cNvGrpSpPr/>
+        <p:nvPr/>
+      </p:nvGrpSpPr>
+      <p:grpSpPr>
+        <a:xfrm>
+          <a:off x="0" y="0"/>
+          <a:ext cx="0" cy="0"/>
+          <a:chOff x="0" y="0"/>
+          <a:chExt cx="0" cy="0"/>
+        </a:xfrm>
+      </p:grpSpPr>
+      <p:sp>
+        <p:nvSpPr>
+          <p:cNvPr id="5" name="직사각형 4">
+            <a:extLst>
+              <a:ext uri="{FF2B5EF4-FFF2-40B4-BE49-F238E27FC236}">
+                <a16:creationId xmlns:a16="http://schemas.microsoft.com/office/drawing/2014/main" id="{CEBE7084-4D72-978F-1456-0C107B4B61A3}"/>
+              </a:ext>
+            </a:extLst>
+          </p:cNvPr>
+          <p:cNvSpPr/>
+          <p:nvPr/>
+        </p:nvSpPr>
+        <p:spPr>
+          <a:xfrm>
+            <a:off x="1960880" y="2285999"/>
+            <a:ext cx="650240" cy="1891656"/>
+          </a:xfrm>
+          <a:prstGeom prst="rect">
+            <a:avLst/>
+          </a:prstGeom>
+          <a:solidFill>
+            <a:schemeClr val="accent5">
+              <a:lumMod val="40000"/>
+              <a:lumOff val="60000"/>
+            </a:schemeClr>
+          </a:solidFill>
+        </p:spPr>
+        <p:style>
+          <a:lnRef idx="2">
+            <a:schemeClr val="accent1">
+              <a:shade val="15000"/>
+            </a:schemeClr>
+          </a:lnRef>
+          <a:fillRef idx="1">
+            <a:schemeClr val="accent1"/>
+          </a:fillRef>
+          <a:effectRef idx="0">
+            <a:schemeClr val="accent1"/>
+          </a:effectRef>
+          <a:fontRef idx="minor">
+            <a:schemeClr val="lt1"/>
+          </a:fontRef>
+        </p:style>
+        <p:txBody>
+          <a:bodyPr rtlCol="0" anchor="ctr"/>
+          <a:lstStyle/>
+          <a:p>
+            <a:pPr algn="ctr"/>
+            <a:endParaRPr lang="en-US" altLang="ko-KR" dirty="0"/>
+          </a:p>
+        </p:txBody>
+      </p:sp>
+      <p:sp>
+        <p:nvSpPr>
+          <p:cNvPr id="12" name="직사각형 11">
+            <a:extLst>
+              <a:ext uri="{FF2B5EF4-FFF2-40B4-BE49-F238E27FC236}">
+                <a16:creationId xmlns:a16="http://schemas.microsoft.com/office/drawing/2014/main" id="{712C93DE-2138-BBA0-EDA6-9A8887A1D37A}"/>
+              </a:ext>
+            </a:extLst>
+          </p:cNvPr>
+          <p:cNvSpPr/>
+          <p:nvPr/>
+        </p:nvSpPr>
+        <p:spPr>
+          <a:xfrm>
+            <a:off x="2699544" y="2285999"/>
+            <a:ext cx="650240" cy="1891656"/>
+          </a:xfrm>
+          <a:prstGeom prst="rect">
+            <a:avLst/>
+          </a:prstGeom>
+          <a:solidFill>
+            <a:schemeClr val="accent2">
+              <a:lumMod val="40000"/>
+              <a:lumOff val="60000"/>
+            </a:schemeClr>
+          </a:solidFill>
+        </p:spPr>
+        <p:style>
+          <a:lnRef idx="2">
+            <a:schemeClr val="accent1">
+              <a:shade val="15000"/>
+            </a:schemeClr>
+          </a:lnRef>
+          <a:fillRef idx="1">
+            <a:schemeClr val="accent1"/>
+          </a:fillRef>
+          <a:effectRef idx="0">
+            <a:schemeClr val="accent1"/>
+          </a:effectRef>
+          <a:fontRef idx="minor">
+            <a:schemeClr val="lt1"/>
+          </a:fontRef>
+        </p:style>
+        <p:txBody>
+          <a:bodyPr rtlCol="0" anchor="ctr"/>
+          <a:lstStyle/>
+          <a:p>
+            <a:pPr algn="ctr"/>
+            <a:endParaRPr lang="en-US" altLang="ko-KR" dirty="0"/>
+          </a:p>
+        </p:txBody>
+      </p:sp>
+      <p:sp>
+        <p:nvSpPr>
+          <p:cNvPr id="14" name="직사각형 13">
+            <a:extLst>
+              <a:ext uri="{FF2B5EF4-FFF2-40B4-BE49-F238E27FC236}">
+                <a16:creationId xmlns:a16="http://schemas.microsoft.com/office/drawing/2014/main" id="{5F902C4F-5E7D-5990-0DE1-785685602C2B}"/>
+              </a:ext>
+            </a:extLst>
+          </p:cNvPr>
+          <p:cNvSpPr/>
+          <p:nvPr/>
+        </p:nvSpPr>
+        <p:spPr>
+          <a:xfrm>
+            <a:off x="3438209" y="2285999"/>
+            <a:ext cx="650240" cy="1891656"/>
+          </a:xfrm>
+          <a:prstGeom prst="rect">
+            <a:avLst/>
+          </a:prstGeom>
+          <a:solidFill>
+            <a:schemeClr val="accent6">
+              <a:lumMod val="20000"/>
+              <a:lumOff val="80000"/>
+            </a:schemeClr>
+          </a:solidFill>
+        </p:spPr>
+        <p:style>
+          <a:lnRef idx="2">
+            <a:schemeClr val="accent1">
+              <a:shade val="15000"/>
+            </a:schemeClr>
+          </a:lnRef>
+          <a:fillRef idx="1">
+            <a:schemeClr val="accent1"/>
+          </a:fillRef>
+          <a:effectRef idx="0">
+            <a:schemeClr val="accent1"/>
+          </a:effectRef>
+          <a:fontRef idx="minor">
+            <a:schemeClr val="lt1"/>
+          </a:fontRef>
+        </p:style>
+        <p:txBody>
+          <a:bodyPr rtlCol="0" anchor="ctr"/>
+          <a:lstStyle/>
+          <a:p>
+            <a:pPr algn="ctr"/>
+            <a:endParaRPr lang="en-US" altLang="ko-KR" dirty="0"/>
+          </a:p>
+        </p:txBody>
+      </p:sp>
+      <p:sp>
+        <p:nvSpPr>
+          <p:cNvPr id="4" name="슬라이드 번호 개체 틀 3">
+            <a:extLst>
+              <a:ext uri="{FF2B5EF4-FFF2-40B4-BE49-F238E27FC236}">
+                <a16:creationId xmlns:a16="http://schemas.microsoft.com/office/drawing/2014/main" id="{B423F105-563D-ECCC-BFD8-8E493E131F97}"/>
+              </a:ext>
+            </a:extLst>
+          </p:cNvPr>
+          <p:cNvSpPr>
+            <a:spLocks noGrp="1"/>
+          </p:cNvSpPr>
+          <p:nvPr>
+            <p:ph type="sldNum" sz="quarter" idx="12"/>
+          </p:nvPr>
+        </p:nvSpPr>
+        <p:spPr>
+          <a:xfrm>
+            <a:off x="10514011" y="6036261"/>
+            <a:ext cx="753545" cy="365125"/>
+          </a:xfrm>
+        </p:spPr>
+        <p:txBody>
+          <a:bodyPr/>
+          <a:lstStyle/>
+          <a:p>
+            <a:fld id="{D57F1E4F-1CFF-5643-939E-217C01CDF565}" type="slidenum">
+              <a:rPr lang="en-US" smtClean="0"/>
+              <a:pPr/>
+              <a:t>4</a:t>
+            </a:fld>
+            <a:endParaRPr lang="en-US" dirty="0"/>
+          </a:p>
+        </p:txBody>
+      </p:sp>
+      <p:sp>
+        <p:nvSpPr>
+          <p:cNvPr id="3" name="제목 1">
+            <a:extLst>
+              <a:ext uri="{FF2B5EF4-FFF2-40B4-BE49-F238E27FC236}">
+                <a16:creationId xmlns:a16="http://schemas.microsoft.com/office/drawing/2014/main" id="{FF86FFC4-D8BC-9393-A237-2A402D3F1882}"/>
+              </a:ext>
+            </a:extLst>
+          </p:cNvPr>
+          <p:cNvSpPr txBox="1">
+            <a:spLocks/>
+          </p:cNvSpPr>
+          <p:nvPr/>
+        </p:nvSpPr>
+        <p:spPr>
+          <a:xfrm>
+            <a:off x="475645" y="481983"/>
+            <a:ext cx="10353762" cy="766439"/>
+          </a:xfrm>
+          <a:prstGeom prst="rect">
+            <a:avLst/>
+          </a:prstGeom>
+        </p:spPr>
+        <p:txBody>
+          <a:bodyPr vert="horz" lIns="91440" tIns="45720" rIns="91440" bIns="45720" rtlCol="0" anchor="ctr">
+            <a:normAutofit/>
+          </a:bodyPr>
+          <a:lstStyle>
+            <a:lvl1pPr algn="ctr" defTabSz="914400" rtl="0" eaLnBrk="1" latinLnBrk="1" hangingPunct="1">
+              <a:lnSpc>
+                <a:spcPct val="90000"/>
+              </a:lnSpc>
+              <a:spcBef>
+                <a:spcPct val="0"/>
+              </a:spcBef>
+              <a:buNone/>
+              <a:defRPr sz="3200" kern="1200" cap="all" baseline="0">
+                <a:solidFill>
+                  <a:schemeClr val="tx1"/>
+                </a:solidFill>
+                <a:effectLst/>
+                <a:latin typeface="Batang" panose="02030600000101010101" pitchFamily="18" charset="-127"/>
+                <a:ea typeface="Batang" panose="02030600000101010101" pitchFamily="18" charset="-127"/>
+                <a:cs typeface="+mj-cs"/>
+              </a:defRPr>
+            </a:lvl1pPr>
+          </a:lstStyle>
+          <a:p>
+            <a:pPr algn="l">
+              <a:lnSpc>
+                <a:spcPct val="150000"/>
+              </a:lnSpc>
+            </a:pPr>
+            <a:r>
+              <a:rPr lang="en-US" altLang="ko-KR" sz="2800" b="1" cap="none" dirty="0">
+                <a:latin typeface="D2Coding" panose="020B0609020101020101" pitchFamily="49" charset="-127"/>
+                <a:ea typeface="D2Coding" panose="020B0609020101020101" pitchFamily="49" charset="-127"/>
+              </a:rPr>
+              <a:t>Batch Normalization</a:t>
+            </a:r>
+          </a:p>
+        </p:txBody>
+      </p:sp>
+      <p:sp>
+        <p:nvSpPr>
+          <p:cNvPr id="8" name="TextBox 7">
+            <a:extLst>
+              <a:ext uri="{FF2B5EF4-FFF2-40B4-BE49-F238E27FC236}">
+                <a16:creationId xmlns:a16="http://schemas.microsoft.com/office/drawing/2014/main" id="{09295E6B-4A9E-55C8-95B8-E001CCC1BD59}"/>
+              </a:ext>
+            </a:extLst>
+          </p:cNvPr>
+          <p:cNvSpPr txBox="1"/>
+          <p:nvPr/>
+        </p:nvSpPr>
+        <p:spPr>
+          <a:xfrm>
+            <a:off x="616189" y="1305493"/>
+            <a:ext cx="10952480" cy="880819"/>
+          </a:xfrm>
+          <a:prstGeom prst="rect">
+            <a:avLst/>
+          </a:prstGeom>
+          <a:noFill/>
+        </p:spPr>
+        <p:txBody>
+          <a:bodyPr wrap="square" rtlCol="0">
+            <a:spAutoFit/>
+          </a:bodyPr>
+          <a:lstStyle/>
+          <a:p>
+            <a:pPr>
+              <a:lnSpc>
+                <a:spcPct val="150000"/>
+              </a:lnSpc>
+            </a:pPr>
+            <a:r>
+              <a:rPr lang="ko-KR" altLang="en-US" dirty="0">
+                <a:latin typeface="D2Coding" panose="020B0609020101020101" pitchFamily="49" charset="-127"/>
+                <a:ea typeface="D2Coding" panose="020B0609020101020101" pitchFamily="49" charset="-127"/>
+              </a:rPr>
+              <a:t>활성화 함수의 입력 값으로 </a:t>
+            </a:r>
+            <a:r>
+              <a:rPr lang="en-US" altLang="ko-KR" dirty="0">
+                <a:latin typeface="D2Coding" panose="020B0609020101020101" pitchFamily="49" charset="-127"/>
+                <a:ea typeface="D2Coding" panose="020B0609020101020101" pitchFamily="49" charset="-127"/>
+              </a:rPr>
+              <a:t>Batch Normalization</a:t>
+            </a:r>
+            <a:r>
+              <a:rPr lang="ko-KR" altLang="en-US" dirty="0">
+                <a:latin typeface="D2Coding" panose="020B0609020101020101" pitchFamily="49" charset="-127"/>
+                <a:ea typeface="D2Coding" panose="020B0609020101020101" pitchFamily="49" charset="-127"/>
+              </a:rPr>
+              <a:t>을 수행 한 결과 값을 사용 </a:t>
+            </a:r>
+            <a:r>
+              <a:rPr lang="en-US" altLang="ko-KR" dirty="0">
+                <a:latin typeface="D2Coding" panose="020B0609020101020101" pitchFamily="49" charset="-127"/>
+                <a:ea typeface="D2Coding" panose="020B0609020101020101" pitchFamily="49" charset="-127"/>
+              </a:rPr>
+              <a:t>(Batch </a:t>
+            </a:r>
+            <a:r>
+              <a:rPr lang="ko-KR" altLang="en-US" dirty="0">
+                <a:latin typeface="D2Coding" panose="020B0609020101020101" pitchFamily="49" charset="-127"/>
+                <a:ea typeface="D2Coding" panose="020B0609020101020101" pitchFamily="49" charset="-127"/>
+              </a:rPr>
+              <a:t>개수 만큼 </a:t>
+            </a:r>
+            <a:r>
+              <a:rPr lang="en-US" altLang="ko-KR" dirty="0">
+                <a:latin typeface="D2Coding" panose="020B0609020101020101" pitchFamily="49" charset="-127"/>
+                <a:ea typeface="D2Coding" panose="020B0609020101020101" pitchFamily="49" charset="-127"/>
+              </a:rPr>
+              <a:t>parameters </a:t>
+            </a:r>
+            <a:r>
+              <a:rPr lang="ko-KR" altLang="en-US" dirty="0">
+                <a:latin typeface="D2Coding" panose="020B0609020101020101" pitchFamily="49" charset="-127"/>
+                <a:ea typeface="D2Coding" panose="020B0609020101020101" pitchFamily="49" charset="-127"/>
+              </a:rPr>
+              <a:t>추정</a:t>
+            </a:r>
+            <a:r>
+              <a:rPr lang="en-US" altLang="ko-KR" dirty="0">
+                <a:latin typeface="D2Coding" panose="020B0609020101020101" pitchFamily="49" charset="-127"/>
+                <a:ea typeface="D2Coding" panose="020B0609020101020101" pitchFamily="49" charset="-127"/>
+              </a:rPr>
+              <a:t>)</a:t>
+            </a:r>
+            <a:endParaRPr lang="ko-KR" altLang="en-US" dirty="0">
+              <a:latin typeface="D2Coding" panose="020B0609020101020101" pitchFamily="49" charset="-127"/>
+              <a:ea typeface="D2Coding" panose="020B0609020101020101" pitchFamily="49" charset="-127"/>
+            </a:endParaRPr>
+          </a:p>
+        </p:txBody>
+      </p:sp>
+      <p:sp>
+        <p:nvSpPr>
+          <p:cNvPr id="7" name="TextBox 6">
+            <a:extLst>
+              <a:ext uri="{FF2B5EF4-FFF2-40B4-BE49-F238E27FC236}">
+                <a16:creationId xmlns:a16="http://schemas.microsoft.com/office/drawing/2014/main" id="{85A880B5-3C7A-D2B5-74AD-A84E2A85E10A}"/>
+              </a:ext>
+            </a:extLst>
+          </p:cNvPr>
+          <p:cNvSpPr txBox="1"/>
+          <p:nvPr/>
+        </p:nvSpPr>
+        <p:spPr>
+          <a:xfrm rot="10800000">
+            <a:off x="1916668" y="2809677"/>
+            <a:ext cx="738664" cy="1131079"/>
+          </a:xfrm>
+          <a:prstGeom prst="rect">
+            <a:avLst/>
+          </a:prstGeom>
+          <a:noFill/>
+        </p:spPr>
+        <p:txBody>
+          <a:bodyPr vert="eaVert" wrap="square" rtlCol="0">
+            <a:spAutoFit/>
+          </a:bodyPr>
+          <a:lstStyle/>
+          <a:p>
+            <a:pPr algn="ctr"/>
+            <a:r>
+              <a:rPr lang="en-US" altLang="ko-KR" dirty="0">
+                <a:latin typeface="D2Coding" panose="020B0609020101020101" pitchFamily="49" charset="-127"/>
+                <a:ea typeface="D2Coding" panose="020B0609020101020101" pitchFamily="49" charset="-127"/>
+              </a:rPr>
+              <a:t>Fully </a:t>
+            </a:r>
+          </a:p>
+          <a:p>
+            <a:pPr algn="ctr"/>
+            <a:r>
+              <a:rPr lang="en-US" altLang="ko-KR" dirty="0">
+                <a:latin typeface="D2Coding" panose="020B0609020101020101" pitchFamily="49" charset="-127"/>
+                <a:ea typeface="D2Coding" panose="020B0609020101020101" pitchFamily="49" charset="-127"/>
+              </a:rPr>
+              <a:t>Connected</a:t>
+            </a:r>
+            <a:endParaRPr lang="ko-KR" altLang="en-US" dirty="0">
+              <a:latin typeface="D2Coding" panose="020B0609020101020101" pitchFamily="49" charset="-127"/>
+              <a:ea typeface="D2Coding" panose="020B0609020101020101" pitchFamily="49" charset="-127"/>
+            </a:endParaRPr>
+          </a:p>
+        </p:txBody>
+      </p:sp>
+      <p:sp>
+        <p:nvSpPr>
+          <p:cNvPr id="10" name="TextBox 9">
+            <a:extLst>
+              <a:ext uri="{FF2B5EF4-FFF2-40B4-BE49-F238E27FC236}">
+                <a16:creationId xmlns:a16="http://schemas.microsoft.com/office/drawing/2014/main" id="{2C6DC2D0-CBD6-BCB8-A9ED-1579B61E2B31}"/>
+              </a:ext>
+            </a:extLst>
+          </p:cNvPr>
+          <p:cNvSpPr txBox="1"/>
+          <p:nvPr/>
+        </p:nvSpPr>
+        <p:spPr>
+          <a:xfrm rot="10800000">
+            <a:off x="2669065" y="3046027"/>
+            <a:ext cx="738664" cy="669414"/>
+          </a:xfrm>
+          <a:prstGeom prst="rect">
+            <a:avLst/>
+          </a:prstGeom>
+          <a:noFill/>
+        </p:spPr>
+        <p:txBody>
+          <a:bodyPr vert="eaVert" wrap="square" rtlCol="0">
+            <a:spAutoFit/>
+          </a:bodyPr>
+          <a:lstStyle/>
+          <a:p>
+            <a:pPr algn="ctr"/>
+            <a:r>
+              <a:rPr lang="en-US" altLang="ko-KR" dirty="0">
+                <a:latin typeface="D2Coding" panose="020B0609020101020101" pitchFamily="49" charset="-127"/>
+                <a:ea typeface="D2Coding" panose="020B0609020101020101" pitchFamily="49" charset="-127"/>
+              </a:rPr>
+              <a:t>Batch</a:t>
+            </a:r>
+          </a:p>
+          <a:p>
+            <a:pPr algn="ctr"/>
+            <a:r>
+              <a:rPr lang="en-US" altLang="ko-KR" dirty="0">
+                <a:latin typeface="D2Coding" panose="020B0609020101020101" pitchFamily="49" charset="-127"/>
+                <a:ea typeface="D2Coding" panose="020B0609020101020101" pitchFamily="49" charset="-127"/>
+              </a:rPr>
+              <a:t>Norm</a:t>
+            </a:r>
+            <a:endParaRPr lang="ko-KR" altLang="en-US" dirty="0">
+              <a:latin typeface="D2Coding" panose="020B0609020101020101" pitchFamily="49" charset="-127"/>
+              <a:ea typeface="D2Coding" panose="020B0609020101020101" pitchFamily="49" charset="-127"/>
+            </a:endParaRPr>
+          </a:p>
+        </p:txBody>
+      </p:sp>
+      <p:sp>
+        <p:nvSpPr>
+          <p:cNvPr id="11" name="TextBox 10">
+            <a:extLst>
+              <a:ext uri="{FF2B5EF4-FFF2-40B4-BE49-F238E27FC236}">
+                <a16:creationId xmlns:a16="http://schemas.microsoft.com/office/drawing/2014/main" id="{7BCE1F99-FEBF-6375-85B3-269957A2C257}"/>
+              </a:ext>
+            </a:extLst>
+          </p:cNvPr>
+          <p:cNvSpPr txBox="1"/>
+          <p:nvPr/>
+        </p:nvSpPr>
+        <p:spPr>
+          <a:xfrm rot="10800000">
+            <a:off x="3398126" y="2727960"/>
+            <a:ext cx="738664" cy="1246495"/>
+          </a:xfrm>
+          <a:prstGeom prst="rect">
+            <a:avLst/>
+          </a:prstGeom>
+          <a:noFill/>
+        </p:spPr>
+        <p:txBody>
+          <a:bodyPr vert="eaVert" wrap="square" rtlCol="0">
+            <a:spAutoFit/>
+          </a:bodyPr>
+          <a:lstStyle/>
+          <a:p>
+            <a:pPr algn="ctr"/>
+            <a:r>
+              <a:rPr lang="en-US" altLang="ko-KR" dirty="0" err="1">
+                <a:latin typeface="D2Coding" panose="020B0609020101020101" pitchFamily="49" charset="-127"/>
+                <a:ea typeface="D2Coding" panose="020B0609020101020101" pitchFamily="49" charset="-127"/>
+              </a:rPr>
+              <a:t>ReLU</a:t>
+            </a:r>
+            <a:endParaRPr lang="en-US" altLang="ko-KR" dirty="0">
+              <a:latin typeface="D2Coding" panose="020B0609020101020101" pitchFamily="49" charset="-127"/>
+              <a:ea typeface="D2Coding" panose="020B0609020101020101" pitchFamily="49" charset="-127"/>
+            </a:endParaRPr>
+          </a:p>
+          <a:p>
+            <a:pPr algn="ctr"/>
+            <a:r>
+              <a:rPr lang="en-US" altLang="ko-KR" dirty="0">
+                <a:latin typeface="D2Coding" panose="020B0609020101020101" pitchFamily="49" charset="-127"/>
+                <a:ea typeface="D2Coding" panose="020B0609020101020101" pitchFamily="49" charset="-127"/>
+              </a:rPr>
+              <a:t>Activation</a:t>
+            </a:r>
+            <a:endParaRPr lang="ko-KR" altLang="en-US" dirty="0">
+              <a:latin typeface="D2Coding" panose="020B0609020101020101" pitchFamily="49" charset="-127"/>
+              <a:ea typeface="D2Coding" panose="020B0609020101020101" pitchFamily="49" charset="-127"/>
+            </a:endParaRPr>
+          </a:p>
+        </p:txBody>
+      </p:sp>
+      <p:sp>
+        <p:nvSpPr>
+          <p:cNvPr id="15" name="직사각형 14">
+            <a:extLst>
+              <a:ext uri="{FF2B5EF4-FFF2-40B4-BE49-F238E27FC236}">
+                <a16:creationId xmlns:a16="http://schemas.microsoft.com/office/drawing/2014/main" id="{9C22D93A-EC57-151F-FCAE-BFC27A1507EA}"/>
+              </a:ext>
+            </a:extLst>
+          </p:cNvPr>
+          <p:cNvSpPr/>
+          <p:nvPr/>
+        </p:nvSpPr>
+        <p:spPr>
+          <a:xfrm>
+            <a:off x="5110480" y="2285999"/>
+            <a:ext cx="650240" cy="1891656"/>
+          </a:xfrm>
+          <a:prstGeom prst="rect">
+            <a:avLst/>
+          </a:prstGeom>
+          <a:solidFill>
+            <a:schemeClr val="accent5">
+              <a:lumMod val="40000"/>
+              <a:lumOff val="60000"/>
+            </a:schemeClr>
+          </a:solidFill>
+        </p:spPr>
+        <p:style>
+          <a:lnRef idx="2">
+            <a:schemeClr val="accent1">
+              <a:shade val="15000"/>
+            </a:schemeClr>
+          </a:lnRef>
+          <a:fillRef idx="1">
+            <a:schemeClr val="accent1"/>
+          </a:fillRef>
+          <a:effectRef idx="0">
+            <a:schemeClr val="accent1"/>
+          </a:effectRef>
+          <a:fontRef idx="minor">
+            <a:schemeClr val="lt1"/>
+          </a:fontRef>
+        </p:style>
+        <p:txBody>
+          <a:bodyPr rtlCol="0" anchor="ctr"/>
+          <a:lstStyle/>
+          <a:p>
+            <a:pPr algn="ctr"/>
+            <a:endParaRPr lang="en-US" altLang="ko-KR" dirty="0"/>
+          </a:p>
+        </p:txBody>
+      </p:sp>
+      <p:sp>
+        <p:nvSpPr>
+          <p:cNvPr id="16" name="직사각형 15">
+            <a:extLst>
+              <a:ext uri="{FF2B5EF4-FFF2-40B4-BE49-F238E27FC236}">
+                <a16:creationId xmlns:a16="http://schemas.microsoft.com/office/drawing/2014/main" id="{9EEB34C7-E6AC-CC92-11A3-108664DAE389}"/>
+              </a:ext>
+            </a:extLst>
+          </p:cNvPr>
+          <p:cNvSpPr/>
+          <p:nvPr/>
+        </p:nvSpPr>
+        <p:spPr>
+          <a:xfrm>
+            <a:off x="5849144" y="2285999"/>
+            <a:ext cx="650240" cy="1891656"/>
+          </a:xfrm>
+          <a:prstGeom prst="rect">
+            <a:avLst/>
+          </a:prstGeom>
+          <a:solidFill>
+            <a:schemeClr val="accent2">
+              <a:lumMod val="40000"/>
+              <a:lumOff val="60000"/>
+            </a:schemeClr>
+          </a:solidFill>
+        </p:spPr>
+        <p:style>
+          <a:lnRef idx="2">
+            <a:schemeClr val="accent1">
+              <a:shade val="15000"/>
+            </a:schemeClr>
+          </a:lnRef>
+          <a:fillRef idx="1">
+            <a:schemeClr val="accent1"/>
+          </a:fillRef>
+          <a:effectRef idx="0">
+            <a:schemeClr val="accent1"/>
+          </a:effectRef>
+          <a:fontRef idx="minor">
+            <a:schemeClr val="lt1"/>
+          </a:fontRef>
+        </p:style>
+        <p:txBody>
+          <a:bodyPr rtlCol="0" anchor="ctr"/>
+          <a:lstStyle/>
+          <a:p>
+            <a:pPr algn="ctr"/>
+            <a:endParaRPr lang="en-US" altLang="ko-KR" dirty="0"/>
+          </a:p>
+        </p:txBody>
+      </p:sp>
+      <p:sp>
+        <p:nvSpPr>
+          <p:cNvPr id="17" name="직사각형 16">
+            <a:extLst>
+              <a:ext uri="{FF2B5EF4-FFF2-40B4-BE49-F238E27FC236}">
+                <a16:creationId xmlns:a16="http://schemas.microsoft.com/office/drawing/2014/main" id="{01EF0046-010E-B942-EB13-FDF3823A3CDA}"/>
+              </a:ext>
+            </a:extLst>
+          </p:cNvPr>
+          <p:cNvSpPr/>
+          <p:nvPr/>
+        </p:nvSpPr>
+        <p:spPr>
+          <a:xfrm>
+            <a:off x="6587809" y="2285999"/>
+            <a:ext cx="650240" cy="1891656"/>
+          </a:xfrm>
+          <a:prstGeom prst="rect">
+            <a:avLst/>
+          </a:prstGeom>
+          <a:solidFill>
+            <a:schemeClr val="accent6">
+              <a:lumMod val="20000"/>
+              <a:lumOff val="80000"/>
+            </a:schemeClr>
+          </a:solidFill>
+        </p:spPr>
+        <p:style>
+          <a:lnRef idx="2">
+            <a:schemeClr val="accent1">
+              <a:shade val="15000"/>
+            </a:schemeClr>
+          </a:lnRef>
+          <a:fillRef idx="1">
+            <a:schemeClr val="accent1"/>
+          </a:fillRef>
+          <a:effectRef idx="0">
+            <a:schemeClr val="accent1"/>
+          </a:effectRef>
+          <a:fontRef idx="minor">
+            <a:schemeClr val="lt1"/>
+          </a:fontRef>
+        </p:style>
+        <p:txBody>
+          <a:bodyPr rtlCol="0" anchor="ctr"/>
+          <a:lstStyle/>
+          <a:p>
+            <a:pPr algn="ctr"/>
+            <a:endParaRPr lang="en-US" altLang="ko-KR" dirty="0"/>
+          </a:p>
+        </p:txBody>
+      </p:sp>
+      <p:sp>
+        <p:nvSpPr>
+          <p:cNvPr id="19" name="TextBox 18">
+            <a:extLst>
+              <a:ext uri="{FF2B5EF4-FFF2-40B4-BE49-F238E27FC236}">
+                <a16:creationId xmlns:a16="http://schemas.microsoft.com/office/drawing/2014/main" id="{00D610CC-4157-54C9-6912-801D11D03AEF}"/>
+              </a:ext>
+            </a:extLst>
+          </p:cNvPr>
+          <p:cNvSpPr txBox="1"/>
+          <p:nvPr/>
+        </p:nvSpPr>
+        <p:spPr>
+          <a:xfrm rot="10800000">
+            <a:off x="5074245" y="2702350"/>
+            <a:ext cx="738664" cy="1131079"/>
+          </a:xfrm>
+          <a:prstGeom prst="rect">
+            <a:avLst/>
+          </a:prstGeom>
+          <a:noFill/>
+        </p:spPr>
+        <p:txBody>
+          <a:bodyPr vert="eaVert" wrap="square" rtlCol="0">
+            <a:spAutoFit/>
+          </a:bodyPr>
+          <a:lstStyle/>
+          <a:p>
+            <a:pPr algn="ctr"/>
+            <a:r>
+              <a:rPr lang="en-US" altLang="ko-KR" dirty="0">
+                <a:latin typeface="D2Coding" panose="020B0609020101020101" pitchFamily="49" charset="-127"/>
+                <a:ea typeface="D2Coding" panose="020B0609020101020101" pitchFamily="49" charset="-127"/>
+              </a:rPr>
+              <a:t>Fully </a:t>
+            </a:r>
+          </a:p>
+          <a:p>
+            <a:pPr algn="ctr"/>
+            <a:r>
+              <a:rPr lang="en-US" altLang="ko-KR" dirty="0">
+                <a:latin typeface="D2Coding" panose="020B0609020101020101" pitchFamily="49" charset="-127"/>
+                <a:ea typeface="D2Coding" panose="020B0609020101020101" pitchFamily="49" charset="-127"/>
+              </a:rPr>
+              <a:t>Connected</a:t>
+            </a:r>
+            <a:endParaRPr lang="ko-KR" altLang="en-US" dirty="0">
+              <a:latin typeface="D2Coding" panose="020B0609020101020101" pitchFamily="49" charset="-127"/>
+              <a:ea typeface="D2Coding" panose="020B0609020101020101" pitchFamily="49" charset="-127"/>
+            </a:endParaRPr>
+          </a:p>
+        </p:txBody>
+      </p:sp>
+      <p:sp>
+        <p:nvSpPr>
+          <p:cNvPr id="21" name="TextBox 20">
+            <a:extLst>
+              <a:ext uri="{FF2B5EF4-FFF2-40B4-BE49-F238E27FC236}">
+                <a16:creationId xmlns:a16="http://schemas.microsoft.com/office/drawing/2014/main" id="{7BA0DCDD-704A-B4C9-3124-8EA6CC74D991}"/>
+              </a:ext>
+            </a:extLst>
+          </p:cNvPr>
+          <p:cNvSpPr txBox="1"/>
+          <p:nvPr/>
+        </p:nvSpPr>
+        <p:spPr>
+          <a:xfrm rot="10800000">
+            <a:off x="5818665" y="3046027"/>
+            <a:ext cx="738664" cy="669414"/>
+          </a:xfrm>
+          <a:prstGeom prst="rect">
+            <a:avLst/>
+          </a:prstGeom>
+          <a:noFill/>
+        </p:spPr>
+        <p:txBody>
+          <a:bodyPr vert="eaVert" wrap="square" rtlCol="0">
+            <a:spAutoFit/>
+          </a:bodyPr>
+          <a:lstStyle/>
+          <a:p>
+            <a:pPr algn="ctr"/>
+            <a:r>
+              <a:rPr lang="en-US" altLang="ko-KR" dirty="0">
+                <a:latin typeface="D2Coding" panose="020B0609020101020101" pitchFamily="49" charset="-127"/>
+                <a:ea typeface="D2Coding" panose="020B0609020101020101" pitchFamily="49" charset="-127"/>
+              </a:rPr>
+              <a:t>Batch</a:t>
+            </a:r>
+          </a:p>
+          <a:p>
+            <a:pPr algn="ctr"/>
+            <a:r>
+              <a:rPr lang="en-US" altLang="ko-KR" dirty="0">
+                <a:latin typeface="D2Coding" panose="020B0609020101020101" pitchFamily="49" charset="-127"/>
+                <a:ea typeface="D2Coding" panose="020B0609020101020101" pitchFamily="49" charset="-127"/>
+              </a:rPr>
+              <a:t>Norm</a:t>
+            </a:r>
+            <a:endParaRPr lang="ko-KR" altLang="en-US" dirty="0">
+              <a:latin typeface="D2Coding" panose="020B0609020101020101" pitchFamily="49" charset="-127"/>
+              <a:ea typeface="D2Coding" panose="020B0609020101020101" pitchFamily="49" charset="-127"/>
+            </a:endParaRPr>
+          </a:p>
+        </p:txBody>
+      </p:sp>
+      <p:sp>
+        <p:nvSpPr>
+          <p:cNvPr id="23" name="TextBox 22">
+            <a:extLst>
+              <a:ext uri="{FF2B5EF4-FFF2-40B4-BE49-F238E27FC236}">
+                <a16:creationId xmlns:a16="http://schemas.microsoft.com/office/drawing/2014/main" id="{403522F4-73D3-3982-293B-B7065C04EF9F}"/>
+              </a:ext>
+            </a:extLst>
+          </p:cNvPr>
+          <p:cNvSpPr txBox="1"/>
+          <p:nvPr/>
+        </p:nvSpPr>
+        <p:spPr>
+          <a:xfrm rot="10800000">
+            <a:off x="6557328" y="2727960"/>
+            <a:ext cx="738664" cy="1246495"/>
+          </a:xfrm>
+          <a:prstGeom prst="rect">
+            <a:avLst/>
+          </a:prstGeom>
+          <a:noFill/>
+        </p:spPr>
+        <p:txBody>
+          <a:bodyPr vert="eaVert" wrap="square" rtlCol="0">
+            <a:spAutoFit/>
+          </a:bodyPr>
+          <a:lstStyle/>
+          <a:p>
+            <a:pPr algn="ctr"/>
+            <a:r>
+              <a:rPr lang="en-US" altLang="ko-KR" dirty="0" err="1">
+                <a:latin typeface="D2Coding" panose="020B0609020101020101" pitchFamily="49" charset="-127"/>
+                <a:ea typeface="D2Coding" panose="020B0609020101020101" pitchFamily="49" charset="-127"/>
+              </a:rPr>
+              <a:t>ReLU</a:t>
+            </a:r>
+            <a:endParaRPr lang="en-US" altLang="ko-KR" dirty="0">
+              <a:latin typeface="D2Coding" panose="020B0609020101020101" pitchFamily="49" charset="-127"/>
+              <a:ea typeface="D2Coding" panose="020B0609020101020101" pitchFamily="49" charset="-127"/>
+            </a:endParaRPr>
+          </a:p>
+          <a:p>
+            <a:pPr algn="ctr"/>
+            <a:r>
+              <a:rPr lang="en-US" altLang="ko-KR" dirty="0">
+                <a:latin typeface="D2Coding" panose="020B0609020101020101" pitchFamily="49" charset="-127"/>
+                <a:ea typeface="D2Coding" panose="020B0609020101020101" pitchFamily="49" charset="-127"/>
+              </a:rPr>
+              <a:t>Activation</a:t>
+            </a:r>
+            <a:endParaRPr lang="ko-KR" altLang="en-US" dirty="0">
+              <a:latin typeface="D2Coding" panose="020B0609020101020101" pitchFamily="49" charset="-127"/>
+              <a:ea typeface="D2Coding" panose="020B0609020101020101" pitchFamily="49" charset="-127"/>
+            </a:endParaRPr>
+          </a:p>
+        </p:txBody>
+      </p:sp>
+      <p:sp>
+        <p:nvSpPr>
+          <p:cNvPr id="25" name="직사각형 24">
+            <a:extLst>
+              <a:ext uri="{FF2B5EF4-FFF2-40B4-BE49-F238E27FC236}">
+                <a16:creationId xmlns:a16="http://schemas.microsoft.com/office/drawing/2014/main" id="{C49482D3-DEAC-9030-C4CB-3A6D411EACF2}"/>
+              </a:ext>
+            </a:extLst>
+          </p:cNvPr>
+          <p:cNvSpPr/>
+          <p:nvPr/>
+        </p:nvSpPr>
+        <p:spPr>
+          <a:xfrm>
+            <a:off x="8239760" y="2285999"/>
+            <a:ext cx="650240" cy="1891656"/>
+          </a:xfrm>
+          <a:prstGeom prst="rect">
+            <a:avLst/>
+          </a:prstGeom>
+          <a:solidFill>
+            <a:schemeClr val="accent5">
+              <a:lumMod val="40000"/>
+              <a:lumOff val="60000"/>
+            </a:schemeClr>
+          </a:solidFill>
+        </p:spPr>
+        <p:style>
+          <a:lnRef idx="2">
+            <a:schemeClr val="accent1">
+              <a:shade val="15000"/>
+            </a:schemeClr>
+          </a:lnRef>
+          <a:fillRef idx="1">
+            <a:schemeClr val="accent1"/>
+          </a:fillRef>
+          <a:effectRef idx="0">
+            <a:schemeClr val="accent1"/>
+          </a:effectRef>
+          <a:fontRef idx="minor">
+            <a:schemeClr val="lt1"/>
+          </a:fontRef>
+        </p:style>
+        <p:txBody>
+          <a:bodyPr rtlCol="0" anchor="ctr"/>
+          <a:lstStyle/>
+          <a:p>
+            <a:pPr algn="ctr"/>
+            <a:endParaRPr lang="en-US" altLang="ko-KR" dirty="0"/>
+          </a:p>
+        </p:txBody>
+      </p:sp>
+      <p:sp>
+        <p:nvSpPr>
+          <p:cNvPr id="27" name="직사각형 26">
+            <a:extLst>
+              <a:ext uri="{FF2B5EF4-FFF2-40B4-BE49-F238E27FC236}">
+                <a16:creationId xmlns:a16="http://schemas.microsoft.com/office/drawing/2014/main" id="{2EFA9BAE-87F1-6A0B-66C8-7BD198CD6402}"/>
+              </a:ext>
+            </a:extLst>
+          </p:cNvPr>
+          <p:cNvSpPr/>
+          <p:nvPr/>
+        </p:nvSpPr>
+        <p:spPr>
+          <a:xfrm>
+            <a:off x="8978424" y="2285999"/>
+            <a:ext cx="650240" cy="1891656"/>
+          </a:xfrm>
+          <a:prstGeom prst="rect">
+            <a:avLst/>
+          </a:prstGeom>
+          <a:solidFill>
+            <a:schemeClr val="accent2">
+              <a:lumMod val="40000"/>
+              <a:lumOff val="60000"/>
+            </a:schemeClr>
+          </a:solidFill>
+        </p:spPr>
+        <p:style>
+          <a:lnRef idx="2">
+            <a:schemeClr val="accent1">
+              <a:shade val="15000"/>
+            </a:schemeClr>
+          </a:lnRef>
+          <a:fillRef idx="1">
+            <a:schemeClr val="accent1"/>
+          </a:fillRef>
+          <a:effectRef idx="0">
+            <a:schemeClr val="accent1"/>
+          </a:effectRef>
+          <a:fontRef idx="minor">
+            <a:schemeClr val="lt1"/>
+          </a:fontRef>
+        </p:style>
+        <p:txBody>
+          <a:bodyPr rtlCol="0" anchor="ctr"/>
+          <a:lstStyle/>
+          <a:p>
+            <a:pPr algn="ctr"/>
+            <a:endParaRPr lang="en-US" altLang="ko-KR" dirty="0"/>
+          </a:p>
+        </p:txBody>
+      </p:sp>
+      <p:sp>
+        <p:nvSpPr>
+          <p:cNvPr id="29" name="직사각형 28">
+            <a:extLst>
+              <a:ext uri="{FF2B5EF4-FFF2-40B4-BE49-F238E27FC236}">
+                <a16:creationId xmlns:a16="http://schemas.microsoft.com/office/drawing/2014/main" id="{52FD7490-A807-6A3A-6E35-B823F3D46F2F}"/>
+              </a:ext>
+            </a:extLst>
+          </p:cNvPr>
+          <p:cNvSpPr/>
+          <p:nvPr/>
+        </p:nvSpPr>
+        <p:spPr>
+          <a:xfrm>
+            <a:off x="9717089" y="2285999"/>
+            <a:ext cx="650240" cy="1891656"/>
+          </a:xfrm>
+          <a:prstGeom prst="rect">
+            <a:avLst/>
+          </a:prstGeom>
+          <a:solidFill>
+            <a:schemeClr val="accent6">
+              <a:lumMod val="20000"/>
+              <a:lumOff val="80000"/>
+            </a:schemeClr>
+          </a:solidFill>
+        </p:spPr>
+        <p:style>
+          <a:lnRef idx="2">
+            <a:schemeClr val="accent1">
+              <a:shade val="15000"/>
+            </a:schemeClr>
+          </a:lnRef>
+          <a:fillRef idx="1">
+            <a:schemeClr val="accent1"/>
+          </a:fillRef>
+          <a:effectRef idx="0">
+            <a:schemeClr val="accent1"/>
+          </a:effectRef>
+          <a:fontRef idx="minor">
+            <a:schemeClr val="lt1"/>
+          </a:fontRef>
+        </p:style>
+        <p:txBody>
+          <a:bodyPr rtlCol="0" anchor="ctr"/>
+          <a:lstStyle/>
+          <a:p>
+            <a:pPr algn="ctr"/>
+            <a:endParaRPr lang="en-US" altLang="ko-KR" dirty="0"/>
+          </a:p>
+        </p:txBody>
+      </p:sp>
+      <p:sp>
+        <p:nvSpPr>
+          <p:cNvPr id="31" name="TextBox 30">
+            <a:extLst>
+              <a:ext uri="{FF2B5EF4-FFF2-40B4-BE49-F238E27FC236}">
+                <a16:creationId xmlns:a16="http://schemas.microsoft.com/office/drawing/2014/main" id="{A30F1760-0325-25D9-F08F-42A0E72EA1C2}"/>
+              </a:ext>
+            </a:extLst>
+          </p:cNvPr>
+          <p:cNvSpPr txBox="1"/>
+          <p:nvPr/>
+        </p:nvSpPr>
+        <p:spPr>
+          <a:xfrm rot="10800000">
+            <a:off x="8195548" y="2809677"/>
+            <a:ext cx="738664" cy="1131079"/>
+          </a:xfrm>
+          <a:prstGeom prst="rect">
+            <a:avLst/>
+          </a:prstGeom>
+          <a:noFill/>
+        </p:spPr>
+        <p:txBody>
+          <a:bodyPr vert="eaVert" wrap="square" rtlCol="0">
+            <a:spAutoFit/>
+          </a:bodyPr>
+          <a:lstStyle/>
+          <a:p>
+            <a:pPr algn="ctr"/>
+            <a:r>
+              <a:rPr lang="en-US" altLang="ko-KR" dirty="0">
+                <a:latin typeface="D2Coding" panose="020B0609020101020101" pitchFamily="49" charset="-127"/>
+                <a:ea typeface="D2Coding" panose="020B0609020101020101" pitchFamily="49" charset="-127"/>
+              </a:rPr>
+              <a:t>Fully </a:t>
+            </a:r>
+          </a:p>
+          <a:p>
+            <a:pPr algn="ctr"/>
+            <a:r>
+              <a:rPr lang="en-US" altLang="ko-KR" dirty="0">
+                <a:latin typeface="D2Coding" panose="020B0609020101020101" pitchFamily="49" charset="-127"/>
+                <a:ea typeface="D2Coding" panose="020B0609020101020101" pitchFamily="49" charset="-127"/>
+              </a:rPr>
+              <a:t>Connected</a:t>
+            </a:r>
+            <a:endParaRPr lang="ko-KR" altLang="en-US" dirty="0">
+              <a:latin typeface="D2Coding" panose="020B0609020101020101" pitchFamily="49" charset="-127"/>
+              <a:ea typeface="D2Coding" panose="020B0609020101020101" pitchFamily="49" charset="-127"/>
+            </a:endParaRPr>
+          </a:p>
+        </p:txBody>
+      </p:sp>
+      <p:sp>
+        <p:nvSpPr>
+          <p:cNvPr id="33" name="TextBox 32">
+            <a:extLst>
+              <a:ext uri="{FF2B5EF4-FFF2-40B4-BE49-F238E27FC236}">
+                <a16:creationId xmlns:a16="http://schemas.microsoft.com/office/drawing/2014/main" id="{21FB1D83-1758-6891-22AF-7799C78D836D}"/>
+              </a:ext>
+            </a:extLst>
+          </p:cNvPr>
+          <p:cNvSpPr txBox="1"/>
+          <p:nvPr/>
+        </p:nvSpPr>
+        <p:spPr>
+          <a:xfrm rot="10800000">
+            <a:off x="8947945" y="3046027"/>
+            <a:ext cx="738664" cy="669414"/>
+          </a:xfrm>
+          <a:prstGeom prst="rect">
+            <a:avLst/>
+          </a:prstGeom>
+          <a:noFill/>
+        </p:spPr>
+        <p:txBody>
+          <a:bodyPr vert="eaVert" wrap="square" rtlCol="0">
+            <a:spAutoFit/>
+          </a:bodyPr>
+          <a:lstStyle/>
+          <a:p>
+            <a:pPr algn="ctr"/>
+            <a:r>
+              <a:rPr lang="en-US" altLang="ko-KR" dirty="0">
+                <a:latin typeface="D2Coding" panose="020B0609020101020101" pitchFamily="49" charset="-127"/>
+                <a:ea typeface="D2Coding" panose="020B0609020101020101" pitchFamily="49" charset="-127"/>
+              </a:rPr>
+              <a:t>Batch</a:t>
+            </a:r>
+          </a:p>
+          <a:p>
+            <a:pPr algn="ctr"/>
+            <a:r>
+              <a:rPr lang="en-US" altLang="ko-KR" dirty="0">
+                <a:latin typeface="D2Coding" panose="020B0609020101020101" pitchFamily="49" charset="-127"/>
+                <a:ea typeface="D2Coding" panose="020B0609020101020101" pitchFamily="49" charset="-127"/>
+              </a:rPr>
+              <a:t>Norm</a:t>
+            </a:r>
+            <a:endParaRPr lang="ko-KR" altLang="en-US" dirty="0">
+              <a:latin typeface="D2Coding" panose="020B0609020101020101" pitchFamily="49" charset="-127"/>
+              <a:ea typeface="D2Coding" panose="020B0609020101020101" pitchFamily="49" charset="-127"/>
+            </a:endParaRPr>
+          </a:p>
+        </p:txBody>
+      </p:sp>
+      <p:sp>
+        <p:nvSpPr>
+          <p:cNvPr id="35" name="TextBox 34">
+            <a:extLst>
+              <a:ext uri="{FF2B5EF4-FFF2-40B4-BE49-F238E27FC236}">
+                <a16:creationId xmlns:a16="http://schemas.microsoft.com/office/drawing/2014/main" id="{E9028659-3778-0C5D-0B6E-E89CC91A0285}"/>
+              </a:ext>
+            </a:extLst>
+          </p:cNvPr>
+          <p:cNvSpPr txBox="1"/>
+          <p:nvPr/>
+        </p:nvSpPr>
+        <p:spPr>
+          <a:xfrm rot="10800000">
+            <a:off x="9686608" y="2727961"/>
+            <a:ext cx="738664" cy="1246495"/>
+          </a:xfrm>
+          <a:prstGeom prst="rect">
+            <a:avLst/>
+          </a:prstGeom>
+          <a:noFill/>
+        </p:spPr>
+        <p:txBody>
+          <a:bodyPr vert="eaVert" wrap="square" rtlCol="0">
+            <a:spAutoFit/>
+          </a:bodyPr>
+          <a:lstStyle/>
+          <a:p>
+            <a:pPr algn="ctr"/>
+            <a:r>
+              <a:rPr lang="en-US" altLang="ko-KR" dirty="0" err="1">
+                <a:latin typeface="D2Coding" panose="020B0609020101020101" pitchFamily="49" charset="-127"/>
+                <a:ea typeface="D2Coding" panose="020B0609020101020101" pitchFamily="49" charset="-127"/>
+              </a:rPr>
+              <a:t>ReLU</a:t>
+            </a:r>
+            <a:endParaRPr lang="en-US" altLang="ko-KR" dirty="0">
+              <a:latin typeface="D2Coding" panose="020B0609020101020101" pitchFamily="49" charset="-127"/>
+              <a:ea typeface="D2Coding" panose="020B0609020101020101" pitchFamily="49" charset="-127"/>
+            </a:endParaRPr>
+          </a:p>
+          <a:p>
+            <a:pPr algn="ctr"/>
+            <a:r>
+              <a:rPr lang="en-US" altLang="ko-KR" dirty="0">
+                <a:latin typeface="D2Coding" panose="020B0609020101020101" pitchFamily="49" charset="-127"/>
+                <a:ea typeface="D2Coding" panose="020B0609020101020101" pitchFamily="49" charset="-127"/>
+              </a:rPr>
+              <a:t>Activation</a:t>
+            </a:r>
+            <a:endParaRPr lang="ko-KR" altLang="en-US" dirty="0">
+              <a:latin typeface="D2Coding" panose="020B0609020101020101" pitchFamily="49" charset="-127"/>
+              <a:ea typeface="D2Coding" panose="020B0609020101020101" pitchFamily="49" charset="-127"/>
+            </a:endParaRPr>
+          </a:p>
+        </p:txBody>
+      </p:sp>
+      <p:cxnSp>
+        <p:nvCxnSpPr>
+          <p:cNvPr id="39" name="직선 화살표 연결선 38">
+            <a:extLst>
+              <a:ext uri="{FF2B5EF4-FFF2-40B4-BE49-F238E27FC236}">
+                <a16:creationId xmlns:a16="http://schemas.microsoft.com/office/drawing/2014/main" id="{C839C82D-E58E-82FE-652D-BBB6A22F4C6D}"/>
+              </a:ext>
+            </a:extLst>
+          </p:cNvPr>
+          <p:cNvCxnSpPr>
+            <a:cxnSpLocks/>
+          </p:cNvCxnSpPr>
+          <p:nvPr/>
+        </p:nvCxnSpPr>
+        <p:spPr>
+          <a:xfrm>
+            <a:off x="1054180" y="3272588"/>
+            <a:ext cx="892967" cy="0"/>
+          </a:xfrm>
+          <a:prstGeom prst="straightConnector1">
+            <a:avLst/>
+          </a:prstGeom>
+          <a:ln>
+            <a:tailEnd type="triangle"/>
+          </a:ln>
+        </p:spPr>
+        <p:style>
+          <a:lnRef idx="1">
+            <a:schemeClr val="dk1"/>
+          </a:lnRef>
+          <a:fillRef idx="0">
+            <a:schemeClr val="dk1"/>
+          </a:fillRef>
+          <a:effectRef idx="0">
+            <a:schemeClr val="dk1"/>
+          </a:effectRef>
+          <a:fontRef idx="minor">
+            <a:schemeClr val="tx1"/>
+          </a:fontRef>
+        </p:style>
+      </p:cxnSp>
+      <p:cxnSp>
+        <p:nvCxnSpPr>
+          <p:cNvPr id="43" name="직선 화살표 연결선 42">
+            <a:extLst>
+              <a:ext uri="{FF2B5EF4-FFF2-40B4-BE49-F238E27FC236}">
+                <a16:creationId xmlns:a16="http://schemas.microsoft.com/office/drawing/2014/main" id="{DF5D7934-C138-266B-6EEB-7030DCF6229F}"/>
+              </a:ext>
+            </a:extLst>
+          </p:cNvPr>
+          <p:cNvCxnSpPr>
+            <a:cxnSpLocks/>
+            <a:stCxn id="14" idx="3"/>
+            <a:endCxn id="15" idx="1"/>
+          </p:cNvCxnSpPr>
+          <p:nvPr/>
+        </p:nvCxnSpPr>
+        <p:spPr>
+          <a:xfrm>
+            <a:off x="4088449" y="3231827"/>
+            <a:ext cx="1022031" cy="0"/>
+          </a:xfrm>
+          <a:prstGeom prst="straightConnector1">
+            <a:avLst/>
+          </a:prstGeom>
+          <a:ln>
+            <a:tailEnd type="triangle"/>
+          </a:ln>
+        </p:spPr>
+        <p:style>
+          <a:lnRef idx="1">
+            <a:schemeClr val="dk1"/>
+          </a:lnRef>
+          <a:fillRef idx="0">
+            <a:schemeClr val="dk1"/>
+          </a:fillRef>
+          <a:effectRef idx="0">
+            <a:schemeClr val="dk1"/>
+          </a:effectRef>
+          <a:fontRef idx="minor">
+            <a:schemeClr val="tx1"/>
+          </a:fontRef>
+        </p:style>
+      </p:cxnSp>
+      <p:cxnSp>
+        <p:nvCxnSpPr>
+          <p:cNvPr id="54" name="직선 화살표 연결선 53">
+            <a:extLst>
+              <a:ext uri="{FF2B5EF4-FFF2-40B4-BE49-F238E27FC236}">
+                <a16:creationId xmlns:a16="http://schemas.microsoft.com/office/drawing/2014/main" id="{9E98D962-ADA5-99BA-2F8B-7793D84B547B}"/>
+              </a:ext>
+            </a:extLst>
+          </p:cNvPr>
+          <p:cNvCxnSpPr>
+            <a:cxnSpLocks/>
+          </p:cNvCxnSpPr>
+          <p:nvPr/>
+        </p:nvCxnSpPr>
+        <p:spPr>
+          <a:xfrm>
+            <a:off x="7238049" y="3267890"/>
+            <a:ext cx="1022031" cy="0"/>
+          </a:xfrm>
+          <a:prstGeom prst="straightConnector1">
+            <a:avLst/>
+          </a:prstGeom>
+          <a:ln>
+            <a:tailEnd type="triangle"/>
+          </a:ln>
+        </p:spPr>
+        <p:style>
+          <a:lnRef idx="1">
+            <a:schemeClr val="dk1"/>
+          </a:lnRef>
+          <a:fillRef idx="0">
+            <a:schemeClr val="dk1"/>
+          </a:fillRef>
+          <a:effectRef idx="0">
+            <a:schemeClr val="dk1"/>
+          </a:effectRef>
+          <a:fontRef idx="minor">
+            <a:schemeClr val="tx1"/>
+          </a:fontRef>
+        </p:style>
+      </p:cxnSp>
+      <p:cxnSp>
+        <p:nvCxnSpPr>
+          <p:cNvPr id="80" name="직선 화살표 연결선 79">
+            <a:extLst>
+              <a:ext uri="{FF2B5EF4-FFF2-40B4-BE49-F238E27FC236}">
+                <a16:creationId xmlns:a16="http://schemas.microsoft.com/office/drawing/2014/main" id="{28356FE2-0060-EB9C-941B-FAD665D5E48E}"/>
+              </a:ext>
+            </a:extLst>
+          </p:cNvPr>
+          <p:cNvCxnSpPr>
+            <a:cxnSpLocks/>
+          </p:cNvCxnSpPr>
+          <p:nvPr/>
+        </p:nvCxnSpPr>
+        <p:spPr>
+          <a:xfrm>
+            <a:off x="10369747" y="3289278"/>
+            <a:ext cx="892967" cy="0"/>
+          </a:xfrm>
+          <a:prstGeom prst="straightConnector1">
+            <a:avLst/>
+          </a:prstGeom>
+          <a:ln>
+            <a:tailEnd type="triangle"/>
+          </a:ln>
+        </p:spPr>
+        <p:style>
+          <a:lnRef idx="1">
+            <a:schemeClr val="dk1"/>
+          </a:lnRef>
+          <a:fillRef idx="0">
+            <a:schemeClr val="dk1"/>
+          </a:fillRef>
+          <a:effectRef idx="0">
+            <a:schemeClr val="dk1"/>
+          </a:effectRef>
+          <a:fontRef idx="minor">
+            <a:schemeClr val="tx1"/>
+          </a:fontRef>
+        </p:style>
+      </p:cxnSp>
+      <p:pic>
+        <p:nvPicPr>
+          <p:cNvPr id="86" name="그림 85">
+            <a:extLst>
+              <a:ext uri="{FF2B5EF4-FFF2-40B4-BE49-F238E27FC236}">
+                <a16:creationId xmlns:a16="http://schemas.microsoft.com/office/drawing/2014/main" id="{86C1B6D1-2E73-5219-1E77-CEA5A1F5FFAA}"/>
+              </a:ext>
+            </a:extLst>
+          </p:cNvPr>
+          <p:cNvPicPr>
+            <a:picLocks noChangeAspect="1"/>
+          </p:cNvPicPr>
+          <p:nvPr/>
+        </p:nvPicPr>
+        <p:blipFill>
+          <a:blip r:embed="rId2"/>
+          <a:stretch>
+            <a:fillRect/>
+          </a:stretch>
+        </p:blipFill>
+        <p:spPr>
+          <a:xfrm>
+            <a:off x="3398125" y="4670038"/>
+            <a:ext cx="6264183" cy="1844200"/>
+          </a:xfrm>
+          <a:prstGeom prst="rect">
+            <a:avLst/>
+          </a:prstGeom>
+        </p:spPr>
+      </p:pic>
+      <p:cxnSp>
+        <p:nvCxnSpPr>
+          <p:cNvPr id="91" name="연결선: 구부러짐 90">
+            <a:extLst>
+              <a:ext uri="{FF2B5EF4-FFF2-40B4-BE49-F238E27FC236}">
+                <a16:creationId xmlns:a16="http://schemas.microsoft.com/office/drawing/2014/main" id="{0B4B36B6-EB48-949A-9356-2A96FE8F36AF}"/>
+              </a:ext>
+            </a:extLst>
+          </p:cNvPr>
+          <p:cNvCxnSpPr>
+            <a:endCxn id="16" idx="2"/>
+          </p:cNvCxnSpPr>
+          <p:nvPr/>
+        </p:nvCxnSpPr>
+        <p:spPr>
+          <a:xfrm flipV="1">
+            <a:off x="4826000" y="4177655"/>
+            <a:ext cx="1348264" cy="492383"/>
+          </a:xfrm>
+          <a:prstGeom prst="curvedConnector2">
+            <a:avLst/>
+          </a:prstGeom>
+          <a:ln>
+            <a:tailEnd type="triangle"/>
+          </a:ln>
+        </p:spPr>
+        <p:style>
+          <a:lnRef idx="1">
+            <a:schemeClr val="dk1"/>
+          </a:lnRef>
+          <a:fillRef idx="0">
+            <a:schemeClr val="dk1"/>
+          </a:fillRef>
+          <a:effectRef idx="0">
+            <a:schemeClr val="dk1"/>
+          </a:effectRef>
+          <a:fontRef idx="minor">
+            <a:schemeClr val="tx1"/>
+          </a:fontRef>
+        </p:style>
+      </p:cxnSp>
+      <p:cxnSp>
+        <p:nvCxnSpPr>
+          <p:cNvPr id="92" name="연결선: 구부러짐 91">
+            <a:extLst>
+              <a:ext uri="{FF2B5EF4-FFF2-40B4-BE49-F238E27FC236}">
+                <a16:creationId xmlns:a16="http://schemas.microsoft.com/office/drawing/2014/main" id="{7F1E6337-A264-B8D7-7690-DF253554F057}"/>
+              </a:ext>
+            </a:extLst>
+          </p:cNvPr>
+          <p:cNvCxnSpPr>
+            <a:cxnSpLocks/>
+            <a:endCxn id="27" idx="2"/>
+          </p:cNvCxnSpPr>
+          <p:nvPr/>
+        </p:nvCxnSpPr>
+        <p:spPr>
+          <a:xfrm flipV="1">
+            <a:off x="8239760" y="4177655"/>
+            <a:ext cx="1063784" cy="485052"/>
+          </a:xfrm>
+          <a:prstGeom prst="curvedConnector2">
+            <a:avLst/>
+          </a:prstGeom>
+          <a:ln>
+            <a:tailEnd type="triangle"/>
+          </a:ln>
+        </p:spPr>
+        <p:style>
+          <a:lnRef idx="1">
+            <a:schemeClr val="dk1"/>
+          </a:lnRef>
+          <a:fillRef idx="0">
+            <a:schemeClr val="dk1"/>
+          </a:fillRef>
+          <a:effectRef idx="0">
+            <a:schemeClr val="dk1"/>
+          </a:effectRef>
+          <a:fontRef idx="minor">
+            <a:schemeClr val="tx1"/>
+          </a:fontRef>
+        </p:style>
+      </p:cxnSp>
+      <p:sp>
+        <p:nvSpPr>
+          <p:cNvPr id="98" name="TextBox 97">
+            <a:extLst>
+              <a:ext uri="{FF2B5EF4-FFF2-40B4-BE49-F238E27FC236}">
+                <a16:creationId xmlns:a16="http://schemas.microsoft.com/office/drawing/2014/main" id="{537A1218-ABDE-4068-3F51-F6F95D08EEA1}"/>
+              </a:ext>
+            </a:extLst>
+          </p:cNvPr>
+          <p:cNvSpPr txBox="1"/>
+          <p:nvPr/>
+        </p:nvSpPr>
+        <p:spPr>
+          <a:xfrm>
+            <a:off x="2285999" y="4990656"/>
+            <a:ext cx="994958" cy="369332"/>
+          </a:xfrm>
+          <a:prstGeom prst="rect">
+            <a:avLst/>
+          </a:prstGeom>
+          <a:noFill/>
+        </p:spPr>
+        <p:txBody>
+          <a:bodyPr wrap="square">
+            <a:spAutoFit/>
+          </a:bodyPr>
+          <a:lstStyle/>
+          <a:p>
+            <a:r>
+              <a:rPr lang="en-US" altLang="ko-KR" dirty="0">
+                <a:latin typeface="D2Coding" panose="020B0609020101020101" pitchFamily="49" charset="-127"/>
+                <a:ea typeface="D2Coding" panose="020B0609020101020101" pitchFamily="49" charset="-127"/>
+              </a:rPr>
+              <a:t>Batch 1</a:t>
+            </a:r>
+            <a:endParaRPr lang="ko-KR" altLang="en-US" dirty="0"/>
+          </a:p>
+        </p:txBody>
+      </p:sp>
+      <p:sp>
+        <p:nvSpPr>
+          <p:cNvPr id="100" name="TextBox 99">
+            <a:extLst>
+              <a:ext uri="{FF2B5EF4-FFF2-40B4-BE49-F238E27FC236}">
+                <a16:creationId xmlns:a16="http://schemas.microsoft.com/office/drawing/2014/main" id="{A4690D3B-B7A9-9622-5958-64850429C0E4}"/>
+              </a:ext>
+            </a:extLst>
+          </p:cNvPr>
+          <p:cNvSpPr txBox="1"/>
+          <p:nvPr/>
+        </p:nvSpPr>
+        <p:spPr>
+          <a:xfrm>
+            <a:off x="2285999" y="5666929"/>
+            <a:ext cx="994958" cy="369332"/>
+          </a:xfrm>
+          <a:prstGeom prst="rect">
+            <a:avLst/>
+          </a:prstGeom>
+          <a:noFill/>
+        </p:spPr>
+        <p:txBody>
+          <a:bodyPr wrap="square">
+            <a:spAutoFit/>
+          </a:bodyPr>
+          <a:lstStyle/>
+          <a:p>
+            <a:r>
+              <a:rPr lang="en-US" altLang="ko-KR" dirty="0">
+                <a:latin typeface="D2Coding" panose="020B0609020101020101" pitchFamily="49" charset="-127"/>
+                <a:ea typeface="D2Coding" panose="020B0609020101020101" pitchFamily="49" charset="-127"/>
+              </a:rPr>
+              <a:t>Batch 2</a:t>
+            </a:r>
+            <a:endParaRPr lang="ko-KR" altLang="en-US" dirty="0"/>
+          </a:p>
+        </p:txBody>
+      </p:sp>
+    </p:spTree>
+    <p:extLst>
+      <p:ext uri="{BB962C8B-B14F-4D97-AF65-F5344CB8AC3E}">
+        <p14:creationId xmlns:p14="http://schemas.microsoft.com/office/powerpoint/2010/main" val="1301992656"/>
+      </p:ext>
+    </p:extLst>
+  </p:cSld>
+  <p:clrMapOvr>
+    <a:masterClrMapping/>
+  </p:clrMapOvr>
+  <p:timing>
+    <p:tnLst>
+      <p:par>
+        <p:cTn id="1" dur="indefinite" restart="never" nodeType="tmRoot">
+          <p:childTnLst>
+            <p:seq concurrent="1" nextAc="seek">
+              <p:cTn id="2" dur="indefinite" nodeType="mainSeq">
+                <p:childTnLst>
+                  <p:par>
+                    <p:cTn id="3" fill="hold">
+                      <p:stCondLst>
+                        <p:cond delay="indefinite"/>
+                      </p:stCondLst>
+                      <p:childTnLst>
+                        <p:par>
+                          <p:cTn id="4" fill="hold">
+                            <p:stCondLst>
+                              <p:cond delay="0"/>
+                            </p:stCondLst>
+                            <p:childTnLst>
+                              <p:par>
+                                <p:cTn id="5" presetID="1" presetClass="entr" presetSubtype="0" fill="hold" grpId="0" nodeType="clickEffect">
+                                  <p:stCondLst>
+                                    <p:cond delay="0"/>
+                                  </p:stCondLst>
+                                  <p:childTnLst>
+                                    <p:set>
+                                      <p:cBhvr>
+                                        <p:cTn id="6" dur="1" fill="hold">
+                                          <p:stCondLst>
+                                            <p:cond delay="0"/>
+                                          </p:stCondLst>
+                                        </p:cTn>
+                                        <p:tgtEl>
+                                          <p:spTgt spid="10"/>
+                                        </p:tgtEl>
+                                        <p:attrNameLst>
+                                          <p:attrName>style.visibility</p:attrName>
+                                        </p:attrNameLst>
+                                      </p:cBhvr>
+                                      <p:to>
+                                        <p:strVal val="visible"/>
+                                      </p:to>
+                                    </p:set>
+                                  </p:childTnLst>
+                                </p:cTn>
+                              </p:par>
+                              <p:par>
+                                <p:cTn id="7" presetID="1" presetClass="entr" presetSubtype="0" fill="hold" grpId="0" nodeType="withEffect">
+                                  <p:stCondLst>
+                                    <p:cond delay="0"/>
+                                  </p:stCondLst>
+                                  <p:childTnLst>
+                                    <p:set>
+                                      <p:cBhvr>
+                                        <p:cTn id="8" dur="1" fill="hold">
+                                          <p:stCondLst>
+                                            <p:cond delay="0"/>
+                                          </p:stCondLst>
+                                        </p:cTn>
+                                        <p:tgtEl>
+                                          <p:spTgt spid="12"/>
+                                        </p:tgtEl>
+                                        <p:attrNameLst>
+                                          <p:attrName>style.visibility</p:attrName>
+                                        </p:attrNameLst>
+                                      </p:cBhvr>
+                                      <p:to>
+                                        <p:strVal val="visible"/>
+                                      </p:to>
+                                    </p:set>
+                                  </p:childTnLst>
+                                </p:cTn>
+                              </p:par>
+                              <p:par>
+                                <p:cTn id="9" presetID="1" presetClass="entr" presetSubtype="0" fill="hold" grpId="0" nodeType="withEffect">
+                                  <p:stCondLst>
+                                    <p:cond delay="0"/>
+                                  </p:stCondLst>
+                                  <p:childTnLst>
+                                    <p:set>
+                                      <p:cBhvr>
+                                        <p:cTn id="10" dur="1" fill="hold">
+                                          <p:stCondLst>
+                                            <p:cond delay="0"/>
+                                          </p:stCondLst>
+                                        </p:cTn>
+                                        <p:tgtEl>
+                                          <p:spTgt spid="21"/>
+                                        </p:tgtEl>
+                                        <p:attrNameLst>
+                                          <p:attrName>style.visibility</p:attrName>
+                                        </p:attrNameLst>
+                                      </p:cBhvr>
+                                      <p:to>
+                                        <p:strVal val="visible"/>
+                                      </p:to>
+                                    </p:set>
+                                  </p:childTnLst>
+                                </p:cTn>
+                              </p:par>
+                              <p:par>
+                                <p:cTn id="11" presetID="1" presetClass="entr" presetSubtype="0" fill="hold" grpId="0" nodeType="withEffect">
+                                  <p:stCondLst>
+                                    <p:cond delay="0"/>
+                                  </p:stCondLst>
+                                  <p:childTnLst>
+                                    <p:set>
+                                      <p:cBhvr>
+                                        <p:cTn id="12" dur="1" fill="hold">
+                                          <p:stCondLst>
+                                            <p:cond delay="0"/>
+                                          </p:stCondLst>
+                                        </p:cTn>
+                                        <p:tgtEl>
+                                          <p:spTgt spid="16"/>
+                                        </p:tgtEl>
+                                        <p:attrNameLst>
+                                          <p:attrName>style.visibility</p:attrName>
+                                        </p:attrNameLst>
+                                      </p:cBhvr>
+                                      <p:to>
+                                        <p:strVal val="visible"/>
+                                      </p:to>
+                                    </p:set>
+                                  </p:childTnLst>
+                                </p:cTn>
+                              </p:par>
+                              <p:par>
+                                <p:cTn id="13" presetID="1" presetClass="entr" presetSubtype="0" fill="hold" grpId="0" nodeType="withEffect">
+                                  <p:stCondLst>
+                                    <p:cond delay="0"/>
+                                  </p:stCondLst>
+                                  <p:childTnLst>
+                                    <p:set>
+                                      <p:cBhvr>
+                                        <p:cTn id="14" dur="1" fill="hold">
+                                          <p:stCondLst>
+                                            <p:cond delay="0"/>
+                                          </p:stCondLst>
+                                        </p:cTn>
+                                        <p:tgtEl>
+                                          <p:spTgt spid="33"/>
+                                        </p:tgtEl>
+                                        <p:attrNameLst>
+                                          <p:attrName>style.visibility</p:attrName>
+                                        </p:attrNameLst>
+                                      </p:cBhvr>
+                                      <p:to>
+                                        <p:strVal val="visible"/>
+                                      </p:to>
+                                    </p:set>
+                                  </p:childTnLst>
+                                </p:cTn>
+                              </p:par>
+                              <p:par>
+                                <p:cTn id="15" presetID="1" presetClass="entr" presetSubtype="0" fill="hold" grpId="0" nodeType="withEffect">
+                                  <p:stCondLst>
+                                    <p:cond delay="0"/>
+                                  </p:stCondLst>
+                                  <p:childTnLst>
+                                    <p:set>
+                                      <p:cBhvr>
+                                        <p:cTn id="16" dur="1" fill="hold">
+                                          <p:stCondLst>
+                                            <p:cond delay="0"/>
+                                          </p:stCondLst>
+                                        </p:cTn>
+                                        <p:tgtEl>
+                                          <p:spTgt spid="27"/>
+                                        </p:tgtEl>
+                                        <p:attrNameLst>
+                                          <p:attrName>style.visibility</p:attrName>
+                                        </p:attrNameLst>
+                                      </p:cBhvr>
+                                      <p:to>
+                                        <p:strVal val="visible"/>
+                                      </p:to>
+                                    </p:set>
+                                  </p:childTnLst>
+                                </p:cTn>
+                              </p:par>
+                            </p:childTnLst>
+                          </p:cTn>
+                        </p:par>
+                      </p:childTnLst>
+                    </p:cTn>
+                  </p:par>
+                  <p:par>
+                    <p:cTn id="17" fill="hold">
+                      <p:stCondLst>
+                        <p:cond delay="indefinite"/>
+                      </p:stCondLst>
+                      <p:childTnLst>
+                        <p:par>
+                          <p:cTn id="18" fill="hold">
+                            <p:stCondLst>
+                              <p:cond delay="0"/>
+                            </p:stCondLst>
+                            <p:childTnLst>
+                              <p:par>
+                                <p:cTn id="19" presetID="1" presetClass="entr" presetSubtype="0" fill="hold" grpId="0" nodeType="clickEffect">
+                                  <p:stCondLst>
+                                    <p:cond delay="0"/>
+                                  </p:stCondLst>
+                                  <p:childTnLst>
+                                    <p:set>
+                                      <p:cBhvr>
+                                        <p:cTn id="20" dur="1" fill="hold">
+                                          <p:stCondLst>
+                                            <p:cond delay="0"/>
+                                          </p:stCondLst>
+                                        </p:cTn>
+                                        <p:tgtEl>
+                                          <p:spTgt spid="98"/>
+                                        </p:tgtEl>
+                                        <p:attrNameLst>
+                                          <p:attrName>style.visibility</p:attrName>
+                                        </p:attrNameLst>
+                                      </p:cBhvr>
+                                      <p:to>
+                                        <p:strVal val="visible"/>
+                                      </p:to>
+                                    </p:set>
+                                  </p:childTnLst>
+                                </p:cTn>
+                              </p:par>
+                              <p:par>
+                                <p:cTn id="21" presetID="1" presetClass="entr" presetSubtype="0" fill="hold" grpId="0" nodeType="withEffect">
+                                  <p:stCondLst>
+                                    <p:cond delay="0"/>
+                                  </p:stCondLst>
+                                  <p:childTnLst>
+                                    <p:set>
+                                      <p:cBhvr>
+                                        <p:cTn id="22" dur="1" fill="hold">
+                                          <p:stCondLst>
+                                            <p:cond delay="0"/>
+                                          </p:stCondLst>
+                                        </p:cTn>
+                                        <p:tgtEl>
+                                          <p:spTgt spid="100"/>
+                                        </p:tgtEl>
+                                        <p:attrNameLst>
+                                          <p:attrName>style.visibility</p:attrName>
+                                        </p:attrNameLst>
+                                      </p:cBhvr>
+                                      <p:to>
+                                        <p:strVal val="visible"/>
+                                      </p:to>
+                                    </p:set>
+                                  </p:childTnLst>
+                                </p:cTn>
+                              </p:par>
+                              <p:par>
+                                <p:cTn id="23" presetID="1" presetClass="entr" presetSubtype="0" fill="hold" nodeType="withEffect">
+                                  <p:stCondLst>
+                                    <p:cond delay="0"/>
+                                  </p:stCondLst>
+                                  <p:childTnLst>
+                                    <p:set>
+                                      <p:cBhvr>
+                                        <p:cTn id="24" dur="1" fill="hold">
+                                          <p:stCondLst>
+                                            <p:cond delay="0"/>
+                                          </p:stCondLst>
+                                        </p:cTn>
+                                        <p:tgtEl>
+                                          <p:spTgt spid="86"/>
+                                        </p:tgtEl>
+                                        <p:attrNameLst>
+                                          <p:attrName>style.visibility</p:attrName>
+                                        </p:attrNameLst>
+                                      </p:cBhvr>
+                                      <p:to>
+                                        <p:strVal val="visible"/>
+                                      </p:to>
+                                    </p:set>
+                                  </p:childTnLst>
+                                </p:cTn>
+                              </p:par>
+                              <p:par>
+                                <p:cTn id="25" presetID="1" presetClass="entr" presetSubtype="0" fill="hold" nodeType="withEffect">
+                                  <p:stCondLst>
+                                    <p:cond delay="0"/>
+                                  </p:stCondLst>
+                                  <p:childTnLst>
+                                    <p:set>
+                                      <p:cBhvr>
+                                        <p:cTn id="26" dur="1" fill="hold">
+                                          <p:stCondLst>
+                                            <p:cond delay="0"/>
+                                          </p:stCondLst>
+                                        </p:cTn>
+                                        <p:tgtEl>
+                                          <p:spTgt spid="91"/>
+                                        </p:tgtEl>
+                                        <p:attrNameLst>
+                                          <p:attrName>style.visibility</p:attrName>
+                                        </p:attrNameLst>
+                                      </p:cBhvr>
+                                      <p:to>
+                                        <p:strVal val="visible"/>
+                                      </p:to>
+                                    </p:set>
+                                  </p:childTnLst>
+                                </p:cTn>
+                              </p:par>
+                              <p:par>
+                                <p:cTn id="27" presetID="1" presetClass="entr" presetSubtype="0" fill="hold" nodeType="withEffect">
+                                  <p:stCondLst>
+                                    <p:cond delay="0"/>
+                                  </p:stCondLst>
+                                  <p:childTnLst>
+                                    <p:set>
+                                      <p:cBhvr>
+                                        <p:cTn id="28" dur="1" fill="hold">
+                                          <p:stCondLst>
+                                            <p:cond delay="0"/>
+                                          </p:stCondLst>
+                                        </p:cTn>
+                                        <p:tgtEl>
+                                          <p:spTgt spid="92"/>
+                                        </p:tgtEl>
+                                        <p:attrNameLst>
+                                          <p:attrName>style.visibility</p:attrName>
+                                        </p:attrNameLst>
+                                      </p:cBhvr>
+                                      <p:to>
+                                        <p:strVal val="visible"/>
+                                      </p:to>
+                                    </p:set>
+                                  </p:childTnLst>
+                                </p:cTn>
+                              </p:par>
+                            </p:childTnLst>
+                          </p:cTn>
+                        </p:par>
+                      </p:childTnLst>
+                    </p:cTn>
+                  </p:par>
+                </p:childTnLst>
+              </p:cTn>
+              <p:prevCondLst>
+                <p:cond evt="onPrev" delay="0">
+                  <p:tgtEl>
+                    <p:sldTgt/>
+                  </p:tgtEl>
+                </p:cond>
+              </p:prevCondLst>
+              <p:nextCondLst>
+                <p:cond evt="onNext" delay="0">
+                  <p:tgtEl>
+                    <p:sldTgt/>
+                  </p:tgtEl>
+                </p:cond>
+              </p:nextCondLst>
+            </p:seq>
+          </p:childTnLst>
+        </p:cTn>
+      </p:par>
+    </p:tnLst>
+    <p:bldLst>
+      <p:bldP spid="12" grpId="0" animBg="1"/>
+      <p:bldP spid="10" grpId="0"/>
+      <p:bldP spid="16" grpId="0" animBg="1"/>
+      <p:bldP spid="21" grpId="0"/>
+      <p:bldP spid="27" grpId="0" animBg="1"/>
+      <p:bldP spid="33" grpId="0"/>
+      <p:bldP spid="98" grpId="0"/>
+      <p:bldP spid="100" grpId="0"/>
+    </p:bldLst>
+  </p:timing>
+</p:sld>
+</file>
+
+<file path=ppt/slides/slide5.xml><?xml version="1.0" encoding="utf-8"?>
+<p:sld xmlns:a="http://schemas.openxmlformats.org/drawingml/2006/main" xmlns:r="http://schemas.openxmlformats.org/officeDocument/2006/relationships" xmlns:p="http://schemas.openxmlformats.org/presentationml/2006/main">
+  <p:cSld>
+    <p:spTree>
+      <p:nvGrpSpPr>
+        <p:cNvPr id="1" name="">
+          <a:extLst>
+            <a:ext uri="{FF2B5EF4-FFF2-40B4-BE49-F238E27FC236}">
+              <a16:creationId xmlns:a16="http://schemas.microsoft.com/office/drawing/2014/main" id="{3648E021-D61F-7A22-2B28-57928EFA8539}"/>
+            </a:ext>
+          </a:extLst>
+        </p:cNvPr>
+        <p:cNvGrpSpPr/>
+        <p:nvPr/>
+      </p:nvGrpSpPr>
+      <p:grpSpPr>
+        <a:xfrm>
+          <a:off x="0" y="0"/>
+          <a:ext cx="0" cy="0"/>
+          <a:chOff x="0" y="0"/>
+          <a:chExt cx="0" cy="0"/>
+        </a:xfrm>
+      </p:grpSpPr>
+      <p:sp>
+        <p:nvSpPr>
+          <p:cNvPr id="4" name="슬라이드 번호 개체 틀 3">
+            <a:extLst>
+              <a:ext uri="{FF2B5EF4-FFF2-40B4-BE49-F238E27FC236}">
+                <a16:creationId xmlns:a16="http://schemas.microsoft.com/office/drawing/2014/main" id="{CE5F834A-EF1A-5876-81E9-FF7A9A30D5C8}"/>
+              </a:ext>
+            </a:extLst>
+          </p:cNvPr>
+          <p:cNvSpPr>
+            <a:spLocks noGrp="1"/>
+          </p:cNvSpPr>
+          <p:nvPr>
+            <p:ph type="sldNum" sz="quarter" idx="12"/>
+          </p:nvPr>
+        </p:nvSpPr>
+        <p:spPr>
+          <a:xfrm>
+            <a:off x="10514011" y="6036261"/>
+            <a:ext cx="753545" cy="365125"/>
+          </a:xfrm>
+        </p:spPr>
+        <p:txBody>
+          <a:bodyPr/>
+          <a:lstStyle/>
+          <a:p>
+            <a:fld id="{D57F1E4F-1CFF-5643-939E-217C01CDF565}" type="slidenum">
+              <a:rPr lang="en-US" smtClean="0"/>
+              <a:pPr/>
+              <a:t>5</a:t>
+            </a:fld>
+            <a:endParaRPr lang="en-US" dirty="0"/>
+          </a:p>
+        </p:txBody>
+      </p:sp>
+      <p:sp>
+        <p:nvSpPr>
+          <p:cNvPr id="3" name="제목 1">
+            <a:extLst>
+              <a:ext uri="{FF2B5EF4-FFF2-40B4-BE49-F238E27FC236}">
+                <a16:creationId xmlns:a16="http://schemas.microsoft.com/office/drawing/2014/main" id="{F6E15B4B-6367-2059-381E-10BDA7C61D2B}"/>
+              </a:ext>
+            </a:extLst>
+          </p:cNvPr>
+          <p:cNvSpPr txBox="1">
+            <a:spLocks/>
+          </p:cNvSpPr>
+          <p:nvPr/>
+        </p:nvSpPr>
+        <p:spPr>
+          <a:xfrm>
+            <a:off x="475645" y="481983"/>
+            <a:ext cx="10353762" cy="766439"/>
+          </a:xfrm>
+          <a:prstGeom prst="rect">
+            <a:avLst/>
+          </a:prstGeom>
+        </p:spPr>
+        <p:txBody>
+          <a:bodyPr vert="horz" lIns="91440" tIns="45720" rIns="91440" bIns="45720" rtlCol="0" anchor="ctr">
+            <a:normAutofit/>
+          </a:bodyPr>
+          <a:lstStyle>
+            <a:lvl1pPr algn="ctr" defTabSz="914400" rtl="0" eaLnBrk="1" latinLnBrk="1" hangingPunct="1">
+              <a:lnSpc>
+                <a:spcPct val="90000"/>
+              </a:lnSpc>
+              <a:spcBef>
+                <a:spcPct val="0"/>
+              </a:spcBef>
+              <a:buNone/>
+              <a:defRPr sz="3200" kern="1200" cap="all" baseline="0">
+                <a:solidFill>
+                  <a:schemeClr val="tx1"/>
+                </a:solidFill>
+                <a:effectLst/>
+                <a:latin typeface="Batang" panose="02030600000101010101" pitchFamily="18" charset="-127"/>
+                <a:ea typeface="Batang" panose="02030600000101010101" pitchFamily="18" charset="-127"/>
+                <a:cs typeface="+mj-cs"/>
+              </a:defRPr>
+            </a:lvl1pPr>
+          </a:lstStyle>
+          <a:p>
+            <a:pPr algn="l">
+              <a:lnSpc>
+                <a:spcPct val="150000"/>
+              </a:lnSpc>
+            </a:pPr>
+            <a:r>
+              <a:rPr lang="en-US" altLang="ko-KR" sz="2800" b="1" cap="none" dirty="0">
+                <a:latin typeface="D2Coding" panose="020B0609020101020101" pitchFamily="49" charset="-127"/>
+                <a:ea typeface="D2Coding" panose="020B0609020101020101" pitchFamily="49" charset="-127"/>
+              </a:rPr>
+              <a:t>Batch Normalization</a:t>
+            </a:r>
+          </a:p>
+        </p:txBody>
+      </p:sp>
+      <mc:AlternateContent xmlns:mc="http://schemas.openxmlformats.org/markup-compatibility/2006">
+        <mc:Choice xmlns:a14="http://schemas.microsoft.com/office/drawing/2010/main" Requires="a14">
+          <p:sp>
+            <p:nvSpPr>
+              <p:cNvPr id="8" name="TextBox 7">
+                <a:extLst>
+                  <a:ext uri="{FF2B5EF4-FFF2-40B4-BE49-F238E27FC236}">
+                    <a16:creationId xmlns:a16="http://schemas.microsoft.com/office/drawing/2014/main" id="{6952C542-BEED-89A0-F4FA-067B93E07E4B}"/>
+                  </a:ext>
+                </a:extLst>
+              </p:cNvPr>
+              <p:cNvSpPr txBox="1"/>
+              <p:nvPr/>
+            </p:nvSpPr>
+            <p:spPr>
+              <a:xfrm>
+                <a:off x="616189" y="1305493"/>
+                <a:ext cx="10952480" cy="879984"/>
+              </a:xfrm>
+              <a:prstGeom prst="rect">
+                <a:avLst/>
+              </a:prstGeom>
+              <a:noFill/>
+            </p:spPr>
+            <p:txBody>
+              <a:bodyPr wrap="square" rtlCol="0">
+                <a:spAutoFit/>
+              </a:bodyPr>
+              <a:lstStyle/>
+              <a:p>
+                <a:pPr>
+                  <a:lnSpc>
+                    <a:spcPct val="150000"/>
+                  </a:lnSpc>
+                </a:pPr>
+                <a:r>
+                  <a:rPr lang="en-US" altLang="ko-KR" dirty="0">
+                    <a:latin typeface="D2Coding" panose="020B0609020101020101" pitchFamily="49" charset="-127"/>
+                    <a:ea typeface="D2Coding" panose="020B0609020101020101" pitchFamily="49" charset="-127"/>
+                  </a:rPr>
+                  <a:t>Batch</a:t>
+                </a:r>
+                <a:r>
+                  <a:rPr lang="ko-KR" altLang="en-US" dirty="0">
+                    <a:latin typeface="D2Coding" panose="020B0609020101020101" pitchFamily="49" charset="-127"/>
+                    <a:ea typeface="D2Coding" panose="020B0609020101020101" pitchFamily="49" charset="-127"/>
+                  </a:rPr>
+                  <a:t>가 끝날 때 마다 </a:t>
+                </a:r>
+                <a:r>
+                  <a:rPr lang="en-US" altLang="ko-KR" dirty="0">
+                    <a:latin typeface="D2Coding" panose="020B0609020101020101" pitchFamily="49" charset="-127"/>
+                    <a:ea typeface="D2Coding" panose="020B0609020101020101" pitchFamily="49" charset="-127"/>
+                  </a:rPr>
+                  <a:t>Parameters(</a:t>
+                </a:r>
+                <a14:m>
+                  <m:oMath xmlns:m="http://schemas.openxmlformats.org/officeDocument/2006/math">
+                    <m:r>
+                      <m:rPr>
+                        <m:sty m:val="p"/>
+                      </m:rPr>
+                      <a:rPr lang="en-US" altLang="ko-KR" dirty="0">
+                        <a:latin typeface="Cambria Math" panose="02040503050406030204" pitchFamily="18" charset="0"/>
+                      </a:rPr>
+                      <m:t>Weights</m:t>
+                    </m:r>
+                    <m:r>
+                      <a:rPr lang="en-US" altLang="ko-KR" dirty="0">
+                        <a:latin typeface="Cambria Math" panose="02040503050406030204" pitchFamily="18" charset="0"/>
+                      </a:rPr>
+                      <m:t>, </m:t>
+                    </m:r>
+                    <m:r>
+                      <m:rPr>
+                        <m:sty m:val="p"/>
+                      </m:rPr>
+                      <a:rPr lang="en-US" altLang="ko-KR" dirty="0">
+                        <a:latin typeface="Cambria Math" panose="02040503050406030204" pitchFamily="18" charset="0"/>
+                      </a:rPr>
+                      <m:t>bias</m:t>
+                    </m:r>
+                    <m:r>
+                      <a:rPr lang="en-US" altLang="ko-KR" dirty="0">
+                        <a:latin typeface="Cambria Math" panose="02040503050406030204" pitchFamily="18" charset="0"/>
+                      </a:rPr>
+                      <m:t>,  </m:t>
+                    </m:r>
+                    <m:r>
+                      <a:rPr lang="ko-KR" altLang="en-US" i="1" dirty="0">
+                        <a:latin typeface="Cambria Math" panose="02040503050406030204" pitchFamily="18" charset="0"/>
+                      </a:rPr>
+                      <m:t>𝑟</m:t>
+                    </m:r>
+                    <m:r>
+                      <a:rPr lang="en-US" altLang="ko-KR" b="0" i="1" dirty="0" smtClean="0">
+                        <a:latin typeface="Cambria Math" panose="02040503050406030204" pitchFamily="18" charset="0"/>
+                      </a:rPr>
+                      <m:t> </m:t>
+                    </m:r>
+                    <m:r>
+                      <a:rPr lang="en-US" altLang="ko-KR" dirty="0">
+                        <a:latin typeface="Cambria Math" panose="02040503050406030204" pitchFamily="18" charset="0"/>
+                      </a:rPr>
+                      <m:t>&amp;</m:t>
+                    </m:r>
+                    <m:r>
+                      <a:rPr lang="en-US" altLang="ko-KR" b="0" i="0" dirty="0" smtClean="0">
+                        <a:latin typeface="Cambria Math" panose="02040503050406030204" pitchFamily="18" charset="0"/>
+                      </a:rPr>
+                      <m:t> </m:t>
+                    </m:r>
+                    <m:r>
+                      <a:rPr lang="ko-KR" altLang="en-US" i="1" dirty="0">
+                        <a:latin typeface="Cambria Math" panose="02040503050406030204" pitchFamily="18" charset="0"/>
+                      </a:rPr>
+                      <m:t>𝛽</m:t>
+                    </m:r>
+                    <m:r>
+                      <a:rPr lang="en-US" altLang="ko-KR" dirty="0">
+                        <a:latin typeface="Cambria Math" panose="02040503050406030204" pitchFamily="18" charset="0"/>
+                      </a:rPr>
+                      <m:t> </m:t>
+                    </m:r>
+                  </m:oMath>
+                </a14:m>
+                <a:r>
+                  <a:rPr lang="en-US" altLang="ko-KR" dirty="0">
+                    <a:latin typeface="D2Coding" panose="020B0609020101020101" pitchFamily="49" charset="-127"/>
+                    <a:ea typeface="D2Coding" panose="020B0609020101020101" pitchFamily="49" charset="-127"/>
+                  </a:rPr>
+                  <a:t>)</a:t>
+                </a:r>
+                <a:r>
+                  <a:rPr lang="ko-KR" altLang="en-US" dirty="0">
+                    <a:latin typeface="D2Coding" panose="020B0609020101020101" pitchFamily="49" charset="-127"/>
+                    <a:ea typeface="D2Coding" panose="020B0609020101020101" pitchFamily="49" charset="-127"/>
+                  </a:rPr>
+                  <a:t>를</a:t>
+                </a:r>
+                <a:r>
+                  <a:rPr lang="en-US" altLang="ko-KR" dirty="0">
+                    <a:latin typeface="D2Coding" panose="020B0609020101020101" pitchFamily="49" charset="-127"/>
+                    <a:ea typeface="D2Coding" panose="020B0609020101020101" pitchFamily="49" charset="-127"/>
+                  </a:rPr>
+                  <a:t> </a:t>
+                </a:r>
+                <a:r>
+                  <a:rPr lang="ko-KR" altLang="en-US" dirty="0" err="1">
+                    <a:latin typeface="D2Coding" panose="020B0609020101020101" pitchFamily="49" charset="-127"/>
+                    <a:ea typeface="D2Coding" panose="020B0609020101020101" pitchFamily="49" charset="-127"/>
+                  </a:rPr>
+                  <a:t>경사하강법</a:t>
+                </a:r>
+                <a:r>
+                  <a:rPr lang="en-US" altLang="ko-KR" dirty="0">
+                    <a:latin typeface="D2Coding" panose="020B0609020101020101" pitchFamily="49" charset="-127"/>
+                    <a:ea typeface="D2Coding" panose="020B0609020101020101" pitchFamily="49" charset="-127"/>
+                  </a:rPr>
+                  <a:t>(Gradient Descent)</a:t>
+                </a:r>
+                <a:r>
+                  <a:rPr lang="ko-KR" altLang="en-US" dirty="0">
+                    <a:latin typeface="D2Coding" panose="020B0609020101020101" pitchFamily="49" charset="-127"/>
+                    <a:ea typeface="D2Coding" panose="020B0609020101020101" pitchFamily="49" charset="-127"/>
+                  </a:rPr>
+                  <a:t>으로 딱 </a:t>
+                </a:r>
+                <a:r>
+                  <a:rPr lang="en-US" altLang="ko-KR" dirty="0">
+                    <a:latin typeface="D2Coding" panose="020B0609020101020101" pitchFamily="49" charset="-127"/>
+                    <a:ea typeface="D2Coding" panose="020B0609020101020101" pitchFamily="49" charset="-127"/>
+                  </a:rPr>
+                  <a:t>1</a:t>
+                </a:r>
+                <a:r>
+                  <a:rPr lang="ko-KR" altLang="en-US" dirty="0">
+                    <a:latin typeface="D2Coding" panose="020B0609020101020101" pitchFamily="49" charset="-127"/>
+                    <a:ea typeface="D2Coding" panose="020B0609020101020101" pitchFamily="49" charset="-127"/>
+                  </a:rPr>
+                  <a:t>회 업데이트</a:t>
+                </a:r>
+                <a:r>
+                  <a:rPr lang="en-US" altLang="ko-KR" dirty="0">
+                    <a:latin typeface="D2Coding" panose="020B0609020101020101" pitchFamily="49" charset="-127"/>
+                    <a:ea typeface="D2Coding" panose="020B0609020101020101" pitchFamily="49" charset="-127"/>
+                  </a:rPr>
+                  <a:t>(</a:t>
+                </a:r>
+                <a14:m>
+                  <m:oMath xmlns:m="http://schemas.openxmlformats.org/officeDocument/2006/math">
+                    <m:r>
+                      <a:rPr lang="ko-KR" altLang="en-US" i="1" dirty="0">
+                        <a:latin typeface="Cambria Math" panose="02040503050406030204" pitchFamily="18" charset="0"/>
+                      </a:rPr>
+                      <m:t>𝜂</m:t>
+                    </m:r>
+                  </m:oMath>
+                </a14:m>
+                <a:r>
+                  <a:rPr lang="ko-KR" altLang="en-US" dirty="0">
+                    <a:latin typeface="D2Coding" panose="020B0609020101020101" pitchFamily="49" charset="-127"/>
+                    <a:ea typeface="D2Coding" panose="020B0609020101020101" pitchFamily="49" charset="-127"/>
+                  </a:rPr>
+                  <a:t>는</a:t>
+                </a:r>
+                <a:r>
+                  <a:rPr lang="en-US" altLang="ko-KR" dirty="0">
+                    <a:latin typeface="D2Coding" panose="020B0609020101020101" pitchFamily="49" charset="-127"/>
+                    <a:ea typeface="D2Coding" panose="020B0609020101020101" pitchFamily="49" charset="-127"/>
+                  </a:rPr>
+                  <a:t> </a:t>
+                </a:r>
+                <a:r>
+                  <a:rPr lang="ko-KR" altLang="en-US" dirty="0">
+                    <a:latin typeface="D2Coding" panose="020B0609020101020101" pitchFamily="49" charset="-127"/>
+                    <a:ea typeface="D2Coding" panose="020B0609020101020101" pitchFamily="49" charset="-127"/>
+                  </a:rPr>
+                  <a:t>학습률</a:t>
+                </a:r>
+                <a:r>
+                  <a:rPr lang="en-US" altLang="ko-KR" dirty="0">
+                    <a:latin typeface="D2Coding" panose="020B0609020101020101" pitchFamily="49" charset="-127"/>
+                    <a:ea typeface="D2Coding" panose="020B0609020101020101" pitchFamily="49" charset="-127"/>
+                  </a:rPr>
+                  <a:t>) </a:t>
+                </a:r>
+                <a:r>
+                  <a:rPr lang="ko-KR" altLang="en-US" dirty="0">
+                    <a:latin typeface="D2Coding" panose="020B0609020101020101" pitchFamily="49" charset="-127"/>
+                    <a:ea typeface="D2Coding" panose="020B0609020101020101" pitchFamily="49" charset="-127"/>
+                  </a:rPr>
+                  <a:t>하고 평균</a:t>
+                </a:r>
+                <a:r>
+                  <a:rPr lang="en-US" altLang="ko-KR" dirty="0">
+                    <a:latin typeface="D2Coding" panose="020B0609020101020101" pitchFamily="49" charset="-127"/>
+                    <a:ea typeface="D2Coding" panose="020B0609020101020101" pitchFamily="49" charset="-127"/>
+                  </a:rPr>
+                  <a:t>(</a:t>
+                </a:r>
+                <a14:m>
+                  <m:oMath xmlns:m="http://schemas.openxmlformats.org/officeDocument/2006/math">
+                    <m:r>
+                      <a:rPr lang="ko-KR" altLang="en-US" i="1" dirty="0">
+                        <a:latin typeface="Cambria Math" panose="02040503050406030204" pitchFamily="18" charset="0"/>
+                      </a:rPr>
+                      <m:t>𝑢</m:t>
+                    </m:r>
+                  </m:oMath>
+                </a14:m>
+                <a:r>
+                  <a:rPr lang="en-US" altLang="ko-KR" dirty="0">
+                    <a:latin typeface="D2Coding" panose="020B0609020101020101" pitchFamily="49" charset="-127"/>
+                    <a:ea typeface="D2Coding" panose="020B0609020101020101" pitchFamily="49" charset="-127"/>
+                  </a:rPr>
+                  <a:t>)</a:t>
+                </a:r>
+                <a:r>
+                  <a:rPr lang="ko-KR" altLang="en-US" dirty="0">
+                    <a:latin typeface="D2Coding" panose="020B0609020101020101" pitchFamily="49" charset="-127"/>
+                    <a:ea typeface="D2Coding" panose="020B0609020101020101" pitchFamily="49" charset="-127"/>
+                  </a:rPr>
+                  <a:t>과 분산</a:t>
+                </a:r>
+                <a:r>
+                  <a:rPr lang="en-US" altLang="ko-KR" dirty="0">
+                    <a:latin typeface="D2Coding" panose="020B0609020101020101" pitchFamily="49" charset="-127"/>
+                    <a:ea typeface="D2Coding" panose="020B0609020101020101" pitchFamily="49" charset="-127"/>
+                  </a:rPr>
+                  <a:t>(</a:t>
+                </a:r>
+                <a14:m>
+                  <m:oMath xmlns:m="http://schemas.openxmlformats.org/officeDocument/2006/math">
+                    <m:r>
+                      <a:rPr lang="ko-KR" altLang="en-US" i="1" dirty="0">
+                        <a:latin typeface="Cambria Math" panose="02040503050406030204" pitchFamily="18" charset="0"/>
+                      </a:rPr>
+                      <m:t>𝜎</m:t>
+                    </m:r>
+                  </m:oMath>
+                </a14:m>
+                <a:r>
+                  <a:rPr lang="en-US" altLang="ko-KR" dirty="0">
+                    <a:latin typeface="D2Coding" panose="020B0609020101020101" pitchFamily="49" charset="-127"/>
+                    <a:ea typeface="D2Coding" panose="020B0609020101020101" pitchFamily="49" charset="-127"/>
+                  </a:rPr>
+                  <a:t>)</a:t>
+                </a:r>
+                <a:r>
+                  <a:rPr lang="ko-KR" altLang="en-US" dirty="0">
+                    <a:latin typeface="D2Coding" panose="020B0609020101020101" pitchFamily="49" charset="-127"/>
+                    <a:ea typeface="D2Coding" panose="020B0609020101020101" pitchFamily="49" charset="-127"/>
+                  </a:rPr>
+                  <a:t> </a:t>
+                </a:r>
+                <a:r>
+                  <a:rPr lang="en-US" altLang="ko-KR" dirty="0">
+                    <a:latin typeface="D2Coding" panose="020B0609020101020101" pitchFamily="49" charset="-127"/>
+                    <a:ea typeface="D2Coding" panose="020B0609020101020101" pitchFamily="49" charset="-127"/>
+                  </a:rPr>
+                  <a:t>parameters</a:t>
+                </a:r>
+                <a:r>
+                  <a:rPr lang="ko-KR" altLang="en-US" dirty="0">
+                    <a:latin typeface="D2Coding" panose="020B0609020101020101" pitchFamily="49" charset="-127"/>
+                    <a:ea typeface="D2Coding" panose="020B0609020101020101" pitchFamily="49" charset="-127"/>
+                  </a:rPr>
+                  <a:t>는 계산만 하게 됨</a:t>
+                </a:r>
+              </a:p>
+            </p:txBody>
+          </p:sp>
+        </mc:Choice>
+        <mc:Fallback>
+          <p:sp>
+            <p:nvSpPr>
+              <p:cNvPr id="8" name="TextBox 7">
+                <a:extLst>
+                  <a:ext uri="{FF2B5EF4-FFF2-40B4-BE49-F238E27FC236}">
+                    <a16:creationId xmlns:a16="http://schemas.microsoft.com/office/drawing/2014/main" id="{6952C542-BEED-89A0-F4FA-067B93E07E4B}"/>
+                  </a:ext>
+                </a:extLst>
+              </p:cNvPr>
+              <p:cNvSpPr txBox="1">
+                <a:spLocks noRot="1" noChangeAspect="1" noMove="1" noResize="1" noEditPoints="1" noAdjustHandles="1" noChangeArrowheads="1" noChangeShapeType="1" noTextEdit="1"/>
+              </p:cNvSpPr>
+              <p:nvPr/>
+            </p:nvSpPr>
+            <p:spPr>
+              <a:xfrm>
+                <a:off x="616189" y="1305493"/>
+                <a:ext cx="10952480" cy="879984"/>
+              </a:xfrm>
+              <a:prstGeom prst="rect">
+                <a:avLst/>
+              </a:prstGeom>
+              <a:blipFill>
+                <a:blip r:embed="rId2"/>
+                <a:stretch>
+                  <a:fillRect l="-445" b="-9655"/>
+                </a:stretch>
+              </a:blipFill>
+            </p:spPr>
+            <p:txBody>
+              <a:bodyPr/>
+              <a:lstStyle/>
+              <a:p>
+                <a:r>
+                  <a:rPr lang="ko-KR" altLang="en-US">
+                    <a:noFill/>
+                  </a:rPr>
+                  <a:t> </a:t>
+                </a:r>
+              </a:p>
+            </p:txBody>
+          </p:sp>
+        </mc:Fallback>
+      </mc:AlternateContent>
+      <p:pic>
+        <p:nvPicPr>
+          <p:cNvPr id="6" name="그림 5">
+            <a:extLst>
+              <a:ext uri="{FF2B5EF4-FFF2-40B4-BE49-F238E27FC236}">
+                <a16:creationId xmlns:a16="http://schemas.microsoft.com/office/drawing/2014/main" id="{A13F4FA6-5BBF-0228-1335-4BEFCED8FA5C}"/>
+              </a:ext>
+            </a:extLst>
+          </p:cNvPr>
+          <p:cNvPicPr>
+            <a:picLocks noChangeAspect="1"/>
+          </p:cNvPicPr>
+          <p:nvPr/>
+        </p:nvPicPr>
+        <p:blipFill>
+          <a:blip r:embed="rId3">
+            <a:duotone>
+              <a:prstClr val="black"/>
+              <a:schemeClr val="accent2">
+                <a:tint val="45000"/>
+                <a:satMod val="400000"/>
+              </a:schemeClr>
+            </a:duotone>
+          </a:blip>
+          <a:stretch>
+            <a:fillRect/>
+          </a:stretch>
+        </p:blipFill>
+        <p:spPr>
+          <a:xfrm>
+            <a:off x="2190625" y="2810984"/>
+            <a:ext cx="3377055" cy="3197901"/>
+          </a:xfrm>
+          <a:prstGeom prst="rect">
+            <a:avLst/>
+          </a:prstGeom>
+        </p:spPr>
+      </p:pic>
+      <p:pic>
+        <p:nvPicPr>
+          <p:cNvPr id="13" name="그림 12">
+            <a:extLst>
+              <a:ext uri="{FF2B5EF4-FFF2-40B4-BE49-F238E27FC236}">
+                <a16:creationId xmlns:a16="http://schemas.microsoft.com/office/drawing/2014/main" id="{701B1507-D5ED-F706-9301-471A8F880822}"/>
+              </a:ext>
+            </a:extLst>
+          </p:cNvPr>
+          <p:cNvPicPr>
+            <a:picLocks noChangeAspect="1"/>
+          </p:cNvPicPr>
+          <p:nvPr/>
+        </p:nvPicPr>
+        <p:blipFill>
+          <a:blip r:embed="rId4"/>
+          <a:stretch>
+            <a:fillRect/>
+          </a:stretch>
+        </p:blipFill>
+        <p:spPr>
+          <a:xfrm>
+            <a:off x="7030722" y="2810984"/>
+            <a:ext cx="1767993" cy="2057578"/>
+          </a:xfrm>
+          <a:prstGeom prst="rect">
+            <a:avLst/>
+          </a:prstGeom>
+        </p:spPr>
+      </p:pic>
+    </p:spTree>
+    <p:extLst>
+      <p:ext uri="{BB962C8B-B14F-4D97-AF65-F5344CB8AC3E}">
+        <p14:creationId xmlns:p14="http://schemas.microsoft.com/office/powerpoint/2010/main" val="4156595285"/>
+      </p:ext>
+    </p:extLst>
+  </p:cSld>
+  <p:clrMapOvr>
+    <a:masterClrMapping/>
+  </p:clrMapOvr>
+</p:sld>
+</file>
+
+<file path=ppt/slides/slide6.xml><?xml version="1.0" encoding="utf-8"?>
+<p:sld xmlns:a="http://schemas.openxmlformats.org/drawingml/2006/main" xmlns:r="http://schemas.openxmlformats.org/officeDocument/2006/relationships" xmlns:p="http://schemas.openxmlformats.org/presentationml/2006/main">
+  <p:cSld>
+    <p:spTree>
+      <p:nvGrpSpPr>
+        <p:cNvPr id="1" name="">
+          <a:extLst>
+            <a:ext uri="{FF2B5EF4-FFF2-40B4-BE49-F238E27FC236}">
+              <a16:creationId xmlns:a16="http://schemas.microsoft.com/office/drawing/2014/main" id="{D448B8CC-BEE0-D101-B4AC-6955C2DB6A95}"/>
+            </a:ext>
+          </a:extLst>
+        </p:cNvPr>
+        <p:cNvGrpSpPr/>
+        <p:nvPr/>
+      </p:nvGrpSpPr>
+      <p:grpSpPr>
+        <a:xfrm>
+          <a:off x="0" y="0"/>
+          <a:ext cx="0" cy="0"/>
+          <a:chOff x="0" y="0"/>
+          <a:chExt cx="0" cy="0"/>
+        </a:xfrm>
+      </p:grpSpPr>
+      <p:sp>
+        <p:nvSpPr>
+          <p:cNvPr id="4" name="슬라이드 번호 개체 틀 3">
+            <a:extLst>
+              <a:ext uri="{FF2B5EF4-FFF2-40B4-BE49-F238E27FC236}">
+                <a16:creationId xmlns:a16="http://schemas.microsoft.com/office/drawing/2014/main" id="{BD949B9C-E0C2-5E0F-73E2-3E2EEB3F27A8}"/>
+              </a:ext>
+            </a:extLst>
+          </p:cNvPr>
+          <p:cNvSpPr>
+            <a:spLocks noGrp="1"/>
+          </p:cNvSpPr>
+          <p:nvPr>
+            <p:ph type="sldNum" sz="quarter" idx="12"/>
+          </p:nvPr>
+        </p:nvSpPr>
+        <p:spPr>
+          <a:xfrm>
+            <a:off x="10514011" y="6036261"/>
+            <a:ext cx="753545" cy="365125"/>
+          </a:xfrm>
+        </p:spPr>
+        <p:txBody>
+          <a:bodyPr/>
+          <a:lstStyle/>
+          <a:p>
+            <a:fld id="{D57F1E4F-1CFF-5643-939E-217C01CDF565}" type="slidenum">
+              <a:rPr lang="en-US" smtClean="0"/>
+              <a:pPr/>
+              <a:t>6</a:t>
+            </a:fld>
+            <a:endParaRPr lang="en-US" dirty="0"/>
+          </a:p>
+        </p:txBody>
+      </p:sp>
+      <p:sp>
+        <p:nvSpPr>
+          <p:cNvPr id="3" name="제목 1">
+            <a:extLst>
+              <a:ext uri="{FF2B5EF4-FFF2-40B4-BE49-F238E27FC236}">
+                <a16:creationId xmlns:a16="http://schemas.microsoft.com/office/drawing/2014/main" id="{A79379F2-EF06-0160-1258-B76A6AE0E3C0}"/>
+              </a:ext>
+            </a:extLst>
+          </p:cNvPr>
+          <p:cNvSpPr txBox="1">
+            <a:spLocks/>
+          </p:cNvSpPr>
+          <p:nvPr/>
+        </p:nvSpPr>
+        <p:spPr>
+          <a:xfrm>
+            <a:off x="475645" y="481983"/>
+            <a:ext cx="10353762" cy="766439"/>
+          </a:xfrm>
+          <a:prstGeom prst="rect">
+            <a:avLst/>
+          </a:prstGeom>
+        </p:spPr>
+        <p:txBody>
+          <a:bodyPr vert="horz" lIns="91440" tIns="45720" rIns="91440" bIns="45720" rtlCol="0" anchor="ctr">
+            <a:normAutofit/>
+          </a:bodyPr>
+          <a:lstStyle>
+            <a:lvl1pPr algn="ctr" defTabSz="914400" rtl="0" eaLnBrk="1" latinLnBrk="1" hangingPunct="1">
+              <a:lnSpc>
+                <a:spcPct val="90000"/>
+              </a:lnSpc>
+              <a:spcBef>
+                <a:spcPct val="0"/>
+              </a:spcBef>
+              <a:buNone/>
+              <a:defRPr sz="3200" kern="1200" cap="all" baseline="0">
+                <a:solidFill>
+                  <a:schemeClr val="tx1"/>
+                </a:solidFill>
+                <a:effectLst/>
+                <a:latin typeface="Batang" panose="02030600000101010101" pitchFamily="18" charset="-127"/>
+                <a:ea typeface="Batang" panose="02030600000101010101" pitchFamily="18" charset="-127"/>
+                <a:cs typeface="+mj-cs"/>
+              </a:defRPr>
+            </a:lvl1pPr>
+          </a:lstStyle>
+          <a:p>
+            <a:pPr algn="l">
+              <a:lnSpc>
+                <a:spcPct val="150000"/>
+              </a:lnSpc>
+            </a:pPr>
+            <a:r>
+              <a:rPr lang="en-US" altLang="ko-KR" sz="2800" b="1" cap="none" dirty="0">
+                <a:latin typeface="D2Coding" panose="020B0609020101020101" pitchFamily="49" charset="-127"/>
+                <a:ea typeface="D2Coding" panose="020B0609020101020101" pitchFamily="49" charset="-127"/>
+              </a:rPr>
+              <a:t>Batch Normalization</a:t>
+            </a:r>
+          </a:p>
+        </p:txBody>
+      </p:sp>
+      <mc:AlternateContent xmlns:mc="http://schemas.openxmlformats.org/markup-compatibility/2006">
+        <mc:Choice xmlns:a14="http://schemas.microsoft.com/office/drawing/2010/main" Requires="a14">
+          <p:sp>
+            <p:nvSpPr>
+              <p:cNvPr id="8" name="TextBox 7">
+                <a:extLst>
+                  <a:ext uri="{FF2B5EF4-FFF2-40B4-BE49-F238E27FC236}">
+                    <a16:creationId xmlns:a16="http://schemas.microsoft.com/office/drawing/2014/main" id="{596733AB-4155-C169-0035-A8BBCF0ABB05}"/>
+                  </a:ext>
+                </a:extLst>
+              </p:cNvPr>
+              <p:cNvSpPr txBox="1"/>
+              <p:nvPr/>
+            </p:nvSpPr>
+            <p:spPr>
+              <a:xfrm>
+                <a:off x="616189" y="1305493"/>
+                <a:ext cx="10952480" cy="1228670"/>
+              </a:xfrm>
+              <a:prstGeom prst="rect">
+                <a:avLst/>
+              </a:prstGeom>
+              <a:noFill/>
+            </p:spPr>
+            <p:txBody>
+              <a:bodyPr wrap="square" rtlCol="0">
+                <a:spAutoFit/>
+              </a:bodyPr>
+              <a:lstStyle/>
+              <a:p>
+                <a:pPr>
+                  <a:lnSpc>
+                    <a:spcPct val="150000"/>
+                  </a:lnSpc>
+                </a:pPr>
+                <a:r>
+                  <a:rPr lang="ko-KR" altLang="en-US" sz="1700" dirty="0">
+                    <a:latin typeface="D2Coding" panose="020B0609020101020101" pitchFamily="49" charset="-127"/>
+                    <a:ea typeface="D2Coding" panose="020B0609020101020101" pitchFamily="49" charset="-127"/>
+                  </a:rPr>
+                  <a:t>아래 모델의 총</a:t>
+                </a:r>
+                <a:r>
+                  <a:rPr lang="en-US" altLang="ko-KR" sz="1700" dirty="0">
+                    <a:latin typeface="D2Coding" panose="020B0609020101020101" pitchFamily="49" charset="-127"/>
+                    <a:ea typeface="D2Coding" panose="020B0609020101020101" pitchFamily="49" charset="-127"/>
+                  </a:rPr>
+                  <a:t> </a:t>
+                </a:r>
+                <a:r>
+                  <a:rPr lang="en-US" altLang="ko-KR" sz="1700" dirty="0" err="1">
+                    <a:latin typeface="D2Coding" panose="020B0609020101020101" pitchFamily="49" charset="-127"/>
+                    <a:ea typeface="D2Coding" panose="020B0609020101020101" pitchFamily="49" charset="-127"/>
+                  </a:rPr>
+                  <a:t>paramters</a:t>
+                </a:r>
+                <a:r>
+                  <a:rPr lang="ko-KR" altLang="en-US" sz="1700" dirty="0">
+                    <a:latin typeface="D2Coding" panose="020B0609020101020101" pitchFamily="49" charset="-127"/>
+                    <a:ea typeface="D2Coding" panose="020B0609020101020101" pitchFamily="49" charset="-127"/>
+                  </a:rPr>
+                  <a:t> 개수를 구하라</a:t>
+                </a:r>
+                <a:r>
+                  <a:rPr lang="en-US" altLang="ko-KR" sz="1700" dirty="0">
+                    <a:latin typeface="D2Coding" panose="020B0609020101020101" pitchFamily="49" charset="-127"/>
+                    <a:ea typeface="D2Coding" panose="020B0609020101020101" pitchFamily="49" charset="-127"/>
+                  </a:rPr>
+                  <a:t>(</a:t>
+                </a:r>
+                <a:r>
+                  <a:rPr lang="ko-KR" altLang="en-US" sz="1700" dirty="0">
+                    <a:latin typeface="D2Coding" panose="020B0609020101020101" pitchFamily="49" charset="-127"/>
+                    <a:ea typeface="D2Coding" panose="020B0609020101020101" pitchFamily="49" charset="-127"/>
+                  </a:rPr>
+                  <a:t>첫번째 </a:t>
+                </a:r>
+                <a:r>
+                  <a:rPr lang="en-US" altLang="ko-KR" sz="1700" dirty="0">
+                    <a:latin typeface="D2Coding" panose="020B0609020101020101" pitchFamily="49" charset="-127"/>
+                    <a:ea typeface="D2Coding" panose="020B0609020101020101" pitchFamily="49" charset="-127"/>
+                  </a:rPr>
+                  <a:t>Batch norm layer</a:t>
+                </a:r>
+                <a:r>
+                  <a:rPr lang="ko-KR" altLang="en-US" sz="1700" dirty="0">
+                    <a:latin typeface="D2Coding" panose="020B0609020101020101" pitchFamily="49" charset="-127"/>
+                    <a:ea typeface="D2Coding" panose="020B0609020101020101" pitchFamily="49" charset="-127"/>
+                  </a:rPr>
+                  <a:t>의 파라미터 </a:t>
+                </a:r>
+                <a:r>
+                  <a:rPr lang="en-US" altLang="ko-KR" sz="1700" dirty="0">
+                    <a:latin typeface="D2Coding" panose="020B0609020101020101" pitchFamily="49" charset="-127"/>
+                    <a:ea typeface="D2Coding" panose="020B0609020101020101" pitchFamily="49" charset="-127"/>
+                  </a:rPr>
+                  <a:t>3,136(28*28*4)</a:t>
+                </a:r>
+                <a:r>
+                  <a:rPr lang="ko-KR" altLang="en-US" sz="1700" dirty="0">
+                    <a:latin typeface="D2Coding" panose="020B0609020101020101" pitchFamily="49" charset="-127"/>
+                    <a:ea typeface="D2Coding" panose="020B0609020101020101" pitchFamily="49" charset="-127"/>
+                  </a:rPr>
+                  <a:t>개 중에서 </a:t>
+                </a:r>
+                <a:r>
+                  <a:rPr lang="ko-KR" altLang="en-US" sz="1700" dirty="0" err="1">
+                    <a:latin typeface="D2Coding" panose="020B0609020101020101" pitchFamily="49" charset="-127"/>
+                    <a:ea typeface="D2Coding" panose="020B0609020101020101" pitchFamily="49" charset="-127"/>
+                  </a:rPr>
+                  <a:t>경사하강법으로</a:t>
+                </a:r>
+                <a:r>
+                  <a:rPr lang="ko-KR" altLang="en-US" sz="1700" dirty="0">
+                    <a:latin typeface="D2Coding" panose="020B0609020101020101" pitchFamily="49" charset="-127"/>
+                    <a:ea typeface="D2Coding" panose="020B0609020101020101" pitchFamily="49" charset="-127"/>
+                  </a:rPr>
+                  <a:t> </a:t>
+                </a:r>
+                <a:r>
+                  <a:rPr lang="ko-KR" altLang="en-US" sz="1700" dirty="0" err="1">
+                    <a:latin typeface="D2Coding" panose="020B0609020101020101" pitchFamily="49" charset="-127"/>
+                    <a:ea typeface="D2Coding" panose="020B0609020101020101" pitchFamily="49" charset="-127"/>
+                  </a:rPr>
+                  <a:t>역전파</a:t>
+                </a:r>
+                <a:r>
+                  <a:rPr lang="ko-KR" altLang="en-US" sz="1700" dirty="0">
+                    <a:latin typeface="D2Coding" panose="020B0609020101020101" pitchFamily="49" charset="-127"/>
+                    <a:ea typeface="D2Coding" panose="020B0609020101020101" pitchFamily="49" charset="-127"/>
+                  </a:rPr>
+                  <a:t> 때 직접 학습시키는 파라미터</a:t>
+                </a:r>
+                <a:r>
+                  <a:rPr lang="en-US" altLang="ko-KR" sz="1700" dirty="0">
+                    <a:latin typeface="D2Coding" panose="020B0609020101020101" pitchFamily="49" charset="-127"/>
+                    <a:ea typeface="D2Coding" panose="020B0609020101020101" pitchFamily="49" charset="-127"/>
+                  </a:rPr>
+                  <a:t>(Trainable)</a:t>
+                </a:r>
+                <a:r>
+                  <a:rPr lang="ko-KR" altLang="en-US" sz="1700" dirty="0">
+                    <a:latin typeface="D2Coding" panose="020B0609020101020101" pitchFamily="49" charset="-127"/>
+                    <a:ea typeface="D2Coding" panose="020B0609020101020101" pitchFamily="49" charset="-127"/>
+                  </a:rPr>
+                  <a:t>는 </a:t>
+                </a:r>
+                <a14:m>
+                  <m:oMath xmlns:m="http://schemas.openxmlformats.org/officeDocument/2006/math">
+                    <m:r>
+                      <a:rPr lang="ko-KR" altLang="en-US" sz="1700" i="1" dirty="0">
+                        <a:latin typeface="Cambria Math" panose="02040503050406030204" pitchFamily="18" charset="0"/>
+                      </a:rPr>
+                      <m:t>𝑟</m:t>
+                    </m:r>
+                    <m:r>
+                      <a:rPr lang="en-US" altLang="ko-KR" sz="1700" i="1" dirty="0">
+                        <a:latin typeface="Cambria Math" panose="02040503050406030204" pitchFamily="18" charset="0"/>
+                      </a:rPr>
+                      <m:t> </m:t>
+                    </m:r>
+                    <m:r>
+                      <a:rPr lang="en-US" altLang="ko-KR" sz="1700" dirty="0">
+                        <a:latin typeface="Cambria Math" panose="02040503050406030204" pitchFamily="18" charset="0"/>
+                      </a:rPr>
+                      <m:t>&amp;</m:t>
+                    </m:r>
+                    <m:r>
+                      <a:rPr lang="en-US" altLang="ko-KR" sz="1700" dirty="0">
+                        <a:latin typeface="Cambria Math" panose="02040503050406030204" pitchFamily="18" charset="0"/>
+                      </a:rPr>
+                      <m:t> </m:t>
+                    </m:r>
+                    <m:r>
+                      <a:rPr lang="ko-KR" altLang="en-US" sz="1700" i="1" dirty="0">
+                        <a:latin typeface="Cambria Math" panose="02040503050406030204" pitchFamily="18" charset="0"/>
+                      </a:rPr>
+                      <m:t>𝛽</m:t>
+                    </m:r>
+                  </m:oMath>
+                </a14:m>
+                <a:r>
+                  <a:rPr lang="en-US" altLang="ko-KR" sz="1700" dirty="0">
+                    <a:latin typeface="D2Coding" panose="020B0609020101020101" pitchFamily="49" charset="-127"/>
+                    <a:ea typeface="D2Coding" panose="020B0609020101020101" pitchFamily="49" charset="-127"/>
+                  </a:rPr>
+                  <a:t> 2</a:t>
+                </a:r>
+                <a:r>
+                  <a:rPr lang="ko-KR" altLang="en-US" sz="1700" dirty="0">
+                    <a:latin typeface="D2Coding" panose="020B0609020101020101" pitchFamily="49" charset="-127"/>
+                    <a:ea typeface="D2Coding" panose="020B0609020101020101" pitchFamily="49" charset="-127"/>
+                  </a:rPr>
+                  <a:t>뿐이라 총 </a:t>
+                </a:r>
+                <a:r>
+                  <a:rPr lang="en-US" altLang="ko-KR" sz="1700" dirty="0">
+                    <a:latin typeface="D2Coding" panose="020B0609020101020101" pitchFamily="49" charset="-127"/>
+                    <a:ea typeface="D2Coding" panose="020B0609020101020101" pitchFamily="49" charset="-127"/>
+                  </a:rPr>
+                  <a:t>1,568</a:t>
+                </a:r>
+                <a:r>
+                  <a:rPr lang="ko-KR" altLang="en-US" sz="1700" dirty="0">
+                    <a:latin typeface="D2Coding" panose="020B0609020101020101" pitchFamily="49" charset="-127"/>
+                    <a:ea typeface="D2Coding" panose="020B0609020101020101" pitchFamily="49" charset="-127"/>
+                  </a:rPr>
+                  <a:t>개</a:t>
+                </a:r>
+                <a:r>
+                  <a:rPr lang="en-US" altLang="ko-KR" sz="1700" dirty="0">
+                    <a:latin typeface="D2Coding" panose="020B0609020101020101" pitchFamily="49" charset="-127"/>
+                    <a:ea typeface="D2Coding" panose="020B0609020101020101" pitchFamily="49" charset="-127"/>
+                  </a:rPr>
+                  <a:t>(784*2)</a:t>
+                </a:r>
+                <a:r>
+                  <a:rPr lang="ko-KR" altLang="en-US" sz="1700" dirty="0">
+                    <a:latin typeface="D2Coding" panose="020B0609020101020101" pitchFamily="49" charset="-127"/>
+                    <a:ea typeface="D2Coding" panose="020B0609020101020101" pitchFamily="49" charset="-127"/>
+                  </a:rPr>
+                  <a:t>이고</a:t>
+                </a:r>
+                <a:r>
+                  <a:rPr lang="en-US" altLang="ko-KR" sz="1700" dirty="0">
+                    <a:latin typeface="D2Coding" panose="020B0609020101020101" pitchFamily="49" charset="-127"/>
+                    <a:ea typeface="D2Coding" panose="020B0609020101020101" pitchFamily="49" charset="-127"/>
+                  </a:rPr>
+                  <a:t>, </a:t>
+                </a:r>
+                <a:r>
+                  <a:rPr lang="ko-KR" altLang="en-US" sz="1700" dirty="0">
+                    <a:latin typeface="D2Coding" panose="020B0609020101020101" pitchFamily="49" charset="-127"/>
+                    <a:ea typeface="D2Coding" panose="020B0609020101020101" pitchFamily="49" charset="-127"/>
+                  </a:rPr>
+                  <a:t>나머지 </a:t>
+                </a:r>
+                <a:r>
+                  <a:rPr lang="en-US" altLang="ko-KR" sz="1700" dirty="0">
+                    <a:latin typeface="D2Coding" panose="020B0609020101020101" pitchFamily="49" charset="-127"/>
+                    <a:ea typeface="D2Coding" panose="020B0609020101020101" pitchFamily="49" charset="-127"/>
+                  </a:rPr>
+                  <a:t>1,568</a:t>
+                </a:r>
+                <a:r>
+                  <a:rPr lang="ko-KR" altLang="en-US" sz="1700" dirty="0">
+                    <a:latin typeface="D2Coding" panose="020B0609020101020101" pitchFamily="49" charset="-127"/>
+                    <a:ea typeface="D2Coding" panose="020B0609020101020101" pitchFamily="49" charset="-127"/>
+                  </a:rPr>
+                  <a:t>개</a:t>
+                </a:r>
+                <a:r>
+                  <a:rPr lang="en-US" altLang="ko-KR" sz="1700" dirty="0">
+                    <a:latin typeface="D2Coding" panose="020B0609020101020101" pitchFamily="49" charset="-127"/>
+                    <a:ea typeface="D2Coding" panose="020B0609020101020101" pitchFamily="49" charset="-127"/>
+                  </a:rPr>
+                  <a:t>(</a:t>
+                </a:r>
+                <a14:m>
+                  <m:oMath xmlns:m="http://schemas.openxmlformats.org/officeDocument/2006/math">
+                    <m:r>
+                      <a:rPr lang="ko-KR" altLang="en-US" sz="1700" i="1" dirty="0">
+                        <a:latin typeface="Cambria Math" panose="02040503050406030204" pitchFamily="18" charset="0"/>
+                      </a:rPr>
+                      <m:t>𝑢</m:t>
+                    </m:r>
+                  </m:oMath>
+                </a14:m>
+                <a:r>
+                  <a:rPr lang="en-US" altLang="ko-KR" sz="1700" dirty="0">
+                    <a:latin typeface="D2Coding" panose="020B0609020101020101" pitchFamily="49" charset="-127"/>
+                    <a:ea typeface="D2Coding" panose="020B0609020101020101" pitchFamily="49" charset="-127"/>
+                  </a:rPr>
+                  <a:t>,</a:t>
+                </a:r>
+                <a14:m>
+                  <m:oMath xmlns:m="http://schemas.openxmlformats.org/officeDocument/2006/math">
+                    <m:r>
+                      <a:rPr lang="en-US" altLang="ko-KR" sz="1700" b="0" i="0" dirty="0" smtClean="0">
+                        <a:latin typeface="Cambria Math" panose="02040503050406030204" pitchFamily="18" charset="0"/>
+                      </a:rPr>
+                      <m:t>  </m:t>
+                    </m:r>
+                    <m:r>
+                      <a:rPr lang="ko-KR" altLang="en-US" sz="1700" i="1" dirty="0">
+                        <a:latin typeface="Cambria Math" panose="02040503050406030204" pitchFamily="18" charset="0"/>
+                      </a:rPr>
+                      <m:t>𝜎</m:t>
+                    </m:r>
+                  </m:oMath>
+                </a14:m>
+                <a:r>
+                  <a:rPr lang="en-US" altLang="ko-KR" sz="1700" dirty="0">
+                    <a:latin typeface="D2Coding" panose="020B0609020101020101" pitchFamily="49" charset="-127"/>
+                    <a:ea typeface="D2Coding" panose="020B0609020101020101" pitchFamily="49" charset="-127"/>
+                  </a:rPr>
+                  <a:t>)</a:t>
+                </a:r>
+                <a:r>
+                  <a:rPr lang="ko-KR" altLang="en-US" sz="1700" dirty="0">
+                    <a:latin typeface="D2Coding" panose="020B0609020101020101" pitchFamily="49" charset="-127"/>
+                    <a:ea typeface="D2Coding" panose="020B0609020101020101" pitchFamily="49" charset="-127"/>
+                  </a:rPr>
+                  <a:t>는 훈련 과정에서 통계를 내어 </a:t>
+                </a:r>
+                <a:r>
+                  <a:rPr lang="ko-KR" altLang="en-US" sz="1700" dirty="0" err="1">
+                    <a:latin typeface="D2Coding" panose="020B0609020101020101" pitchFamily="49" charset="-127"/>
+                    <a:ea typeface="D2Coding" panose="020B0609020101020101" pitchFamily="49" charset="-127"/>
+                  </a:rPr>
+                  <a:t>저장만하는</a:t>
+                </a:r>
+                <a:r>
+                  <a:rPr lang="ko-KR" altLang="en-US" sz="1700" dirty="0">
+                    <a:latin typeface="D2Coding" panose="020B0609020101020101" pitchFamily="49" charset="-127"/>
+                    <a:ea typeface="D2Coding" panose="020B0609020101020101" pitchFamily="49" charset="-127"/>
+                  </a:rPr>
+                  <a:t> 파라미터</a:t>
+                </a:r>
+                <a:r>
+                  <a:rPr lang="en-US" altLang="ko-KR" sz="1700" dirty="0">
+                    <a:latin typeface="D2Coding" panose="020B0609020101020101" pitchFamily="49" charset="-127"/>
+                    <a:ea typeface="D2Coding" panose="020B0609020101020101" pitchFamily="49" charset="-127"/>
+                  </a:rPr>
+                  <a:t>(Non-trainable) </a:t>
+                </a:r>
+                <a:r>
+                  <a:rPr lang="ko-KR" altLang="en-US" sz="1700" dirty="0">
+                    <a:latin typeface="D2Coding" panose="020B0609020101020101" pitchFamily="49" charset="-127"/>
+                    <a:ea typeface="D2Coding" panose="020B0609020101020101" pitchFamily="49" charset="-127"/>
+                  </a:rPr>
+                  <a:t>임</a:t>
+                </a:r>
+              </a:p>
+            </p:txBody>
+          </p:sp>
+        </mc:Choice>
+        <mc:Fallback>
+          <p:sp>
+            <p:nvSpPr>
+              <p:cNvPr id="8" name="TextBox 7">
+                <a:extLst>
+                  <a:ext uri="{FF2B5EF4-FFF2-40B4-BE49-F238E27FC236}">
+                    <a16:creationId xmlns:a16="http://schemas.microsoft.com/office/drawing/2014/main" id="{596733AB-4155-C169-0035-A8BBCF0ABB05}"/>
+                  </a:ext>
+                </a:extLst>
+              </p:cNvPr>
+              <p:cNvSpPr txBox="1">
+                <a:spLocks noRot="1" noChangeAspect="1" noMove="1" noResize="1" noEditPoints="1" noAdjustHandles="1" noChangeArrowheads="1" noChangeShapeType="1" noTextEdit="1"/>
+              </p:cNvSpPr>
+              <p:nvPr/>
+            </p:nvSpPr>
+            <p:spPr>
+              <a:xfrm>
+                <a:off x="616189" y="1305493"/>
+                <a:ext cx="10952480" cy="1228670"/>
+              </a:xfrm>
+              <a:prstGeom prst="rect">
+                <a:avLst/>
+              </a:prstGeom>
+              <a:blipFill>
+                <a:blip r:embed="rId2"/>
+                <a:stretch>
+                  <a:fillRect l="-334" r="-111" b="-5446"/>
+                </a:stretch>
+              </a:blipFill>
+            </p:spPr>
+            <p:txBody>
+              <a:bodyPr/>
+              <a:lstStyle/>
+              <a:p>
+                <a:r>
+                  <a:rPr lang="ko-KR" altLang="en-US">
+                    <a:noFill/>
+                  </a:rPr>
+                  <a:t> </a:t>
+                </a:r>
+              </a:p>
+            </p:txBody>
+          </p:sp>
+        </mc:Fallback>
+      </mc:AlternateContent>
+      <p:sp>
+        <p:nvSpPr>
+          <p:cNvPr id="20" name="TextBox 19">
+            <a:extLst>
+              <a:ext uri="{FF2B5EF4-FFF2-40B4-BE49-F238E27FC236}">
+                <a16:creationId xmlns:a16="http://schemas.microsoft.com/office/drawing/2014/main" id="{D2EA454E-28E0-3B60-ADC8-85CC06DFDF49}"/>
+              </a:ext>
+            </a:extLst>
+          </p:cNvPr>
+          <p:cNvSpPr txBox="1"/>
+          <p:nvPr/>
+        </p:nvSpPr>
+        <p:spPr>
+          <a:xfrm>
+            <a:off x="720745" y="2798848"/>
+            <a:ext cx="7752695" cy="3419975"/>
+          </a:xfrm>
+          <a:prstGeom prst="rect">
+            <a:avLst/>
+          </a:prstGeom>
+          <a:solidFill>
+            <a:srgbClr val="76E3FF"/>
+          </a:solidFill>
+        </p:spPr>
+        <p:txBody>
+          <a:bodyPr wrap="square">
+            <a:spAutoFit/>
+          </a:bodyPr>
+          <a:lstStyle/>
+          <a:p>
+            <a:pPr>
+              <a:lnSpc>
+                <a:spcPct val="150000"/>
+              </a:lnSpc>
+            </a:pPr>
+            <a:r>
+              <a:rPr lang="en-US" altLang="ko-KR" sz="1600" dirty="0">
+                <a:latin typeface="D2Coding" panose="020B0609020101020101" pitchFamily="49" charset="-127"/>
+                <a:ea typeface="D2Coding" panose="020B0609020101020101" pitchFamily="49" charset="-127"/>
+              </a:rPr>
+              <a:t>model = </a:t>
+            </a:r>
+            <a:r>
+              <a:rPr lang="en-US" altLang="ko-KR" sz="1600" dirty="0" err="1">
+                <a:latin typeface="D2Coding" panose="020B0609020101020101" pitchFamily="49" charset="-127"/>
+                <a:ea typeface="D2Coding" panose="020B0609020101020101" pitchFamily="49" charset="-127"/>
+              </a:rPr>
+              <a:t>keras.models.Sequential</a:t>
+            </a:r>
+            <a:r>
+              <a:rPr lang="en-US" altLang="ko-KR" sz="1600" dirty="0">
+                <a:latin typeface="D2Coding" panose="020B0609020101020101" pitchFamily="49" charset="-127"/>
+                <a:ea typeface="D2Coding" panose="020B0609020101020101" pitchFamily="49" charset="-127"/>
+              </a:rPr>
+              <a:t>([</a:t>
+            </a:r>
+          </a:p>
+          <a:p>
+            <a:pPr>
+              <a:lnSpc>
+                <a:spcPct val="150000"/>
+              </a:lnSpc>
+            </a:pPr>
+            <a:r>
+              <a:rPr lang="en-US" altLang="ko-KR" sz="1600" dirty="0" err="1">
+                <a:latin typeface="D2Coding" panose="020B0609020101020101" pitchFamily="49" charset="-127"/>
+                <a:ea typeface="D2Coding" panose="020B0609020101020101" pitchFamily="49" charset="-127"/>
+              </a:rPr>
+              <a:t>keras.layers.Flatten</a:t>
+            </a:r>
+            <a:r>
+              <a:rPr lang="en-US" altLang="ko-KR" sz="1600" dirty="0">
+                <a:latin typeface="D2Coding" panose="020B0609020101020101" pitchFamily="49" charset="-127"/>
+                <a:ea typeface="D2Coding" panose="020B0609020101020101" pitchFamily="49" charset="-127"/>
+              </a:rPr>
+              <a:t>(</a:t>
+            </a:r>
+            <a:r>
+              <a:rPr lang="en-US" altLang="ko-KR" sz="1600" dirty="0" err="1">
+                <a:latin typeface="D2Coding" panose="020B0609020101020101" pitchFamily="49" charset="-127"/>
+                <a:ea typeface="D2Coding" panose="020B0609020101020101" pitchFamily="49" charset="-127"/>
+              </a:rPr>
+              <a:t>input_shape</a:t>
+            </a:r>
+            <a:r>
+              <a:rPr lang="en-US" altLang="ko-KR" sz="1600" dirty="0">
+                <a:latin typeface="D2Coding" panose="020B0609020101020101" pitchFamily="49" charset="-127"/>
+                <a:ea typeface="D2Coding" panose="020B0609020101020101" pitchFamily="49" charset="-127"/>
+              </a:rPr>
+              <a:t>=[28, 28]),</a:t>
+            </a:r>
+          </a:p>
+          <a:p>
+            <a:pPr>
+              <a:lnSpc>
+                <a:spcPct val="150000"/>
+              </a:lnSpc>
+            </a:pPr>
+            <a:r>
+              <a:rPr lang="en-US" altLang="ko-KR" sz="1600" dirty="0" err="1">
+                <a:latin typeface="D2Coding" panose="020B0609020101020101" pitchFamily="49" charset="-127"/>
+                <a:ea typeface="D2Coding" panose="020B0609020101020101" pitchFamily="49" charset="-127"/>
+              </a:rPr>
+              <a:t>keras.layers.BatchNormalization</a:t>
+            </a:r>
+            <a:r>
+              <a:rPr lang="en-US" altLang="ko-KR" sz="1600" dirty="0">
+                <a:latin typeface="D2Coding" panose="020B0609020101020101" pitchFamily="49" charset="-127"/>
+                <a:ea typeface="D2Coding" panose="020B0609020101020101" pitchFamily="49" charset="-127"/>
+              </a:rPr>
+              <a:t>(),</a:t>
+            </a:r>
+          </a:p>
+          <a:p>
+            <a:pPr>
+              <a:lnSpc>
+                <a:spcPct val="150000"/>
+              </a:lnSpc>
+            </a:pPr>
+            <a:r>
+              <a:rPr lang="en-US" altLang="ko-KR" sz="1600" dirty="0" err="1">
+                <a:latin typeface="D2Coding" panose="020B0609020101020101" pitchFamily="49" charset="-127"/>
+                <a:ea typeface="D2Coding" panose="020B0609020101020101" pitchFamily="49" charset="-127"/>
+              </a:rPr>
+              <a:t>keras.layers.Dense</a:t>
+            </a:r>
+            <a:r>
+              <a:rPr lang="en-US" altLang="ko-KR" sz="1600" dirty="0">
+                <a:latin typeface="D2Coding" panose="020B0609020101020101" pitchFamily="49" charset="-127"/>
+                <a:ea typeface="D2Coding" panose="020B0609020101020101" pitchFamily="49" charset="-127"/>
+              </a:rPr>
+              <a:t>(300, activation="</a:t>
+            </a:r>
+            <a:r>
+              <a:rPr lang="en-US" altLang="ko-KR" sz="1600" dirty="0" err="1">
+                <a:latin typeface="D2Coding" panose="020B0609020101020101" pitchFamily="49" charset="-127"/>
+                <a:ea typeface="D2Coding" panose="020B0609020101020101" pitchFamily="49" charset="-127"/>
+              </a:rPr>
+              <a:t>elu</a:t>
+            </a:r>
+            <a:r>
+              <a:rPr lang="en-US" altLang="ko-KR" sz="1600" dirty="0">
+                <a:latin typeface="D2Coding" panose="020B0609020101020101" pitchFamily="49" charset="-127"/>
+                <a:ea typeface="D2Coding" panose="020B0609020101020101" pitchFamily="49" charset="-127"/>
+              </a:rPr>
+              <a:t>", </a:t>
+            </a:r>
+            <a:r>
+              <a:rPr lang="en-US" altLang="ko-KR" sz="1600" dirty="0" err="1">
+                <a:latin typeface="D2Coding" panose="020B0609020101020101" pitchFamily="49" charset="-127"/>
+                <a:ea typeface="D2Coding" panose="020B0609020101020101" pitchFamily="49" charset="-127"/>
+              </a:rPr>
+              <a:t>kernel_initializer</a:t>
+            </a:r>
+            <a:r>
+              <a:rPr lang="en-US" altLang="ko-KR" sz="1600" dirty="0">
+                <a:latin typeface="D2Coding" panose="020B0609020101020101" pitchFamily="49" charset="-127"/>
+                <a:ea typeface="D2Coding" panose="020B0609020101020101" pitchFamily="49" charset="-127"/>
+              </a:rPr>
+              <a:t>="</a:t>
+            </a:r>
+            <a:r>
+              <a:rPr lang="en-US" altLang="ko-KR" sz="1600" dirty="0" err="1">
+                <a:latin typeface="D2Coding" panose="020B0609020101020101" pitchFamily="49" charset="-127"/>
+                <a:ea typeface="D2Coding" panose="020B0609020101020101" pitchFamily="49" charset="-127"/>
+              </a:rPr>
+              <a:t>he_normal</a:t>
+            </a:r>
+            <a:r>
+              <a:rPr lang="en-US" altLang="ko-KR" sz="1600" dirty="0">
+                <a:latin typeface="D2Coding" panose="020B0609020101020101" pitchFamily="49" charset="-127"/>
+                <a:ea typeface="D2Coding" panose="020B0609020101020101" pitchFamily="49" charset="-127"/>
+              </a:rPr>
+              <a:t>"), </a:t>
+            </a:r>
+            <a:r>
+              <a:rPr lang="en-US" altLang="ko-KR" sz="1600" dirty="0" err="1">
+                <a:latin typeface="D2Coding" panose="020B0609020101020101" pitchFamily="49" charset="-127"/>
+                <a:ea typeface="D2Coding" panose="020B0609020101020101" pitchFamily="49" charset="-127"/>
+              </a:rPr>
+              <a:t>keras.layers.BatchNormalization</a:t>
+            </a:r>
+            <a:r>
+              <a:rPr lang="en-US" altLang="ko-KR" sz="1600" dirty="0">
+                <a:latin typeface="D2Coding" panose="020B0609020101020101" pitchFamily="49" charset="-127"/>
+                <a:ea typeface="D2Coding" panose="020B0609020101020101" pitchFamily="49" charset="-127"/>
+              </a:rPr>
+              <a:t>(),</a:t>
+            </a:r>
+          </a:p>
+          <a:p>
+            <a:pPr>
+              <a:lnSpc>
+                <a:spcPct val="150000"/>
+              </a:lnSpc>
+            </a:pPr>
+            <a:r>
+              <a:rPr lang="en-US" altLang="ko-KR" sz="1600" dirty="0" err="1">
+                <a:latin typeface="D2Coding" panose="020B0609020101020101" pitchFamily="49" charset="-127"/>
+                <a:ea typeface="D2Coding" panose="020B0609020101020101" pitchFamily="49" charset="-127"/>
+              </a:rPr>
+              <a:t>keras.layers.Dense</a:t>
+            </a:r>
+            <a:r>
+              <a:rPr lang="en-US" altLang="ko-KR" sz="1600" dirty="0">
+                <a:latin typeface="D2Coding" panose="020B0609020101020101" pitchFamily="49" charset="-127"/>
+                <a:ea typeface="D2Coding" panose="020B0609020101020101" pitchFamily="49" charset="-127"/>
+              </a:rPr>
+              <a:t>(100, activation="</a:t>
+            </a:r>
+            <a:r>
+              <a:rPr lang="en-US" altLang="ko-KR" sz="1600" dirty="0" err="1">
+                <a:latin typeface="D2Coding" panose="020B0609020101020101" pitchFamily="49" charset="-127"/>
+                <a:ea typeface="D2Coding" panose="020B0609020101020101" pitchFamily="49" charset="-127"/>
+              </a:rPr>
+              <a:t>elu</a:t>
+            </a:r>
+            <a:r>
+              <a:rPr lang="en-US" altLang="ko-KR" sz="1600" dirty="0">
+                <a:latin typeface="D2Coding" panose="020B0609020101020101" pitchFamily="49" charset="-127"/>
+                <a:ea typeface="D2Coding" panose="020B0609020101020101" pitchFamily="49" charset="-127"/>
+              </a:rPr>
+              <a:t>", </a:t>
+            </a:r>
+            <a:r>
+              <a:rPr lang="en-US" altLang="ko-KR" sz="1600" dirty="0" err="1">
+                <a:latin typeface="D2Coding" panose="020B0609020101020101" pitchFamily="49" charset="-127"/>
+                <a:ea typeface="D2Coding" panose="020B0609020101020101" pitchFamily="49" charset="-127"/>
+              </a:rPr>
+              <a:t>kernel_initializer</a:t>
+            </a:r>
+            <a:r>
+              <a:rPr lang="en-US" altLang="ko-KR" sz="1600" dirty="0">
+                <a:latin typeface="D2Coding" panose="020B0609020101020101" pitchFamily="49" charset="-127"/>
+                <a:ea typeface="D2Coding" panose="020B0609020101020101" pitchFamily="49" charset="-127"/>
+              </a:rPr>
+              <a:t>="</a:t>
+            </a:r>
+            <a:r>
+              <a:rPr lang="en-US" altLang="ko-KR" sz="1600" dirty="0" err="1">
+                <a:latin typeface="D2Coding" panose="020B0609020101020101" pitchFamily="49" charset="-127"/>
+                <a:ea typeface="D2Coding" panose="020B0609020101020101" pitchFamily="49" charset="-127"/>
+              </a:rPr>
+              <a:t>he_normal</a:t>
+            </a:r>
+            <a:r>
+              <a:rPr lang="en-US" altLang="ko-KR" sz="1600" dirty="0">
+                <a:latin typeface="D2Coding" panose="020B0609020101020101" pitchFamily="49" charset="-127"/>
+                <a:ea typeface="D2Coding" panose="020B0609020101020101" pitchFamily="49" charset="-127"/>
+              </a:rPr>
+              <a:t>"), </a:t>
+            </a:r>
+            <a:r>
+              <a:rPr lang="en-US" altLang="ko-KR" sz="1600" dirty="0" err="1">
+                <a:latin typeface="D2Coding" panose="020B0609020101020101" pitchFamily="49" charset="-127"/>
+                <a:ea typeface="D2Coding" panose="020B0609020101020101" pitchFamily="49" charset="-127"/>
+              </a:rPr>
+              <a:t>keras.layers.BatchNormalization</a:t>
+            </a:r>
+            <a:r>
+              <a:rPr lang="en-US" altLang="ko-KR" sz="1600" dirty="0">
+                <a:latin typeface="D2Coding" panose="020B0609020101020101" pitchFamily="49" charset="-127"/>
+                <a:ea typeface="D2Coding" panose="020B0609020101020101" pitchFamily="49" charset="-127"/>
+              </a:rPr>
+              <a:t>(),</a:t>
+            </a:r>
+          </a:p>
+          <a:p>
+            <a:pPr>
+              <a:lnSpc>
+                <a:spcPct val="150000"/>
+              </a:lnSpc>
+            </a:pPr>
+            <a:r>
+              <a:rPr lang="en-US" altLang="ko-KR" sz="1600" dirty="0" err="1">
+                <a:latin typeface="D2Coding" panose="020B0609020101020101" pitchFamily="49" charset="-127"/>
+                <a:ea typeface="D2Coding" panose="020B0609020101020101" pitchFamily="49" charset="-127"/>
+              </a:rPr>
+              <a:t>keras.layers.Dense</a:t>
+            </a:r>
+            <a:r>
+              <a:rPr lang="en-US" altLang="ko-KR" sz="1600" dirty="0">
+                <a:latin typeface="D2Coding" panose="020B0609020101020101" pitchFamily="49" charset="-127"/>
+                <a:ea typeface="D2Coding" panose="020B0609020101020101" pitchFamily="49" charset="-127"/>
+              </a:rPr>
+              <a:t>(10, activation="</a:t>
+            </a:r>
+            <a:r>
+              <a:rPr lang="en-US" altLang="ko-KR" sz="1600" dirty="0" err="1">
+                <a:latin typeface="D2Coding" panose="020B0609020101020101" pitchFamily="49" charset="-127"/>
+                <a:ea typeface="D2Coding" panose="020B0609020101020101" pitchFamily="49" charset="-127"/>
+              </a:rPr>
+              <a:t>softmax</a:t>
+            </a:r>
+            <a:r>
+              <a:rPr lang="en-US" altLang="ko-KR" sz="1600" dirty="0">
+                <a:latin typeface="D2Coding" panose="020B0609020101020101" pitchFamily="49" charset="-127"/>
+                <a:ea typeface="D2Coding" panose="020B0609020101020101" pitchFamily="49" charset="-127"/>
+              </a:rPr>
+              <a:t>") </a:t>
+            </a:r>
+          </a:p>
+          <a:p>
+            <a:pPr>
+              <a:lnSpc>
+                <a:spcPct val="150000"/>
+              </a:lnSpc>
+            </a:pPr>
+            <a:r>
+              <a:rPr lang="en-US" altLang="ko-KR" sz="1600" dirty="0">
+                <a:latin typeface="D2Coding" panose="020B0609020101020101" pitchFamily="49" charset="-127"/>
+                <a:ea typeface="D2Coding" panose="020B0609020101020101" pitchFamily="49" charset="-127"/>
+              </a:rPr>
+              <a:t>]) </a:t>
+            </a:r>
+            <a:endParaRPr lang="ko-KR" altLang="en-US" sz="1600" dirty="0">
+              <a:latin typeface="D2Coding" panose="020B0609020101020101" pitchFamily="49" charset="-127"/>
+              <a:ea typeface="D2Coding" panose="020B0609020101020101" pitchFamily="49" charset="-127"/>
+            </a:endParaRPr>
+          </a:p>
+        </p:txBody>
+      </p:sp>
+      <p:sp>
+        <p:nvSpPr>
+          <p:cNvPr id="9" name="AutoShape 3" descr="The impact of using the gradient clipping technique in the training stage.">
+            <a:extLst>
+              <a:ext uri="{FF2B5EF4-FFF2-40B4-BE49-F238E27FC236}">
+                <a16:creationId xmlns:a16="http://schemas.microsoft.com/office/drawing/2014/main" id="{1CD6C59C-6278-5A49-41A2-772345BA8ACE}"/>
+              </a:ext>
+            </a:extLst>
+          </p:cNvPr>
+          <p:cNvSpPr>
+            <a:spLocks noChangeAspect="1" noChangeArrowheads="1"/>
+          </p:cNvSpPr>
+          <p:nvPr/>
+        </p:nvSpPr>
+        <p:spPr bwMode="auto">
+          <a:xfrm>
+            <a:off x="5943600" y="3276600"/>
+            <a:ext cx="304800" cy="304800"/>
+          </a:xfrm>
+          <a:prstGeom prst="rect">
+            <a:avLst/>
+          </a:prstGeom>
+          <a:noFill/>
+          <a:extLst>
+            <a:ext uri="{909E8E84-426E-40DD-AFC4-6F175D3DCCD1}">
+              <a14:hiddenFill xmlns:a14="http://schemas.microsoft.com/office/drawing/2010/main">
+                <a:solidFill>
+                  <a:srgbClr val="FFFFFF"/>
+                </a:solidFill>
+              </a14:hiddenFill>
+            </a:ext>
+          </a:extLst>
+        </p:spPr>
+        <p:txBody>
+          <a:bodyPr vert="horz" wrap="square" lIns="91440" tIns="45720" rIns="91440" bIns="45720" numCol="1" anchor="t" anchorCtr="0" compatLnSpc="1">
+            <a:prstTxWarp prst="textNoShape">
+              <a:avLst/>
+            </a:prstTxWarp>
+          </a:bodyPr>
+          <a:lstStyle/>
+          <a:p>
+            <a:endParaRPr lang="ko-KR" altLang="en-US"/>
+          </a:p>
+        </p:txBody>
+      </p:sp>
+    </p:spTree>
+    <p:extLst>
+      <p:ext uri="{BB962C8B-B14F-4D97-AF65-F5344CB8AC3E}">
+        <p14:creationId xmlns:p14="http://schemas.microsoft.com/office/powerpoint/2010/main" val="1960021121"/>
+      </p:ext>
+    </p:extLst>
+  </p:cSld>
+  <p:clrMapOvr>
+    <a:masterClrMapping/>
+  </p:clrMapOvr>
+</p:sld>
+</file>
+
+<file path=ppt/slides/slide7.xml><?xml version="1.0" encoding="utf-8"?>
+<p:sld xmlns:a="http://schemas.openxmlformats.org/drawingml/2006/main" xmlns:r="http://schemas.openxmlformats.org/officeDocument/2006/relationships" xmlns:p="http://schemas.openxmlformats.org/presentationml/2006/main">
+  <p:cSld>
+    <p:spTree>
+      <p:nvGrpSpPr>
+        <p:cNvPr id="1" name="">
+          <a:extLst>
+            <a:ext uri="{FF2B5EF4-FFF2-40B4-BE49-F238E27FC236}">
+              <a16:creationId xmlns:a16="http://schemas.microsoft.com/office/drawing/2014/main" id="{1328B6F7-5F70-1358-82F3-E75B4861038B}"/>
+            </a:ext>
+          </a:extLst>
+        </p:cNvPr>
+        <p:cNvGrpSpPr/>
+        <p:nvPr/>
+      </p:nvGrpSpPr>
+      <p:grpSpPr>
+        <a:xfrm>
+          <a:off x="0" y="0"/>
+          <a:ext cx="0" cy="0"/>
+          <a:chOff x="0" y="0"/>
+          <a:chExt cx="0" cy="0"/>
+        </a:xfrm>
+      </p:grpSpPr>
+      <p:sp>
+        <p:nvSpPr>
+          <p:cNvPr id="4" name="슬라이드 번호 개체 틀 3">
+            <a:extLst>
+              <a:ext uri="{FF2B5EF4-FFF2-40B4-BE49-F238E27FC236}">
+                <a16:creationId xmlns:a16="http://schemas.microsoft.com/office/drawing/2014/main" id="{23B84444-B7E6-9F6A-3923-CEDB4AB30592}"/>
+              </a:ext>
+            </a:extLst>
+          </p:cNvPr>
+          <p:cNvSpPr>
+            <a:spLocks noGrp="1"/>
+          </p:cNvSpPr>
+          <p:nvPr>
+            <p:ph type="sldNum" sz="quarter" idx="12"/>
+          </p:nvPr>
+        </p:nvSpPr>
+        <p:spPr>
+          <a:xfrm>
+            <a:off x="10514011" y="6036261"/>
+            <a:ext cx="753545" cy="365125"/>
+          </a:xfrm>
+        </p:spPr>
+        <p:txBody>
+          <a:bodyPr/>
+          <a:lstStyle/>
+          <a:p>
+            <a:fld id="{D57F1E4F-1CFF-5643-939E-217C01CDF565}" type="slidenum">
+              <a:rPr lang="en-US" smtClean="0"/>
+              <a:pPr/>
+              <a:t>7</a:t>
+            </a:fld>
+            <a:endParaRPr lang="en-US" dirty="0"/>
+          </a:p>
+        </p:txBody>
+      </p:sp>
+      <p:sp>
+        <p:nvSpPr>
+          <p:cNvPr id="3" name="제목 1">
+            <a:extLst>
+              <a:ext uri="{FF2B5EF4-FFF2-40B4-BE49-F238E27FC236}">
+                <a16:creationId xmlns:a16="http://schemas.microsoft.com/office/drawing/2014/main" id="{BEFE3250-F48A-9BC6-0AF2-4DF860FD998D}"/>
+              </a:ext>
+            </a:extLst>
+          </p:cNvPr>
+          <p:cNvSpPr txBox="1">
+            <a:spLocks/>
+          </p:cNvSpPr>
+          <p:nvPr/>
+        </p:nvSpPr>
+        <p:spPr>
+          <a:xfrm>
+            <a:off x="475645" y="481983"/>
+            <a:ext cx="10353762" cy="766439"/>
+          </a:xfrm>
+          <a:prstGeom prst="rect">
+            <a:avLst/>
+          </a:prstGeom>
+        </p:spPr>
+        <p:txBody>
+          <a:bodyPr vert="horz" lIns="91440" tIns="45720" rIns="91440" bIns="45720" rtlCol="0" anchor="ctr">
+            <a:normAutofit/>
+          </a:bodyPr>
+          <a:lstStyle>
+            <a:lvl1pPr algn="ctr" defTabSz="914400" rtl="0" eaLnBrk="1" latinLnBrk="1" hangingPunct="1">
+              <a:lnSpc>
+                <a:spcPct val="90000"/>
+              </a:lnSpc>
+              <a:spcBef>
+                <a:spcPct val="0"/>
+              </a:spcBef>
+              <a:buNone/>
+              <a:defRPr sz="3200" kern="1200" cap="all" baseline="0">
+                <a:solidFill>
+                  <a:schemeClr val="tx1"/>
+                </a:solidFill>
+                <a:effectLst/>
+                <a:latin typeface="Batang" panose="02030600000101010101" pitchFamily="18" charset="-127"/>
+                <a:ea typeface="Batang" panose="02030600000101010101" pitchFamily="18" charset="-127"/>
+                <a:cs typeface="+mj-cs"/>
+              </a:defRPr>
+            </a:lvl1pPr>
+          </a:lstStyle>
+          <a:p>
+            <a:pPr algn="l">
+              <a:lnSpc>
+                <a:spcPct val="150000"/>
+              </a:lnSpc>
+            </a:pPr>
+            <a:r>
+              <a:rPr lang="en-US" altLang="ko-KR" sz="2800" b="1" cap="none" dirty="0">
+                <a:latin typeface="D2Coding" panose="020B0609020101020101" pitchFamily="49" charset="-127"/>
+                <a:ea typeface="D2Coding" panose="020B0609020101020101" pitchFamily="49" charset="-127"/>
+              </a:rPr>
+              <a:t>Gradient Clipping</a:t>
+            </a:r>
+          </a:p>
+        </p:txBody>
+      </p:sp>
+      <p:sp>
+        <p:nvSpPr>
+          <p:cNvPr id="8" name="TextBox 7">
+            <a:extLst>
+              <a:ext uri="{FF2B5EF4-FFF2-40B4-BE49-F238E27FC236}">
+                <a16:creationId xmlns:a16="http://schemas.microsoft.com/office/drawing/2014/main" id="{43A8771F-BDED-BDB5-880C-EAAFE2FF3565}"/>
+              </a:ext>
+            </a:extLst>
+          </p:cNvPr>
+          <p:cNvSpPr txBox="1"/>
+          <p:nvPr/>
+        </p:nvSpPr>
+        <p:spPr>
+          <a:xfrm>
+            <a:off x="616189" y="1305493"/>
+            <a:ext cx="11210052" cy="837024"/>
+          </a:xfrm>
+          <a:prstGeom prst="rect">
+            <a:avLst/>
+          </a:prstGeom>
+          <a:noFill/>
+        </p:spPr>
+        <p:txBody>
+          <a:bodyPr wrap="square" rtlCol="0">
+            <a:spAutoFit/>
+          </a:bodyPr>
+          <a:lstStyle/>
+          <a:p>
+            <a:pPr>
+              <a:lnSpc>
+                <a:spcPct val="150000"/>
+              </a:lnSpc>
+            </a:pPr>
+            <a:r>
+              <a:rPr lang="ko-KR" altLang="en-US" sz="1700" dirty="0">
+                <a:latin typeface="D2Coding" panose="020B0609020101020101" pitchFamily="49" charset="-127"/>
+                <a:ea typeface="D2Coding" panose="020B0609020101020101" pitchFamily="49" charset="-127"/>
+              </a:rPr>
+              <a:t>경사폭발</a:t>
+            </a:r>
+            <a:r>
+              <a:rPr lang="en-US" altLang="ko-KR" sz="1700" dirty="0">
+                <a:latin typeface="D2Coding" panose="020B0609020101020101" pitchFamily="49" charset="-127"/>
+                <a:ea typeface="D2Coding" panose="020B0609020101020101" pitchFamily="49" charset="-127"/>
+              </a:rPr>
+              <a:t>(exploding gradients)</a:t>
+            </a:r>
+            <a:r>
+              <a:rPr lang="ko-KR" altLang="en-US" sz="1700" dirty="0">
+                <a:latin typeface="D2Coding" panose="020B0609020101020101" pitchFamily="49" charset="-127"/>
+                <a:ea typeface="D2Coding" panose="020B0609020101020101" pitchFamily="49" charset="-127"/>
+              </a:rPr>
+              <a:t>문제를 완화하기 위해 </a:t>
+            </a:r>
+            <a:r>
+              <a:rPr lang="ko-KR" altLang="en-US" sz="1700" dirty="0" err="1">
+                <a:latin typeface="D2Coding" panose="020B0609020101020101" pitchFamily="49" charset="-127"/>
+                <a:ea typeface="D2Coding" panose="020B0609020101020101" pitchFamily="49" charset="-127"/>
+              </a:rPr>
+              <a:t>역전파</a:t>
+            </a:r>
+            <a:r>
+              <a:rPr lang="en-US" altLang="ko-KR" sz="1700" dirty="0">
+                <a:latin typeface="D2Coding" panose="020B0609020101020101" pitchFamily="49" charset="-127"/>
+                <a:ea typeface="D2Coding" panose="020B0609020101020101" pitchFamily="49" charset="-127"/>
+              </a:rPr>
+              <a:t>(backpropagation)</a:t>
+            </a:r>
+            <a:r>
+              <a:rPr lang="ko-KR" altLang="en-US" sz="1700" dirty="0">
+                <a:latin typeface="D2Coding" panose="020B0609020101020101" pitchFamily="49" charset="-127"/>
+                <a:ea typeface="D2Coding" panose="020B0609020101020101" pitchFamily="49" charset="-127"/>
+              </a:rPr>
+              <a:t>과정에서 경사도</a:t>
+            </a:r>
+            <a:r>
+              <a:rPr lang="en-US" altLang="ko-KR" sz="1700" dirty="0">
+                <a:latin typeface="D2Coding" panose="020B0609020101020101" pitchFamily="49" charset="-127"/>
+                <a:ea typeface="D2Coding" panose="020B0609020101020101" pitchFamily="49" charset="-127"/>
+              </a:rPr>
+              <a:t>(gradients)</a:t>
+            </a:r>
+            <a:r>
+              <a:rPr lang="ko-KR" altLang="en-US" sz="1700" dirty="0">
+                <a:latin typeface="D2Coding" panose="020B0609020101020101" pitchFamily="49" charset="-127"/>
+                <a:ea typeface="D2Coding" panose="020B0609020101020101" pitchFamily="49" charset="-127"/>
+              </a:rPr>
+              <a:t>가 일정 </a:t>
+            </a:r>
+            <a:r>
+              <a:rPr lang="ko-KR" altLang="en-US" sz="1700" dirty="0" err="1">
+                <a:latin typeface="D2Coding" panose="020B0609020101020101" pitchFamily="49" charset="-127"/>
+                <a:ea typeface="D2Coding" panose="020B0609020101020101" pitchFamily="49" charset="-127"/>
+              </a:rPr>
+              <a:t>임계값</a:t>
+            </a:r>
+            <a:r>
+              <a:rPr lang="en-US" altLang="ko-KR" sz="1700" dirty="0">
+                <a:latin typeface="D2Coding" panose="020B0609020101020101" pitchFamily="49" charset="-127"/>
+                <a:ea typeface="D2Coding" panose="020B0609020101020101" pitchFamily="49" charset="-127"/>
+              </a:rPr>
+              <a:t>(threshold)</a:t>
+            </a:r>
+            <a:r>
+              <a:rPr lang="ko-KR" altLang="en-US" sz="1700" dirty="0">
+                <a:latin typeface="D2Coding" panose="020B0609020101020101" pitchFamily="49" charset="-127"/>
+                <a:ea typeface="D2Coding" panose="020B0609020101020101" pitchFamily="49" charset="-127"/>
+              </a:rPr>
+              <a:t>을 절대 넘지 않도록 잘라내는</a:t>
+            </a:r>
+            <a:r>
+              <a:rPr lang="en-US" altLang="ko-KR" sz="1700" dirty="0">
+                <a:latin typeface="D2Coding" panose="020B0609020101020101" pitchFamily="49" charset="-127"/>
+                <a:ea typeface="D2Coding" panose="020B0609020101020101" pitchFamily="49" charset="-127"/>
+              </a:rPr>
+              <a:t>(clip) </a:t>
+            </a:r>
+            <a:r>
+              <a:rPr lang="ko-KR" altLang="en-US" sz="1700" dirty="0">
+                <a:latin typeface="D2Coding" panose="020B0609020101020101" pitchFamily="49" charset="-127"/>
+                <a:ea typeface="D2Coding" panose="020B0609020101020101" pitchFamily="49" charset="-127"/>
+              </a:rPr>
+              <a:t>것</a:t>
+            </a:r>
+          </a:p>
+        </p:txBody>
+      </p:sp>
+      <p:sp>
+        <p:nvSpPr>
+          <p:cNvPr id="9" name="AutoShape 3" descr="The impact of using the gradient clipping technique in the training stage.">
+            <a:extLst>
+              <a:ext uri="{FF2B5EF4-FFF2-40B4-BE49-F238E27FC236}">
+                <a16:creationId xmlns:a16="http://schemas.microsoft.com/office/drawing/2014/main" id="{FBB30304-5214-AC9E-34CC-A440FB6B3970}"/>
+              </a:ext>
+            </a:extLst>
+          </p:cNvPr>
+          <p:cNvSpPr>
+            <a:spLocks noChangeAspect="1" noChangeArrowheads="1"/>
+          </p:cNvSpPr>
+          <p:nvPr/>
+        </p:nvSpPr>
+        <p:spPr bwMode="auto">
+          <a:xfrm>
+            <a:off x="5943600" y="3276600"/>
+            <a:ext cx="304800" cy="304800"/>
+          </a:xfrm>
+          <a:prstGeom prst="rect">
+            <a:avLst/>
+          </a:prstGeom>
+          <a:noFill/>
+          <a:extLst>
+            <a:ext uri="{909E8E84-426E-40DD-AFC4-6F175D3DCCD1}">
+              <a14:hiddenFill xmlns:a14="http://schemas.microsoft.com/office/drawing/2010/main">
+                <a:solidFill>
+                  <a:srgbClr val="FFFFFF"/>
+                </a:solidFill>
+              </a14:hiddenFill>
+            </a:ext>
+          </a:extLst>
+        </p:spPr>
+        <p:txBody>
+          <a:bodyPr vert="horz" wrap="square" lIns="91440" tIns="45720" rIns="91440" bIns="45720" numCol="1" anchor="t" anchorCtr="0" compatLnSpc="1">
+            <a:prstTxWarp prst="textNoShape">
+              <a:avLst/>
+            </a:prstTxWarp>
+          </a:bodyPr>
+          <a:lstStyle/>
+          <a:p>
+            <a:endParaRPr lang="ko-KR" altLang="en-US"/>
+          </a:p>
+        </p:txBody>
+      </p:sp>
+      <p:pic>
+        <p:nvPicPr>
+          <p:cNvPr id="5" name="그림 4">
+            <a:extLst>
+              <a:ext uri="{FF2B5EF4-FFF2-40B4-BE49-F238E27FC236}">
+                <a16:creationId xmlns:a16="http://schemas.microsoft.com/office/drawing/2014/main" id="{E245D965-FE57-205F-A390-78068B1B46C4}"/>
+              </a:ext>
+            </a:extLst>
+          </p:cNvPr>
+          <p:cNvPicPr>
+            <a:picLocks noChangeAspect="1"/>
+          </p:cNvPicPr>
+          <p:nvPr/>
+        </p:nvPicPr>
+        <p:blipFill>
+          <a:blip r:embed="rId2">
+            <a:duotone>
+              <a:prstClr val="black"/>
+              <a:schemeClr val="accent6">
+                <a:tint val="45000"/>
+                <a:satMod val="400000"/>
+              </a:schemeClr>
+            </a:duotone>
+          </a:blip>
+          <a:stretch>
+            <a:fillRect/>
+          </a:stretch>
+        </p:blipFill>
+        <p:spPr>
+          <a:xfrm>
+            <a:off x="1910782" y="3276600"/>
+            <a:ext cx="7483488" cy="2095682"/>
+          </a:xfrm>
+          <a:prstGeom prst="rect">
+            <a:avLst/>
+          </a:prstGeom>
+        </p:spPr>
+      </p:pic>
+    </p:spTree>
+    <p:extLst>
+      <p:ext uri="{BB962C8B-B14F-4D97-AF65-F5344CB8AC3E}">
+        <p14:creationId xmlns:p14="http://schemas.microsoft.com/office/powerpoint/2010/main" val="2953058558"/>
+      </p:ext>
+    </p:extLst>
+  </p:cSld>
+  <p:clrMapOvr>
+    <a:masterClrMapping/>
+  </p:clrMapOvr>
+</p:sld>
+</file>
+
+<file path=ppt/slides/slide8.xml><?xml version="1.0" encoding="utf-8"?>
+<p:sld xmlns:a="http://schemas.openxmlformats.org/drawingml/2006/main" xmlns:r="http://schemas.openxmlformats.org/officeDocument/2006/relationships" xmlns:p="http://schemas.openxmlformats.org/presentationml/2006/main">
+  <p:cSld>
+    <p:spTree>
+      <p:nvGrpSpPr>
+        <p:cNvPr id="1" name="">
+          <a:extLst>
+            <a:ext uri="{FF2B5EF4-FFF2-40B4-BE49-F238E27FC236}">
+              <a16:creationId xmlns:a16="http://schemas.microsoft.com/office/drawing/2014/main" id="{36A64F72-0D22-F30C-5D2C-F4FC49274F58}"/>
+            </a:ext>
+          </a:extLst>
+        </p:cNvPr>
+        <p:cNvGrpSpPr/>
+        <p:nvPr/>
+      </p:nvGrpSpPr>
+      <p:grpSpPr>
+        <a:xfrm>
+          <a:off x="0" y="0"/>
+          <a:ext cx="0" cy="0"/>
+          <a:chOff x="0" y="0"/>
+          <a:chExt cx="0" cy="0"/>
+        </a:xfrm>
+      </p:grpSpPr>
+      <p:sp>
+        <p:nvSpPr>
+          <p:cNvPr id="4" name="슬라이드 번호 개체 틀 3">
+            <a:extLst>
+              <a:ext uri="{FF2B5EF4-FFF2-40B4-BE49-F238E27FC236}">
+                <a16:creationId xmlns:a16="http://schemas.microsoft.com/office/drawing/2014/main" id="{CAB619E2-3E93-B6C2-B82F-210F5928870B}"/>
+              </a:ext>
+            </a:extLst>
+          </p:cNvPr>
+          <p:cNvSpPr>
+            <a:spLocks noGrp="1"/>
+          </p:cNvSpPr>
+          <p:nvPr>
+            <p:ph type="sldNum" sz="quarter" idx="12"/>
+          </p:nvPr>
+        </p:nvSpPr>
+        <p:spPr>
+          <a:xfrm>
+            <a:off x="10514011" y="6036261"/>
+            <a:ext cx="753545" cy="365125"/>
+          </a:xfrm>
+        </p:spPr>
+        <p:txBody>
+          <a:bodyPr/>
+          <a:lstStyle/>
+          <a:p>
+            <a:fld id="{D57F1E4F-1CFF-5643-939E-217C01CDF565}" type="slidenum">
+              <a:rPr lang="en-US" smtClean="0"/>
+              <a:pPr/>
+              <a:t>8</a:t>
+            </a:fld>
+            <a:endParaRPr lang="en-US" dirty="0"/>
+          </a:p>
+        </p:txBody>
+      </p:sp>
+      <p:sp>
+        <p:nvSpPr>
+          <p:cNvPr id="3" name="제목 1">
+            <a:extLst>
+              <a:ext uri="{FF2B5EF4-FFF2-40B4-BE49-F238E27FC236}">
+                <a16:creationId xmlns:a16="http://schemas.microsoft.com/office/drawing/2014/main" id="{9700ABFF-DE7D-C229-9373-CA3C3DB34A5E}"/>
+              </a:ext>
+            </a:extLst>
+          </p:cNvPr>
+          <p:cNvSpPr txBox="1">
+            <a:spLocks/>
+          </p:cNvSpPr>
+          <p:nvPr/>
+        </p:nvSpPr>
+        <p:spPr>
+          <a:xfrm>
+            <a:off x="475645" y="481983"/>
+            <a:ext cx="10353762" cy="766439"/>
+          </a:xfrm>
+          <a:prstGeom prst="rect">
+            <a:avLst/>
+          </a:prstGeom>
+        </p:spPr>
+        <p:txBody>
+          <a:bodyPr vert="horz" lIns="91440" tIns="45720" rIns="91440" bIns="45720" rtlCol="0" anchor="ctr">
+            <a:normAutofit/>
+          </a:bodyPr>
+          <a:lstStyle>
+            <a:lvl1pPr algn="ctr" defTabSz="914400" rtl="0" eaLnBrk="1" latinLnBrk="1" hangingPunct="1">
+              <a:lnSpc>
+                <a:spcPct val="90000"/>
+              </a:lnSpc>
+              <a:spcBef>
+                <a:spcPct val="0"/>
+              </a:spcBef>
+              <a:buNone/>
+              <a:defRPr sz="3200" kern="1200" cap="all" baseline="0">
+                <a:solidFill>
+                  <a:schemeClr val="tx1"/>
+                </a:solidFill>
+                <a:effectLst/>
+                <a:latin typeface="Batang" panose="02030600000101010101" pitchFamily="18" charset="-127"/>
+                <a:ea typeface="Batang" panose="02030600000101010101" pitchFamily="18" charset="-127"/>
+                <a:cs typeface="+mj-cs"/>
+              </a:defRPr>
+            </a:lvl1pPr>
+          </a:lstStyle>
+          <a:p>
+            <a:pPr algn="l">
+              <a:lnSpc>
+                <a:spcPct val="150000"/>
+              </a:lnSpc>
+            </a:pPr>
+            <a:r>
+              <a:rPr lang="en-US" altLang="ko-KR" sz="2800" b="1" cap="none" dirty="0">
+                <a:latin typeface="D2Coding" panose="020B0609020101020101" pitchFamily="49" charset="-127"/>
+                <a:ea typeface="D2Coding" panose="020B0609020101020101" pitchFamily="49" charset="-127"/>
+              </a:rPr>
+              <a:t>Reusing Pretrained Layers(Transfer Learning) </a:t>
+            </a:r>
+          </a:p>
+        </p:txBody>
+      </p:sp>
+      <p:sp>
+        <p:nvSpPr>
+          <p:cNvPr id="8" name="TextBox 7">
+            <a:extLst>
+              <a:ext uri="{FF2B5EF4-FFF2-40B4-BE49-F238E27FC236}">
+                <a16:creationId xmlns:a16="http://schemas.microsoft.com/office/drawing/2014/main" id="{815E0C01-65C2-DA6D-DC83-F3BB01FB5714}"/>
+              </a:ext>
+            </a:extLst>
+          </p:cNvPr>
+          <p:cNvSpPr txBox="1"/>
+          <p:nvPr/>
+        </p:nvSpPr>
+        <p:spPr>
+          <a:xfrm>
+            <a:off x="616189" y="1305493"/>
+            <a:ext cx="11210052" cy="837024"/>
+          </a:xfrm>
+          <a:prstGeom prst="rect">
+            <a:avLst/>
+          </a:prstGeom>
+          <a:noFill/>
+        </p:spPr>
+        <p:txBody>
+          <a:bodyPr wrap="square" rtlCol="0">
+            <a:spAutoFit/>
+          </a:bodyPr>
+          <a:lstStyle/>
+          <a:p>
+            <a:pPr>
+              <a:lnSpc>
+                <a:spcPct val="150000"/>
+              </a:lnSpc>
+            </a:pPr>
+            <a:r>
+              <a:rPr lang="ko-KR" altLang="en-US" sz="1700" dirty="0">
+                <a:latin typeface="D2Coding" panose="020B0609020101020101" pitchFamily="49" charset="-127"/>
+                <a:ea typeface="D2Coding" panose="020B0609020101020101" pitchFamily="49" charset="-127"/>
+              </a:rPr>
+              <a:t>인공지능이 이미 한 분야에서 쌓은 지식과 경험을 바탕으로</a:t>
+            </a:r>
+            <a:r>
+              <a:rPr lang="en-US" altLang="ko-KR" sz="1700" dirty="0">
+                <a:latin typeface="D2Coding" panose="020B0609020101020101" pitchFamily="49" charset="-127"/>
+                <a:ea typeface="D2Coding" panose="020B0609020101020101" pitchFamily="49" charset="-127"/>
+              </a:rPr>
+              <a:t>, </a:t>
+            </a:r>
+            <a:r>
+              <a:rPr lang="ko-KR" altLang="en-US" sz="1700" dirty="0">
+                <a:latin typeface="D2Coding" panose="020B0609020101020101" pitchFamily="49" charset="-127"/>
+                <a:ea typeface="D2Coding" panose="020B0609020101020101" pitchFamily="49" charset="-127"/>
+              </a:rPr>
+              <a:t>새로운 분야의 문제를 훨씬 더 빠르게 배우도록 만드는 기술</a:t>
+            </a:r>
+          </a:p>
+        </p:txBody>
+      </p:sp>
+      <p:sp>
+        <p:nvSpPr>
+          <p:cNvPr id="9" name="AutoShape 3" descr="The impact of using the gradient clipping technique in the training stage.">
+            <a:extLst>
+              <a:ext uri="{FF2B5EF4-FFF2-40B4-BE49-F238E27FC236}">
+                <a16:creationId xmlns:a16="http://schemas.microsoft.com/office/drawing/2014/main" id="{F2B72AE6-8173-1D60-6E7F-357DC0FA6FC0}"/>
+              </a:ext>
+            </a:extLst>
+          </p:cNvPr>
+          <p:cNvSpPr>
+            <a:spLocks noChangeAspect="1" noChangeArrowheads="1"/>
+          </p:cNvSpPr>
+          <p:nvPr/>
+        </p:nvSpPr>
+        <p:spPr bwMode="auto">
+          <a:xfrm>
+            <a:off x="5943600" y="3276600"/>
+            <a:ext cx="304800" cy="304800"/>
+          </a:xfrm>
+          <a:prstGeom prst="rect">
+            <a:avLst/>
+          </a:prstGeom>
+          <a:noFill/>
+          <a:extLst>
+            <a:ext uri="{909E8E84-426E-40DD-AFC4-6F175D3DCCD1}">
+              <a14:hiddenFill xmlns:a14="http://schemas.microsoft.com/office/drawing/2010/main">
+                <a:solidFill>
+                  <a:srgbClr val="FFFFFF"/>
+                </a:solidFill>
+              </a14:hiddenFill>
+            </a:ext>
+          </a:extLst>
+        </p:spPr>
+        <p:txBody>
+          <a:bodyPr vert="horz" wrap="square" lIns="91440" tIns="45720" rIns="91440" bIns="45720" numCol="1" anchor="t" anchorCtr="0" compatLnSpc="1">
+            <a:prstTxWarp prst="textNoShape">
+              <a:avLst/>
+            </a:prstTxWarp>
+          </a:bodyPr>
+          <a:lstStyle/>
+          <a:p>
+            <a:endParaRPr lang="ko-KR" altLang="en-US"/>
+          </a:p>
+        </p:txBody>
+      </p:sp>
+      <p:graphicFrame>
+        <p:nvGraphicFramePr>
+          <p:cNvPr id="10" name="표 9">
+            <a:extLst>
+              <a:ext uri="{FF2B5EF4-FFF2-40B4-BE49-F238E27FC236}">
+                <a16:creationId xmlns:a16="http://schemas.microsoft.com/office/drawing/2014/main" id="{9EDEBAD2-8684-2304-B62D-3AE104E37B1C}"/>
+              </a:ext>
+            </a:extLst>
+          </p:cNvPr>
+          <p:cNvGraphicFramePr>
+            <a:graphicFrameLocks noGrp="1"/>
+          </p:cNvGraphicFramePr>
+          <p:nvPr>
+            <p:extLst>
+              <p:ext uri="{D42A27DB-BD31-4B8C-83A1-F6EECF244321}">
+                <p14:modId xmlns:p14="http://schemas.microsoft.com/office/powerpoint/2010/main" val="1438413186"/>
+              </p:ext>
+            </p:extLst>
+          </p:nvPr>
+        </p:nvGraphicFramePr>
+        <p:xfrm>
+          <a:off x="1156454" y="3271520"/>
+          <a:ext cx="9574292" cy="2259789"/>
+        </p:xfrm>
+        <a:graphic>
+          <a:graphicData uri="http://schemas.openxmlformats.org/drawingml/2006/table">
+            <a:tbl>
+              <a:tblPr firstRow="1" bandRow="1">
+                <a:tableStyleId>{5C22544A-7EE6-4342-B048-85BDC9FD1C3A}</a:tableStyleId>
+              </a:tblPr>
+              <a:tblGrid>
+                <a:gridCol w="3000772">
+                  <a:extLst>
+                    <a:ext uri="{9D8B030D-6E8A-4147-A177-3AD203B41FA5}">
+                      <a16:colId xmlns:a16="http://schemas.microsoft.com/office/drawing/2014/main" val="2486939099"/>
+                    </a:ext>
+                  </a:extLst>
+                </a:gridCol>
+                <a:gridCol w="6573520">
+                  <a:extLst>
+                    <a:ext uri="{9D8B030D-6E8A-4147-A177-3AD203B41FA5}">
+                      <a16:colId xmlns:a16="http://schemas.microsoft.com/office/drawing/2014/main" val="198867057"/>
+                    </a:ext>
+                  </a:extLst>
+                </a:gridCol>
+              </a:tblGrid>
+              <a:tr h="560223">
+                <a:tc>
+                  <a:txBody>
+                    <a:bodyPr/>
+                    <a:lstStyle/>
+                    <a:p>
+                      <a:pPr marL="0" algn="l" defTabSz="914400" rtl="0" eaLnBrk="1" latinLnBrk="1" hangingPunct="1"/>
+                      <a:r>
+                        <a:rPr lang="ko-KR" altLang="en-US" sz="1600" b="0" kern="1200" dirty="0">
+                          <a:solidFill>
+                            <a:schemeClr val="bg1"/>
+                          </a:solidFill>
+                          <a:latin typeface="D2Coding" panose="020B0609020101020101" pitchFamily="49" charset="-127"/>
+                          <a:ea typeface="D2Coding" panose="020B0609020101020101" pitchFamily="49" charset="-127"/>
+                          <a:cs typeface="+mn-cs"/>
+                        </a:rPr>
+                        <a:t>기존모델 </a:t>
+                      </a:r>
+                      <a:r>
+                        <a:rPr lang="en-US" altLang="ko-KR" sz="1600" b="0" kern="1200" dirty="0">
+                          <a:solidFill>
+                            <a:schemeClr val="bg1"/>
+                          </a:solidFill>
+                          <a:latin typeface="D2Coding" panose="020B0609020101020101" pitchFamily="49" charset="-127"/>
+                          <a:ea typeface="D2Coding" panose="020B0609020101020101" pitchFamily="49" charset="-127"/>
+                          <a:cs typeface="+mn-cs"/>
+                        </a:rPr>
+                        <a:t>Layers</a:t>
+                      </a:r>
+                      <a:endParaRPr lang="ko-KR" altLang="en-US" sz="1600" b="0" kern="1200" dirty="0">
+                        <a:solidFill>
+                          <a:schemeClr val="bg1"/>
+                        </a:solidFill>
+                        <a:latin typeface="D2Coding" panose="020B0609020101020101" pitchFamily="49" charset="-127"/>
+                        <a:ea typeface="D2Coding" panose="020B0609020101020101" pitchFamily="49" charset="-127"/>
+                        <a:cs typeface="+mn-cs"/>
+                      </a:endParaRPr>
+                    </a:p>
+                  </a:txBody>
+                  <a:tcPr anchor="ctr"/>
+                </a:tc>
+                <a:tc>
+                  <a:txBody>
+                    <a:bodyPr/>
+                    <a:lstStyle/>
+                    <a:p>
+                      <a:pPr marL="0" algn="l" defTabSz="914400" rtl="0" eaLnBrk="1" latinLnBrk="1" hangingPunct="1"/>
+                      <a:r>
+                        <a:rPr lang="en-US" altLang="ko-KR" sz="1600" b="0" kern="1200" dirty="0">
+                          <a:solidFill>
+                            <a:schemeClr val="bg1"/>
+                          </a:solidFill>
+                          <a:latin typeface="D2Coding" panose="020B0609020101020101" pitchFamily="49" charset="-127"/>
+                          <a:ea typeface="D2Coding" panose="020B0609020101020101" pitchFamily="49" charset="-127"/>
+                          <a:cs typeface="+mn-cs"/>
+                        </a:rPr>
+                        <a:t>Reusing </a:t>
+                      </a:r>
+                      <a:r>
+                        <a:rPr lang="ko-KR" altLang="en-US" sz="1600" b="0" kern="1200" dirty="0">
+                          <a:solidFill>
+                            <a:schemeClr val="bg1"/>
+                          </a:solidFill>
+                          <a:latin typeface="D2Coding" panose="020B0609020101020101" pitchFamily="49" charset="-127"/>
+                          <a:ea typeface="D2Coding" panose="020B0609020101020101" pitchFamily="49" charset="-127"/>
+                          <a:cs typeface="+mn-cs"/>
+                        </a:rPr>
+                        <a:t>방안</a:t>
+                      </a:r>
+                    </a:p>
+                  </a:txBody>
+                  <a:tcPr anchor="ctr"/>
+                </a:tc>
+                <a:extLst>
+                  <a:ext uri="{0D108BD9-81ED-4DB2-BD59-A6C34878D82A}">
+                    <a16:rowId xmlns:a16="http://schemas.microsoft.com/office/drawing/2014/main" val="3687885245"/>
+                  </a:ext>
+                </a:extLst>
+              </a:tr>
+              <a:tr h="560223">
+                <a:tc>
+                  <a:txBody>
+                    <a:bodyPr/>
+                    <a:lstStyle/>
+                    <a:p>
+                      <a:pPr marL="0" algn="l" defTabSz="914400" rtl="0" eaLnBrk="1" latinLnBrk="1" hangingPunct="1"/>
+                      <a:r>
+                        <a:rPr lang="ko-KR" altLang="en-US" sz="1600" kern="1200" dirty="0" err="1">
+                          <a:solidFill>
+                            <a:schemeClr val="dk1"/>
+                          </a:solidFill>
+                          <a:latin typeface="D2Coding" panose="020B0609020101020101" pitchFamily="49" charset="-127"/>
+                          <a:ea typeface="D2Coding" panose="020B0609020101020101" pitchFamily="49" charset="-127"/>
+                          <a:cs typeface="+mn-cs"/>
+                        </a:rPr>
+                        <a:t>출력층</a:t>
+                      </a:r>
+                      <a:r>
+                        <a:rPr lang="ko-KR" altLang="en-US" sz="1600" kern="1200" dirty="0">
+                          <a:solidFill>
+                            <a:schemeClr val="dk1"/>
+                          </a:solidFill>
+                          <a:latin typeface="D2Coding" panose="020B0609020101020101" pitchFamily="49" charset="-127"/>
+                          <a:ea typeface="D2Coding" panose="020B0609020101020101" pitchFamily="49" charset="-127"/>
+                          <a:cs typeface="+mn-cs"/>
+                        </a:rPr>
+                        <a:t> </a:t>
+                      </a:r>
+                      <a:r>
+                        <a:rPr lang="en-US" altLang="ko-KR" sz="1600" kern="1200" dirty="0">
+                          <a:solidFill>
+                            <a:schemeClr val="dk1"/>
+                          </a:solidFill>
+                          <a:latin typeface="D2Coding" panose="020B0609020101020101" pitchFamily="49" charset="-127"/>
+                          <a:ea typeface="D2Coding" panose="020B0609020101020101" pitchFamily="49" charset="-127"/>
+                          <a:cs typeface="+mn-cs"/>
+                        </a:rPr>
+                        <a:t>(Output Layer)</a:t>
+                      </a:r>
+                      <a:endParaRPr lang="ko-KR" altLang="en-US" sz="1600" kern="1200" dirty="0">
+                        <a:solidFill>
+                          <a:schemeClr val="dk1"/>
+                        </a:solidFill>
+                        <a:latin typeface="D2Coding" panose="020B0609020101020101" pitchFamily="49" charset="-127"/>
+                        <a:ea typeface="D2Coding" panose="020B0609020101020101" pitchFamily="49" charset="-127"/>
+                        <a:cs typeface="+mn-cs"/>
+                      </a:endParaRPr>
+                    </a:p>
+                  </a:txBody>
+                  <a:tcPr anchor="ctr"/>
+                </a:tc>
+                <a:tc>
+                  <a:txBody>
+                    <a:bodyPr/>
+                    <a:lstStyle/>
+                    <a:p>
+                      <a:pPr marL="0" algn="l" defTabSz="914400" rtl="0" eaLnBrk="1" latinLnBrk="1" hangingPunct="1"/>
+                      <a:r>
+                        <a:rPr lang="en-US" altLang="ko-KR" sz="1600" kern="1200" dirty="0">
+                          <a:solidFill>
+                            <a:schemeClr val="dk1"/>
+                          </a:solidFill>
+                          <a:latin typeface="D2Coding" panose="020B0609020101020101" pitchFamily="49" charset="-127"/>
+                          <a:ea typeface="D2Coding" panose="020B0609020101020101" pitchFamily="49" charset="-127"/>
+                          <a:cs typeface="+mn-cs"/>
+                        </a:rPr>
+                        <a:t>❌ </a:t>
+                      </a:r>
+                      <a:r>
+                        <a:rPr lang="ko-KR" altLang="en-US" sz="1600" kern="1200" dirty="0">
+                          <a:solidFill>
+                            <a:schemeClr val="dk1"/>
+                          </a:solidFill>
+                          <a:latin typeface="D2Coding" panose="020B0609020101020101" pitchFamily="49" charset="-127"/>
+                          <a:ea typeface="D2Coding" panose="020B0609020101020101" pitchFamily="49" charset="-127"/>
+                          <a:cs typeface="+mn-cs"/>
+                        </a:rPr>
+                        <a:t>무조건 삭제 후</a:t>
+                      </a:r>
+                      <a:r>
+                        <a:rPr lang="en-US" altLang="ko-KR" sz="1600" kern="1200" dirty="0">
+                          <a:solidFill>
+                            <a:schemeClr val="dk1"/>
+                          </a:solidFill>
+                          <a:latin typeface="D2Coding" panose="020B0609020101020101" pitchFamily="49" charset="-127"/>
+                          <a:ea typeface="D2Coding" panose="020B0609020101020101" pitchFamily="49" charset="-127"/>
+                          <a:cs typeface="+mn-cs"/>
+                        </a:rPr>
+                        <a:t>, </a:t>
+                      </a:r>
+                      <a:r>
+                        <a:rPr lang="ko-KR" altLang="en-US" sz="1600" kern="1200" dirty="0">
+                          <a:solidFill>
+                            <a:schemeClr val="dk1"/>
+                          </a:solidFill>
+                          <a:latin typeface="D2Coding" panose="020B0609020101020101" pitchFamily="49" charset="-127"/>
+                          <a:ea typeface="D2Coding" panose="020B0609020101020101" pitchFamily="49" charset="-127"/>
+                          <a:cs typeface="+mn-cs"/>
+                        </a:rPr>
+                        <a:t>내 정답 개수에 맞게 새로 생성</a:t>
+                      </a:r>
+                    </a:p>
+                  </a:txBody>
+                  <a:tcPr anchor="ctr"/>
+                </a:tc>
+                <a:extLst>
+                  <a:ext uri="{0D108BD9-81ED-4DB2-BD59-A6C34878D82A}">
+                    <a16:rowId xmlns:a16="http://schemas.microsoft.com/office/drawing/2014/main" val="3775239614"/>
+                  </a:ext>
+                </a:extLst>
+              </a:tr>
+              <a:tr h="560223">
+                <a:tc>
+                  <a:txBody>
+                    <a:bodyPr/>
+                    <a:lstStyle/>
+                    <a:p>
+                      <a:pPr marL="0" algn="l" defTabSz="914400" rtl="0" eaLnBrk="1" latinLnBrk="1" hangingPunct="1"/>
+                      <a:r>
+                        <a:rPr lang="ko-KR" altLang="en-US" sz="1600" kern="1200" dirty="0">
+                          <a:solidFill>
+                            <a:schemeClr val="dk1"/>
+                          </a:solidFill>
+                          <a:latin typeface="D2Coding" panose="020B0609020101020101" pitchFamily="49" charset="-127"/>
+                          <a:ea typeface="D2Coding" panose="020B0609020101020101" pitchFamily="49" charset="-127"/>
+                          <a:cs typeface="+mn-cs"/>
+                        </a:rPr>
+                        <a:t>위쪽 </a:t>
+                      </a:r>
+                      <a:r>
+                        <a:rPr lang="ko-KR" altLang="en-US" sz="1600" kern="1200" dirty="0" err="1">
+                          <a:solidFill>
+                            <a:schemeClr val="dk1"/>
+                          </a:solidFill>
+                          <a:latin typeface="D2Coding" panose="020B0609020101020101" pitchFamily="49" charset="-127"/>
+                          <a:ea typeface="D2Coding" panose="020B0609020101020101" pitchFamily="49" charset="-127"/>
+                          <a:cs typeface="+mn-cs"/>
+                        </a:rPr>
+                        <a:t>은닉층</a:t>
+                      </a:r>
+                      <a:r>
+                        <a:rPr lang="ko-KR" altLang="en-US" sz="1600" kern="1200" dirty="0">
+                          <a:solidFill>
+                            <a:schemeClr val="dk1"/>
+                          </a:solidFill>
+                          <a:latin typeface="D2Coding" panose="020B0609020101020101" pitchFamily="49" charset="-127"/>
+                          <a:ea typeface="D2Coding" panose="020B0609020101020101" pitchFamily="49" charset="-127"/>
+                          <a:cs typeface="+mn-cs"/>
+                        </a:rPr>
+                        <a:t> </a:t>
+                      </a:r>
+                      <a:r>
+                        <a:rPr lang="en-US" altLang="ko-KR" sz="1600" kern="1200" dirty="0">
+                          <a:solidFill>
+                            <a:schemeClr val="dk1"/>
+                          </a:solidFill>
+                          <a:latin typeface="D2Coding" panose="020B0609020101020101" pitchFamily="49" charset="-127"/>
+                          <a:ea typeface="D2Coding" panose="020B0609020101020101" pitchFamily="49" charset="-127"/>
+                          <a:cs typeface="+mn-cs"/>
+                        </a:rPr>
+                        <a:t>(Upper Layer)</a:t>
+                      </a:r>
+                      <a:endParaRPr lang="ko-KR" altLang="en-US" sz="1600" kern="1200" dirty="0">
+                        <a:solidFill>
+                          <a:schemeClr val="dk1"/>
+                        </a:solidFill>
+                        <a:latin typeface="D2Coding" panose="020B0609020101020101" pitchFamily="49" charset="-127"/>
+                        <a:ea typeface="D2Coding" panose="020B0609020101020101" pitchFamily="49" charset="-127"/>
+                        <a:cs typeface="+mn-cs"/>
+                      </a:endParaRPr>
+                    </a:p>
+                  </a:txBody>
+                  <a:tcPr anchor="ctr"/>
+                </a:tc>
+                <a:tc>
+                  <a:txBody>
+                    <a:bodyPr/>
+                    <a:lstStyle/>
+                    <a:p>
+                      <a:pPr marL="0" algn="l" defTabSz="914400" rtl="0" eaLnBrk="1" latinLnBrk="1" hangingPunct="1"/>
+                      <a:r>
+                        <a:rPr lang="en-US" altLang="ko-KR" sz="3200" kern="1200" dirty="0">
+                          <a:solidFill>
+                            <a:schemeClr val="dk1"/>
+                          </a:solidFill>
+                          <a:latin typeface="D2Coding" panose="020B0609020101020101" pitchFamily="49" charset="-127"/>
+                          <a:ea typeface="D2Coding" panose="020B0609020101020101" pitchFamily="49" charset="-127"/>
+                          <a:cs typeface="+mn-cs"/>
+                        </a:rPr>
+                        <a:t>⚠️ </a:t>
+                      </a:r>
+                      <a:r>
+                        <a:rPr lang="ko-KR" altLang="en-US" sz="1600" kern="1200" dirty="0">
+                          <a:solidFill>
+                            <a:schemeClr val="dk1"/>
+                          </a:solidFill>
+                          <a:latin typeface="D2Coding" panose="020B0609020101020101" pitchFamily="49" charset="-127"/>
+                          <a:ea typeface="D2Coding" panose="020B0609020101020101" pitchFamily="49" charset="-127"/>
+                          <a:cs typeface="+mn-cs"/>
+                        </a:rPr>
+                        <a:t>삭제하거나</a:t>
+                      </a:r>
+                      <a:r>
+                        <a:rPr lang="en-US" altLang="ko-KR" sz="1600" kern="1200" dirty="0">
+                          <a:solidFill>
+                            <a:schemeClr val="dk1"/>
+                          </a:solidFill>
+                          <a:latin typeface="D2Coding" panose="020B0609020101020101" pitchFamily="49" charset="-127"/>
+                          <a:ea typeface="D2Coding" panose="020B0609020101020101" pitchFamily="49" charset="-127"/>
+                          <a:cs typeface="+mn-cs"/>
+                        </a:rPr>
+                        <a:t>, </a:t>
+                      </a:r>
+                      <a:r>
+                        <a:rPr lang="ko-KR" altLang="en-US" sz="1600" kern="1200" dirty="0">
+                          <a:solidFill>
+                            <a:schemeClr val="dk1"/>
+                          </a:solidFill>
+                          <a:latin typeface="D2Coding" panose="020B0609020101020101" pitchFamily="49" charset="-127"/>
+                          <a:ea typeface="D2Coding" panose="020B0609020101020101" pitchFamily="49" charset="-127"/>
+                          <a:cs typeface="+mn-cs"/>
+                        </a:rPr>
+                        <a:t>내 데이터에 맞게 다시 학습 </a:t>
+                      </a:r>
+                      <a:r>
+                        <a:rPr lang="en-US" altLang="ko-KR" sz="1600" kern="1200" dirty="0">
+                          <a:solidFill>
+                            <a:schemeClr val="dk1"/>
+                          </a:solidFill>
+                          <a:latin typeface="D2Coding" panose="020B0609020101020101" pitchFamily="49" charset="-127"/>
+                          <a:ea typeface="D2Coding" panose="020B0609020101020101" pitchFamily="49" charset="-127"/>
+                          <a:cs typeface="+mn-cs"/>
+                        </a:rPr>
+                        <a:t>(Fine-tuning)</a:t>
+                      </a:r>
+                      <a:endParaRPr lang="ko-KR" altLang="en-US" sz="1600" kern="1200" dirty="0">
+                        <a:solidFill>
+                          <a:schemeClr val="dk1"/>
+                        </a:solidFill>
+                        <a:latin typeface="D2Coding" panose="020B0609020101020101" pitchFamily="49" charset="-127"/>
+                        <a:ea typeface="D2Coding" panose="020B0609020101020101" pitchFamily="49" charset="-127"/>
+                        <a:cs typeface="+mn-cs"/>
+                      </a:endParaRPr>
+                    </a:p>
+                  </a:txBody>
+                  <a:tcPr anchor="ctr"/>
+                </a:tc>
+                <a:extLst>
+                  <a:ext uri="{0D108BD9-81ED-4DB2-BD59-A6C34878D82A}">
+                    <a16:rowId xmlns:a16="http://schemas.microsoft.com/office/drawing/2014/main" val="1948137511"/>
+                  </a:ext>
+                </a:extLst>
+              </a:tr>
+              <a:tr h="560223">
+                <a:tc>
+                  <a:txBody>
+                    <a:bodyPr/>
+                    <a:lstStyle/>
+                    <a:p>
+                      <a:pPr marL="0" algn="l" defTabSz="914400" rtl="0" eaLnBrk="1" latinLnBrk="1" hangingPunct="1"/>
+                      <a:r>
+                        <a:rPr lang="ko-KR" altLang="en-US" sz="1600" kern="1200" dirty="0">
+                          <a:solidFill>
+                            <a:schemeClr val="dk1"/>
+                          </a:solidFill>
+                          <a:latin typeface="D2Coding" panose="020B0609020101020101" pitchFamily="49" charset="-127"/>
+                          <a:ea typeface="D2Coding" panose="020B0609020101020101" pitchFamily="49" charset="-127"/>
+                          <a:cs typeface="+mn-cs"/>
+                        </a:rPr>
+                        <a:t>아래쪽 </a:t>
+                      </a:r>
+                      <a:r>
+                        <a:rPr lang="ko-KR" altLang="en-US" sz="1600" kern="1200" dirty="0" err="1">
+                          <a:solidFill>
+                            <a:schemeClr val="dk1"/>
+                          </a:solidFill>
+                          <a:latin typeface="D2Coding" panose="020B0609020101020101" pitchFamily="49" charset="-127"/>
+                          <a:ea typeface="D2Coding" panose="020B0609020101020101" pitchFamily="49" charset="-127"/>
+                          <a:cs typeface="+mn-cs"/>
+                        </a:rPr>
+                        <a:t>은닉층</a:t>
+                      </a:r>
+                      <a:r>
+                        <a:rPr lang="ko-KR" altLang="en-US" sz="1600" kern="1200" dirty="0">
+                          <a:solidFill>
+                            <a:schemeClr val="dk1"/>
+                          </a:solidFill>
+                          <a:latin typeface="D2Coding" panose="020B0609020101020101" pitchFamily="49" charset="-127"/>
+                          <a:ea typeface="D2Coding" panose="020B0609020101020101" pitchFamily="49" charset="-127"/>
+                          <a:cs typeface="+mn-cs"/>
+                        </a:rPr>
+                        <a:t> </a:t>
+                      </a:r>
+                      <a:r>
+                        <a:rPr lang="en-US" altLang="ko-KR" sz="1600" kern="1200" dirty="0">
+                          <a:solidFill>
+                            <a:schemeClr val="dk1"/>
+                          </a:solidFill>
+                          <a:latin typeface="D2Coding" panose="020B0609020101020101" pitchFamily="49" charset="-127"/>
+                          <a:ea typeface="D2Coding" panose="020B0609020101020101" pitchFamily="49" charset="-127"/>
+                          <a:cs typeface="+mn-cs"/>
+                        </a:rPr>
+                        <a:t>(Lower Layer)</a:t>
+                      </a:r>
+                      <a:endParaRPr lang="ko-KR" altLang="en-US" sz="1600" kern="1200" dirty="0">
+                        <a:solidFill>
+                          <a:schemeClr val="dk1"/>
+                        </a:solidFill>
+                        <a:latin typeface="D2Coding" panose="020B0609020101020101" pitchFamily="49" charset="-127"/>
+                        <a:ea typeface="D2Coding" panose="020B0609020101020101" pitchFamily="49" charset="-127"/>
+                        <a:cs typeface="+mn-cs"/>
+                      </a:endParaRPr>
+                    </a:p>
+                  </a:txBody>
+                  <a:tcPr anchor="ctr"/>
+                </a:tc>
+                <a:tc>
+                  <a:txBody>
+                    <a:bodyPr/>
+                    <a:lstStyle/>
+                    <a:p>
+                      <a:pPr marL="0" algn="l" defTabSz="914400" rtl="0" eaLnBrk="1" latinLnBrk="1" hangingPunct="1"/>
+                      <a:r>
+                        <a:rPr lang="en-US" altLang="ko-KR" sz="1600" kern="1200" dirty="0">
+                          <a:solidFill>
+                            <a:schemeClr val="dk1"/>
+                          </a:solidFill>
+                          <a:latin typeface="D2Coding" panose="020B0609020101020101" pitchFamily="49" charset="-127"/>
+                          <a:ea typeface="D2Coding" panose="020B0609020101020101" pitchFamily="49" charset="-127"/>
+                          <a:cs typeface="+mn-cs"/>
+                        </a:rPr>
+                        <a:t>⭕ </a:t>
+                      </a:r>
+                      <a:r>
+                        <a:rPr lang="ko-KR" altLang="en-US" sz="1600" kern="1200" dirty="0">
+                          <a:solidFill>
+                            <a:schemeClr val="dk1"/>
+                          </a:solidFill>
+                          <a:latin typeface="D2Coding" panose="020B0609020101020101" pitchFamily="49" charset="-127"/>
+                          <a:ea typeface="D2Coding" panose="020B0609020101020101" pitchFamily="49" charset="-127"/>
+                          <a:cs typeface="+mn-cs"/>
+                        </a:rPr>
+                        <a:t>그대로 재사용</a:t>
+                      </a:r>
+                      <a:r>
+                        <a:rPr lang="en-US" altLang="ko-KR" sz="1600" kern="1200" dirty="0">
+                          <a:solidFill>
+                            <a:schemeClr val="dk1"/>
+                          </a:solidFill>
+                          <a:latin typeface="D2Coding" panose="020B0609020101020101" pitchFamily="49" charset="-127"/>
+                          <a:ea typeface="D2Coding" panose="020B0609020101020101" pitchFamily="49" charset="-127"/>
+                          <a:cs typeface="+mn-cs"/>
+                        </a:rPr>
+                        <a:t>! (</a:t>
+                      </a:r>
+                      <a:r>
+                        <a:rPr lang="ko-KR" altLang="en-US" sz="1600" kern="1200" dirty="0">
+                          <a:solidFill>
+                            <a:schemeClr val="dk1"/>
+                          </a:solidFill>
+                          <a:latin typeface="D2Coding" panose="020B0609020101020101" pitchFamily="49" charset="-127"/>
+                          <a:ea typeface="D2Coding" panose="020B0609020101020101" pitchFamily="49" charset="-127"/>
+                          <a:cs typeface="+mn-cs"/>
+                        </a:rPr>
+                        <a:t>가중치 고정</a:t>
+                      </a:r>
+                      <a:r>
+                        <a:rPr lang="en-US" altLang="ko-KR" sz="1600" kern="1200" dirty="0">
+                          <a:solidFill>
+                            <a:schemeClr val="dk1"/>
+                          </a:solidFill>
+                          <a:latin typeface="D2Coding" panose="020B0609020101020101" pitchFamily="49" charset="-127"/>
+                          <a:ea typeface="D2Coding" panose="020B0609020101020101" pitchFamily="49" charset="-127"/>
+                          <a:cs typeface="+mn-cs"/>
+                        </a:rPr>
+                        <a:t>, Freeze)</a:t>
+                      </a:r>
+                      <a:endParaRPr lang="ko-KR" altLang="en-US" sz="1600" kern="1200" dirty="0">
+                        <a:solidFill>
+                          <a:schemeClr val="dk1"/>
+                        </a:solidFill>
+                        <a:latin typeface="D2Coding" panose="020B0609020101020101" pitchFamily="49" charset="-127"/>
+                        <a:ea typeface="D2Coding" panose="020B0609020101020101" pitchFamily="49" charset="-127"/>
+                        <a:cs typeface="+mn-cs"/>
+                      </a:endParaRPr>
+                    </a:p>
+                  </a:txBody>
+                  <a:tcPr anchor="ctr"/>
+                </a:tc>
+                <a:extLst>
+                  <a:ext uri="{0D108BD9-81ED-4DB2-BD59-A6C34878D82A}">
+                    <a16:rowId xmlns:a16="http://schemas.microsoft.com/office/drawing/2014/main" val="1403611194"/>
+                  </a:ext>
+                </a:extLst>
+              </a:tr>
+            </a:tbl>
+          </a:graphicData>
+        </a:graphic>
+      </p:graphicFrame>
+    </p:spTree>
+    <p:extLst>
+      <p:ext uri="{BB962C8B-B14F-4D97-AF65-F5344CB8AC3E}">
+        <p14:creationId xmlns:p14="http://schemas.microsoft.com/office/powerpoint/2010/main" val="4237559172"/>
+      </p:ext>
+    </p:extLst>
+  </p:cSld>
+  <p:clrMapOvr>
+    <a:masterClrMapping/>
+  </p:clrMapOvr>
+</p:sld>
+</file>
+
+<file path=ppt/slides/slide9.xml><?xml version="1.0" encoding="utf-8"?>
+<p:sld xmlns:a="http://schemas.openxmlformats.org/drawingml/2006/main" xmlns:r="http://schemas.openxmlformats.org/officeDocument/2006/relationships" xmlns:p="http://schemas.openxmlformats.org/presentationml/2006/main">
+  <p:cSld>
+    <p:spTree>
+      <p:nvGrpSpPr>
+        <p:cNvPr id="1" name="">
+          <a:extLst>
+            <a:ext uri="{FF2B5EF4-FFF2-40B4-BE49-F238E27FC236}">
+              <a16:creationId xmlns:a16="http://schemas.microsoft.com/office/drawing/2014/main" id="{273B741A-7BF4-0353-4545-67CA4D6FF642}"/>
+            </a:ext>
+          </a:extLst>
+        </p:cNvPr>
+        <p:cNvGrpSpPr/>
+        <p:nvPr/>
+      </p:nvGrpSpPr>
+      <p:grpSpPr>
+        <a:xfrm>
+          <a:off x="0" y="0"/>
+          <a:ext cx="0" cy="0"/>
+          <a:chOff x="0" y="0"/>
+          <a:chExt cx="0" cy="0"/>
+        </a:xfrm>
+      </p:grpSpPr>
+      <p:sp>
+        <p:nvSpPr>
+          <p:cNvPr id="4" name="슬라이드 번호 개체 틀 3">
+            <a:extLst>
+              <a:ext uri="{FF2B5EF4-FFF2-40B4-BE49-F238E27FC236}">
+                <a16:creationId xmlns:a16="http://schemas.microsoft.com/office/drawing/2014/main" id="{CB181CFE-7B12-139E-45E8-C35BC692861E}"/>
+              </a:ext>
+            </a:extLst>
+          </p:cNvPr>
+          <p:cNvSpPr>
+            <a:spLocks noGrp="1"/>
+          </p:cNvSpPr>
+          <p:nvPr>
+            <p:ph type="sldNum" sz="quarter" idx="12"/>
+          </p:nvPr>
+        </p:nvSpPr>
+        <p:spPr>
+          <a:xfrm>
+            <a:off x="10514011" y="6036261"/>
+            <a:ext cx="753545" cy="365125"/>
+          </a:xfrm>
+        </p:spPr>
+        <p:txBody>
+          <a:bodyPr/>
+          <a:lstStyle/>
+          <a:p>
+            <a:fld id="{D57F1E4F-1CFF-5643-939E-217C01CDF565}" type="slidenum">
+              <a:rPr lang="en-US" smtClean="0"/>
+              <a:pPr/>
+              <a:t>9</a:t>
+            </a:fld>
+            <a:endParaRPr lang="en-US" dirty="0"/>
+          </a:p>
+        </p:txBody>
+      </p:sp>
+      <p:sp>
+        <p:nvSpPr>
+          <p:cNvPr id="3" name="제목 1">
+            <a:extLst>
+              <a:ext uri="{FF2B5EF4-FFF2-40B4-BE49-F238E27FC236}">
+                <a16:creationId xmlns:a16="http://schemas.microsoft.com/office/drawing/2014/main" id="{FCBAB8B9-57C3-49D6-2059-FB252A846B9A}"/>
+              </a:ext>
+            </a:extLst>
+          </p:cNvPr>
+          <p:cNvSpPr txBox="1">
+            <a:spLocks/>
+          </p:cNvSpPr>
+          <p:nvPr/>
+        </p:nvSpPr>
+        <p:spPr>
+          <a:xfrm>
+            <a:off x="475645" y="481983"/>
+            <a:ext cx="10353762" cy="766439"/>
+          </a:xfrm>
+          <a:prstGeom prst="rect">
+            <a:avLst/>
+          </a:prstGeom>
+        </p:spPr>
+        <p:txBody>
+          <a:bodyPr vert="horz" lIns="91440" tIns="45720" rIns="91440" bIns="45720" rtlCol="0" anchor="ctr">
+            <a:normAutofit/>
+          </a:bodyPr>
+          <a:lstStyle>
+            <a:lvl1pPr algn="ctr" defTabSz="914400" rtl="0" eaLnBrk="1" latinLnBrk="1" hangingPunct="1">
+              <a:lnSpc>
+                <a:spcPct val="90000"/>
+              </a:lnSpc>
+              <a:spcBef>
+                <a:spcPct val="0"/>
+              </a:spcBef>
+              <a:buNone/>
+              <a:defRPr sz="3200" kern="1200" cap="all" baseline="0">
+                <a:solidFill>
+                  <a:schemeClr val="tx1"/>
+                </a:solidFill>
+                <a:effectLst/>
+                <a:latin typeface="Batang" panose="02030600000101010101" pitchFamily="18" charset="-127"/>
+                <a:ea typeface="Batang" panose="02030600000101010101" pitchFamily="18" charset="-127"/>
+                <a:cs typeface="+mj-cs"/>
+              </a:defRPr>
+            </a:lvl1pPr>
+          </a:lstStyle>
+          <a:p>
+            <a:pPr algn="l">
+              <a:lnSpc>
+                <a:spcPct val="150000"/>
+              </a:lnSpc>
+            </a:pPr>
+            <a:r>
+              <a:rPr lang="en-US" altLang="ko-KR" sz="2800" b="1" cap="none" dirty="0">
+                <a:latin typeface="D2Coding" panose="020B0609020101020101" pitchFamily="49" charset="-127"/>
+                <a:ea typeface="D2Coding" panose="020B0609020101020101" pitchFamily="49" charset="-127"/>
+              </a:rPr>
+              <a:t>Unsupervised Pretraining </a:t>
+            </a:r>
+          </a:p>
+        </p:txBody>
+      </p:sp>
+      <p:sp>
+        <p:nvSpPr>
+          <p:cNvPr id="9" name="AutoShape 3" descr="The impact of using the gradient clipping technique in the training stage.">
+            <a:extLst>
+              <a:ext uri="{FF2B5EF4-FFF2-40B4-BE49-F238E27FC236}">
+                <a16:creationId xmlns:a16="http://schemas.microsoft.com/office/drawing/2014/main" id="{7BFDC57F-F14A-009F-EA6A-A05451F013BC}"/>
+              </a:ext>
+            </a:extLst>
+          </p:cNvPr>
+          <p:cNvSpPr>
+            <a:spLocks noChangeAspect="1" noChangeArrowheads="1"/>
+          </p:cNvSpPr>
+          <p:nvPr/>
+        </p:nvSpPr>
+        <p:spPr bwMode="auto">
+          <a:xfrm>
+            <a:off x="5943600" y="3276600"/>
+            <a:ext cx="304800" cy="304800"/>
+          </a:xfrm>
+          <a:prstGeom prst="rect">
+            <a:avLst/>
+          </a:prstGeom>
+          <a:noFill/>
+          <a:extLst>
+            <a:ext uri="{909E8E84-426E-40DD-AFC4-6F175D3DCCD1}">
+              <a14:hiddenFill xmlns:a14="http://schemas.microsoft.com/office/drawing/2010/main">
+                <a:solidFill>
+                  <a:srgbClr val="FFFFFF"/>
+                </a:solidFill>
+              </a14:hiddenFill>
+            </a:ext>
+          </a:extLst>
+        </p:spPr>
+        <p:txBody>
+          <a:bodyPr vert="horz" wrap="square" lIns="91440" tIns="45720" rIns="91440" bIns="45720" numCol="1" anchor="t" anchorCtr="0" compatLnSpc="1">
+            <a:prstTxWarp prst="textNoShape">
+              <a:avLst/>
+            </a:prstTxWarp>
+          </a:bodyPr>
+          <a:lstStyle/>
+          <a:p>
+            <a:endParaRPr lang="ko-KR" altLang="en-US"/>
+          </a:p>
+        </p:txBody>
+      </p:sp>
+      <p:sp>
+        <p:nvSpPr>
+          <p:cNvPr id="5" name="TextBox 4">
+            <a:extLst>
+              <a:ext uri="{FF2B5EF4-FFF2-40B4-BE49-F238E27FC236}">
+                <a16:creationId xmlns:a16="http://schemas.microsoft.com/office/drawing/2014/main" id="{0A5E14F8-BD4B-7F9C-69F2-223D5A55C75A}"/>
+              </a:ext>
+            </a:extLst>
+          </p:cNvPr>
+          <p:cNvSpPr txBox="1"/>
+          <p:nvPr/>
+        </p:nvSpPr>
+        <p:spPr>
+          <a:xfrm>
+            <a:off x="602734" y="1712000"/>
+            <a:ext cx="11291331" cy="4324261"/>
+          </a:xfrm>
+          <a:prstGeom prst="rect">
+            <a:avLst/>
+          </a:prstGeom>
+          <a:noFill/>
+        </p:spPr>
+        <p:txBody>
+          <a:bodyPr wrap="square">
+            <a:spAutoFit/>
+          </a:bodyPr>
+          <a:lstStyle/>
+          <a:p>
+            <a:r>
+              <a:rPr lang="ko-KR" altLang="en-US" b="1" dirty="0">
+                <a:latin typeface="D2Coding" panose="020B0609020101020101" pitchFamily="49" charset="-127"/>
+                <a:ea typeface="D2Coding" panose="020B0609020101020101" pitchFamily="49" charset="-127"/>
+              </a:rPr>
+              <a:t>① 2006년 이전: 인공지능의 2차 암흑기</a:t>
+            </a:r>
+          </a:p>
+          <a:p>
+            <a:pPr marL="285750" indent="-285750">
+              <a:buFont typeface="Wingdings" panose="05000000000000000000" pitchFamily="2" charset="2"/>
+              <a:buChar char="§"/>
+            </a:pPr>
+            <a:r>
+              <a:rPr lang="ko-KR" altLang="en-US" sz="1700" dirty="0">
+                <a:latin typeface="D2Coding" panose="020B0609020101020101" pitchFamily="49" charset="-127"/>
+                <a:ea typeface="D2Coding" panose="020B0609020101020101" pitchFamily="49" charset="-127"/>
+              </a:rPr>
+              <a:t>당시 과학자들은 레이어가 깊어질수록 가중치 초기화가 조금만 잘못되어도 신호가 아예 사라지는 기울기 소실(</a:t>
+            </a:r>
+            <a:r>
+              <a:rPr lang="ko-KR" altLang="en-US" sz="1700" dirty="0" err="1">
+                <a:latin typeface="D2Coding" panose="020B0609020101020101" pitchFamily="49" charset="-127"/>
+                <a:ea typeface="D2Coding" panose="020B0609020101020101" pitchFamily="49" charset="-127"/>
+              </a:rPr>
+              <a:t>Vanishing</a:t>
+            </a:r>
+            <a:r>
+              <a:rPr lang="ko-KR" altLang="en-US" sz="1700" dirty="0">
+                <a:latin typeface="D2Coding" panose="020B0609020101020101" pitchFamily="49" charset="-127"/>
+                <a:ea typeface="D2Coding" panose="020B0609020101020101" pitchFamily="49" charset="-127"/>
+              </a:rPr>
+              <a:t> </a:t>
+            </a:r>
+            <a:r>
+              <a:rPr lang="ko-KR" altLang="en-US" sz="1700" dirty="0" err="1">
+                <a:latin typeface="D2Coding" panose="020B0609020101020101" pitchFamily="49" charset="-127"/>
+                <a:ea typeface="D2Coding" panose="020B0609020101020101" pitchFamily="49" charset="-127"/>
+              </a:rPr>
+              <a:t>Gradient</a:t>
+            </a:r>
+            <a:r>
+              <a:rPr lang="ko-KR" altLang="en-US" sz="1700" dirty="0">
+                <a:latin typeface="D2Coding" panose="020B0609020101020101" pitchFamily="49" charset="-127"/>
+                <a:ea typeface="D2Coding" panose="020B0609020101020101" pitchFamily="49" charset="-127"/>
+              </a:rPr>
+              <a:t>) 문제를 풀지 못했기 때문에 인공신경망 연구는 사장될 위기에 처함</a:t>
+            </a:r>
+          </a:p>
+          <a:p>
+            <a:endParaRPr lang="ko-KR" altLang="en-US" sz="1700" dirty="0">
+              <a:latin typeface="D2Coding" panose="020B0609020101020101" pitchFamily="49" charset="-127"/>
+              <a:ea typeface="D2Coding" panose="020B0609020101020101" pitchFamily="49" charset="-127"/>
+            </a:endParaRPr>
+          </a:p>
+          <a:p>
+            <a:r>
+              <a:rPr lang="ko-KR" altLang="en-US" b="1" dirty="0">
+                <a:latin typeface="D2Coding" panose="020B0609020101020101" pitchFamily="49" charset="-127"/>
+                <a:ea typeface="D2Coding" panose="020B0609020101020101" pitchFamily="49" charset="-127"/>
+              </a:rPr>
+              <a:t>② 2006년 힌튼 교수의 돌파구: </a:t>
+            </a:r>
+            <a:r>
+              <a:rPr lang="ko-KR" altLang="en-US" b="1" dirty="0" err="1">
+                <a:latin typeface="D2Coding" panose="020B0609020101020101" pitchFamily="49" charset="-127"/>
+                <a:ea typeface="D2Coding" panose="020B0609020101020101" pitchFamily="49" charset="-127"/>
+              </a:rPr>
+              <a:t>RBM을</a:t>
+            </a:r>
+            <a:r>
+              <a:rPr lang="ko-KR" altLang="en-US" b="1" dirty="0">
+                <a:latin typeface="D2Coding" panose="020B0609020101020101" pitchFamily="49" charset="-127"/>
+                <a:ea typeface="D2Coding" panose="020B0609020101020101" pitchFamily="49" charset="-127"/>
+              </a:rPr>
+              <a:t> 통한 사전학습</a:t>
+            </a:r>
+          </a:p>
+          <a:p>
+            <a:pPr marL="285750" indent="-285750">
+              <a:buFont typeface="Wingdings" panose="05000000000000000000" pitchFamily="2" charset="2"/>
+              <a:buChar char="§"/>
+            </a:pPr>
+            <a:r>
+              <a:rPr lang="ko-KR" altLang="en-US" sz="1700" dirty="0">
+                <a:latin typeface="D2Coding" panose="020B0609020101020101" pitchFamily="49" charset="-127"/>
+                <a:ea typeface="D2Coding" panose="020B0609020101020101" pitchFamily="49" charset="-127"/>
+              </a:rPr>
+              <a:t>이때 </a:t>
+            </a:r>
+            <a:r>
+              <a:rPr lang="ko-KR" altLang="en-US" sz="1700" dirty="0" err="1">
+                <a:latin typeface="D2Coding" panose="020B0609020101020101" pitchFamily="49" charset="-127"/>
+                <a:ea typeface="D2Coding" panose="020B0609020101020101" pitchFamily="49" charset="-127"/>
+              </a:rPr>
+              <a:t>제프리</a:t>
+            </a:r>
+            <a:r>
+              <a:rPr lang="ko-KR" altLang="en-US" sz="1700" dirty="0">
+                <a:latin typeface="D2Coding" panose="020B0609020101020101" pitchFamily="49" charset="-127"/>
+                <a:ea typeface="D2Coding" panose="020B0609020101020101" pitchFamily="49" charset="-127"/>
+              </a:rPr>
+              <a:t> 힌튼 교수가 "그럼 정답 없는 데이터로 먼저 뼈대(가중치)</a:t>
+            </a:r>
+            <a:r>
+              <a:rPr lang="ko-KR" altLang="en-US" sz="1700" dirty="0" err="1">
+                <a:latin typeface="D2Coding" panose="020B0609020101020101" pitchFamily="49" charset="-127"/>
+                <a:ea typeface="D2Coding" panose="020B0609020101020101" pitchFamily="49" charset="-127"/>
+              </a:rPr>
+              <a:t>를</a:t>
+            </a:r>
+            <a:r>
+              <a:rPr lang="ko-KR" altLang="en-US" sz="1700" dirty="0">
+                <a:latin typeface="D2Coding" panose="020B0609020101020101" pitchFamily="49" charset="-127"/>
+                <a:ea typeface="D2Coding" panose="020B0609020101020101" pitchFamily="49" charset="-127"/>
+              </a:rPr>
+              <a:t> 잘 잡아두고 시작하자!"</a:t>
+            </a:r>
+            <a:r>
+              <a:rPr lang="ko-KR" altLang="en-US" sz="1700" dirty="0" err="1">
+                <a:latin typeface="D2Coding" panose="020B0609020101020101" pitchFamily="49" charset="-127"/>
+                <a:ea typeface="D2Coding" panose="020B0609020101020101" pitchFamily="49" charset="-127"/>
+              </a:rPr>
+              <a:t>며</a:t>
+            </a:r>
+            <a:r>
+              <a:rPr lang="ko-KR" altLang="en-US" sz="1700" dirty="0">
+                <a:latin typeface="D2Coding" panose="020B0609020101020101" pitchFamily="49" charset="-127"/>
+                <a:ea typeface="D2Coding" panose="020B0609020101020101" pitchFamily="49" charset="-127"/>
+              </a:rPr>
+              <a:t> RBM(제한된 볼츠만 머신) 비지도 학습 모델로 </a:t>
+            </a:r>
+            <a:endParaRPr lang="en-US" altLang="ko-KR" sz="1700" dirty="0">
+              <a:latin typeface="D2Coding" panose="020B0609020101020101" pitchFamily="49" charset="-127"/>
+              <a:ea typeface="D2Coding" panose="020B0609020101020101" pitchFamily="49" charset="-127"/>
+            </a:endParaRPr>
+          </a:p>
+          <a:p>
+            <a:pPr marL="285750" indent="-285750">
+              <a:buFont typeface="Wingdings" panose="05000000000000000000" pitchFamily="2" charset="2"/>
+              <a:buChar char="§"/>
+            </a:pPr>
+            <a:r>
+              <a:rPr lang="ko-KR" altLang="en-US" sz="1700" dirty="0">
+                <a:latin typeface="D2Coding" panose="020B0609020101020101" pitchFamily="49" charset="-127"/>
+                <a:ea typeface="D2Coding" panose="020B0609020101020101" pitchFamily="49" charset="-127"/>
+              </a:rPr>
+              <a:t>층을 한 단계씩 쌓아 올릴 때마다 정답 없는 데이터를 넣어 가중치가 엉뚱한 곳으로 튀지 않게 기초 가이드라인(사전학습)을 잡고</a:t>
+            </a:r>
+          </a:p>
+          <a:p>
+            <a:pPr marL="285750" indent="-285750">
+              <a:buFont typeface="Wingdings" panose="05000000000000000000" pitchFamily="2" charset="2"/>
+              <a:buChar char="§"/>
+            </a:pPr>
+            <a:r>
+              <a:rPr lang="ko-KR" altLang="en-US" sz="1700" dirty="0">
+                <a:latin typeface="D2Coding" panose="020B0609020101020101" pitchFamily="49" charset="-127"/>
+                <a:ea typeface="D2Coding" panose="020B0609020101020101" pitchFamily="49" charset="-127"/>
+              </a:rPr>
+              <a:t>이렇게 뼈대를 잘 잡아두고 마지막에 지도 학습(</a:t>
+            </a:r>
+            <a:r>
+              <a:rPr lang="ko-KR" altLang="en-US" sz="1700" dirty="0" err="1">
+                <a:latin typeface="D2Coding" panose="020B0609020101020101" pitchFamily="49" charset="-127"/>
+                <a:ea typeface="D2Coding" panose="020B0609020101020101" pitchFamily="49" charset="-127"/>
+              </a:rPr>
+              <a:t>Fine-tuning</a:t>
+            </a:r>
+            <a:r>
+              <a:rPr lang="ko-KR" altLang="en-US" sz="1700" dirty="0">
+                <a:latin typeface="D2Coding" panose="020B0609020101020101" pitchFamily="49" charset="-127"/>
+                <a:ea typeface="D2Coding" panose="020B0609020101020101" pitchFamily="49" charset="-127"/>
+              </a:rPr>
+              <a:t>)을 하니, 신기하게도 깊은 신경망이 드디어 정상적으로 작동하기 시작했으며 침체된 인공신경망을 다시 부활시킨 '딥러닝(</a:t>
+            </a:r>
+            <a:r>
+              <a:rPr lang="ko-KR" altLang="en-US" sz="1700" dirty="0" err="1">
+                <a:latin typeface="D2Coding" panose="020B0609020101020101" pitchFamily="49" charset="-127"/>
+                <a:ea typeface="D2Coding" panose="020B0609020101020101" pitchFamily="49" charset="-127"/>
+              </a:rPr>
+              <a:t>Deep</a:t>
+            </a:r>
+            <a:r>
+              <a:rPr lang="ko-KR" altLang="en-US" sz="1700" dirty="0">
+                <a:latin typeface="D2Coding" panose="020B0609020101020101" pitchFamily="49" charset="-127"/>
+                <a:ea typeface="D2Coding" panose="020B0609020101020101" pitchFamily="49" charset="-127"/>
+              </a:rPr>
+              <a:t> </a:t>
+            </a:r>
+            <a:r>
+              <a:rPr lang="ko-KR" altLang="en-US" sz="1700" dirty="0" err="1">
+                <a:latin typeface="D2Coding" panose="020B0609020101020101" pitchFamily="49" charset="-127"/>
+                <a:ea typeface="D2Coding" panose="020B0609020101020101" pitchFamily="49" charset="-127"/>
+              </a:rPr>
+              <a:t>Learning</a:t>
+            </a:r>
+            <a:r>
+              <a:rPr lang="ko-KR" altLang="en-US" sz="1700" dirty="0">
+                <a:latin typeface="D2Coding" panose="020B0609020101020101" pitchFamily="49" charset="-127"/>
+                <a:ea typeface="D2Coding" panose="020B0609020101020101" pitchFamily="49" charset="-127"/>
+              </a:rPr>
+              <a:t>)＇의 서막</a:t>
+            </a:r>
+          </a:p>
+          <a:p>
+            <a:endParaRPr lang="ko-KR" altLang="en-US" sz="1700" dirty="0">
+              <a:latin typeface="D2Coding" panose="020B0609020101020101" pitchFamily="49" charset="-127"/>
+              <a:ea typeface="D2Coding" panose="020B0609020101020101" pitchFamily="49" charset="-127"/>
+            </a:endParaRPr>
+          </a:p>
+          <a:p>
+            <a:r>
+              <a:rPr lang="ko-KR" altLang="en-US" b="1" dirty="0">
+                <a:latin typeface="D2Coding" panose="020B0609020101020101" pitchFamily="49" charset="-127"/>
+                <a:ea typeface="D2Coding" panose="020B0609020101020101" pitchFamily="49" charset="-127"/>
+              </a:rPr>
+              <a:t>③ 2010년 이후: 순수 지도학습의 시대</a:t>
+            </a:r>
+          </a:p>
+          <a:p>
+            <a:pPr marL="285750" indent="-285750">
+              <a:buFont typeface="Wingdings" panose="05000000000000000000" pitchFamily="2" charset="2"/>
+              <a:buChar char="§"/>
+            </a:pPr>
+            <a:r>
+              <a:rPr lang="ko-KR" altLang="en-US" sz="1700" dirty="0" err="1">
+                <a:latin typeface="D2Coding" panose="020B0609020101020101" pitchFamily="49" charset="-127"/>
+                <a:ea typeface="D2Coding" panose="020B0609020101020101" pitchFamily="49" charset="-127"/>
+              </a:rPr>
+              <a:t>ReLU</a:t>
+            </a:r>
+            <a:r>
+              <a:rPr lang="ko-KR" altLang="en-US" sz="1700" dirty="0">
+                <a:latin typeface="D2Coding" panose="020B0609020101020101" pitchFamily="49" charset="-127"/>
+                <a:ea typeface="D2Coding" panose="020B0609020101020101" pitchFamily="49" charset="-127"/>
+              </a:rPr>
+              <a:t> 같은 혁신적인 활성화 함수가 나와서 기울기 소실을 물리적으로 막아냈고,</a:t>
+            </a:r>
+          </a:p>
+          <a:p>
+            <a:pPr marL="285750" indent="-285750">
+              <a:buFont typeface="Wingdings" panose="05000000000000000000" pitchFamily="2" charset="2"/>
+              <a:buChar char="§"/>
+            </a:pPr>
+            <a:r>
+              <a:rPr lang="ko-KR" altLang="en-US" sz="1700" dirty="0" err="1">
+                <a:latin typeface="D2Coding" panose="020B0609020101020101" pitchFamily="49" charset="-127"/>
+                <a:ea typeface="D2Coding" panose="020B0609020101020101" pitchFamily="49" charset="-127"/>
+              </a:rPr>
+              <a:t>He</a:t>
+            </a:r>
+            <a:r>
+              <a:rPr lang="ko-KR" altLang="en-US" sz="1700" dirty="0">
+                <a:latin typeface="D2Coding" panose="020B0609020101020101" pitchFamily="49" charset="-127"/>
+                <a:ea typeface="D2Coding" panose="020B0609020101020101" pitchFamily="49" charset="-127"/>
+              </a:rPr>
+              <a:t> 초기화, </a:t>
+            </a:r>
+            <a:r>
+              <a:rPr lang="ko-KR" altLang="en-US" sz="1700" dirty="0" err="1">
+                <a:latin typeface="D2Coding" panose="020B0609020101020101" pitchFamily="49" charset="-127"/>
+                <a:ea typeface="D2Coding" panose="020B0609020101020101" pitchFamily="49" charset="-127"/>
+              </a:rPr>
+              <a:t>Xavier</a:t>
+            </a:r>
+            <a:r>
+              <a:rPr lang="ko-KR" altLang="en-US" sz="1700" dirty="0">
+                <a:latin typeface="D2Coding" panose="020B0609020101020101" pitchFamily="49" charset="-127"/>
+                <a:ea typeface="D2Coding" panose="020B0609020101020101" pitchFamily="49" charset="-127"/>
+              </a:rPr>
+              <a:t> 초기화 같은 똑똑한 가중치 초기화 기법(</a:t>
+            </a:r>
+            <a:r>
+              <a:rPr lang="ko-KR" altLang="en-US" sz="1700" dirty="0" err="1">
+                <a:latin typeface="D2Coding" panose="020B0609020101020101" pitchFamily="49" charset="-127"/>
+                <a:ea typeface="D2Coding" panose="020B0609020101020101" pitchFamily="49" charset="-127"/>
+              </a:rPr>
+              <a:t>kernel_initializer</a:t>
+            </a:r>
+            <a:r>
+              <a:rPr lang="ko-KR" altLang="en-US" sz="1700" dirty="0">
+                <a:latin typeface="D2Coding" panose="020B0609020101020101" pitchFamily="49" charset="-127"/>
+                <a:ea typeface="D2Coding" panose="020B0609020101020101" pitchFamily="49" charset="-127"/>
+              </a:rPr>
+              <a:t>)이 등장했으며,</a:t>
+            </a:r>
+          </a:p>
+          <a:p>
+            <a:pPr marL="285750" indent="-285750">
+              <a:buFont typeface="Wingdings" panose="05000000000000000000" pitchFamily="2" charset="2"/>
+              <a:buChar char="§"/>
+            </a:pPr>
+            <a:r>
+              <a:rPr lang="ko-KR" altLang="en-US" sz="1700" dirty="0">
+                <a:latin typeface="D2Coding" panose="020B0609020101020101" pitchFamily="49" charset="-127"/>
+                <a:ea typeface="D2Coding" panose="020B0609020101020101" pitchFamily="49" charset="-127"/>
+              </a:rPr>
+              <a:t>배치 정규화(</a:t>
+            </a:r>
+            <a:r>
+              <a:rPr lang="ko-KR" altLang="en-US" sz="1700" dirty="0" err="1">
+                <a:latin typeface="D2Coding" panose="020B0609020101020101" pitchFamily="49" charset="-127"/>
+                <a:ea typeface="D2Coding" panose="020B0609020101020101" pitchFamily="49" charset="-127"/>
+              </a:rPr>
+              <a:t>Batch</a:t>
+            </a:r>
+            <a:r>
+              <a:rPr lang="ko-KR" altLang="en-US" sz="1700" dirty="0">
+                <a:latin typeface="D2Coding" panose="020B0609020101020101" pitchFamily="49" charset="-127"/>
+                <a:ea typeface="D2Coding" panose="020B0609020101020101" pitchFamily="49" charset="-127"/>
+              </a:rPr>
+              <a:t> </a:t>
+            </a:r>
+            <a:r>
+              <a:rPr lang="ko-KR" altLang="en-US" sz="1700" dirty="0" err="1">
+                <a:latin typeface="D2Coding" panose="020B0609020101020101" pitchFamily="49" charset="-127"/>
+                <a:ea typeface="D2Coding" panose="020B0609020101020101" pitchFamily="49" charset="-127"/>
+              </a:rPr>
+              <a:t>Normalization</a:t>
+            </a:r>
+            <a:r>
+              <a:rPr lang="ko-KR" altLang="en-US" sz="1700" dirty="0">
+                <a:latin typeface="D2Coding" panose="020B0609020101020101" pitchFamily="49" charset="-127"/>
+                <a:ea typeface="D2Coding" panose="020B0609020101020101" pitchFamily="49" charset="-127"/>
+              </a:rPr>
+              <a:t>)가 출현</a:t>
+            </a:r>
+          </a:p>
+        </p:txBody>
+      </p:sp>
+    </p:spTree>
+    <p:extLst>
+      <p:ext uri="{BB962C8B-B14F-4D97-AF65-F5344CB8AC3E}">
+        <p14:creationId xmlns:p14="http://schemas.microsoft.com/office/powerpoint/2010/main" val="175567129"/>
       </p:ext>
     </p:extLst>
   </p:cSld>
